--- a/agents/.agents/skills/research-slides/assets/research-slides-template.pptx
+++ b/agents/.agents/skills/research-slides/assets/research-slides-template.pptx
@@ -121,10 +121,10 @@
   <p:extLst>
     <p:ext uri="{521415D9-36F7-43E2-AB2F-B90AF26B5E84}">
       <p14:sectionLst xmlns:p14="http://schemas.microsoft.com/office/powerpoint/2010/main">
-        <p14:section name="Templates" id="{f69eb5fe-3a82-a670-4bb5-c62c857addf5}">
+        <p14:section name="Templates" id="{e547fee6-67e7-8e17-fddc-e417c2337ab3}">
           <p14:sldIdLst/>
         </p14:section>
-        <p14:section name="Default-1" id="{1f7dc431-2f6d-9986-9542-b5809e0144ad}">
+        <p14:section name="Default-1" id="{0e0066a8-0bd3-490c-7603-a8bb4e3f8250}">
           <p14:sldIdLst>
             <p14:sldId id="256"/>
             <p14:sldId id="257"/>
@@ -1904,90 +1904,6 @@
           <a:ln/>
         </p:spPr>
       </p:sp>
-      <p:sp>
-        <p:nvSpPr>
-          <p:cNvPr id="3" name="Text 1"/>
-          <p:cNvSpPr/>
-          <p:nvPr>
-            <p:ph idx="101" hasCustomPrompt="1"/>
-          </p:nvPr>
-        </p:nvSpPr>
-        <p:spPr>
-          <a:xfrm>
-            <a:off x="310896" y="1682496"/>
-            <a:ext cx="8522208" cy="1773936"/>
-          </a:xfrm>
-          <a:prstGeom prst="rect">
-            <a:avLst/>
-          </a:prstGeom>
-          <a:noFill/>
-          <a:ln/>
-        </p:spPr>
-        <p:txBody>
-          <a:bodyPr wrap="square" rtlCol="0"/>
-          <a:lstStyle>
-            <a:lvl1pPr algn="l" indent="0" marL="0">
-              <a:buNone/>
-              <a:defRPr lang="en-US" sz="2600" b="1" dirty="0">
-                <a:solidFill>
-                  <a:schemeClr val="tx1"/>
-                </a:solidFill>
-                <a:latin typeface="Arial" pitchFamily="34" charset="0"/>
-                <a:ea typeface="Arial" pitchFamily="34" charset="-122"/>
-                <a:cs typeface="Arial" pitchFamily="34" charset="-120"/>
-              </a:defRPr>
-            </a:lvl1pPr>
-          </a:lstStyle>
-          <a:p>
-            <a:pPr algn="l" indent="0" marL="0">
-              <a:buNone/>
-            </a:pPr>
-            <a:endParaRPr lang="en-US" sz="2600" dirty="0"/>
-          </a:p>
-        </p:txBody>
-      </p:sp>
-      <p:sp>
-        <p:nvSpPr>
-          <p:cNvPr id="4" name="Text 1"/>
-          <p:cNvSpPr/>
-          <p:nvPr>
-            <p:ph idx="102" type="body" hasCustomPrompt="1"/>
-          </p:nvPr>
-        </p:nvSpPr>
-        <p:spPr>
-          <a:xfrm>
-            <a:off x="329184" y="3968496"/>
-            <a:ext cx="8522208" cy="914400"/>
-          </a:xfrm>
-          <a:prstGeom prst="rect">
-            <a:avLst/>
-          </a:prstGeom>
-          <a:noFill/>
-          <a:ln/>
-        </p:spPr>
-        <p:txBody>
-          <a:bodyPr wrap="square" rtlCol="0"/>
-          <a:lstStyle>
-            <a:lvl1pPr algn="l" indent="0" marL="0">
-              <a:buNone/>
-              <a:defRPr lang="en-US" sz="1400" b="1" dirty="0">
-                <a:solidFill>
-                  <a:schemeClr val="tx2"/>
-                </a:solidFill>
-                <a:latin typeface="Times New Roman" pitchFamily="34" charset="0"/>
-                <a:ea typeface="Times New Roman" pitchFamily="34" charset="-122"/>
-                <a:cs typeface="Times New Roman" pitchFamily="34" charset="-120"/>
-              </a:defRPr>
-            </a:lvl1pPr>
-          </a:lstStyle>
-          <a:p>
-            <a:pPr algn="l" indent="0" marL="0">
-              <a:buNone/>
-            </a:pPr>
-            <a:endParaRPr lang="en-US" sz="1400" dirty="0"/>
-          </a:p>
-        </p:txBody>
-      </p:sp>
     </p:spTree>
   </p:cSld>
   <p:clrMapOvr>
@@ -2051,90 +1967,6 @@
       </p:sp>
       <p:sp>
         <p:nvSpPr>
-          <p:cNvPr id="3" name="Text 1"/>
-          <p:cNvSpPr/>
-          <p:nvPr>
-            <p:ph idx="101" hasCustomPrompt="1"/>
-          </p:nvPr>
-        </p:nvSpPr>
-        <p:spPr>
-          <a:xfrm>
-            <a:off x="310896" y="1682496"/>
-            <a:ext cx="8522208" cy="1773936"/>
-          </a:xfrm>
-          <a:prstGeom prst="rect">
-            <a:avLst/>
-          </a:prstGeom>
-          <a:noFill/>
-          <a:ln/>
-        </p:spPr>
-        <p:txBody>
-          <a:bodyPr wrap="square" rtlCol="0"/>
-          <a:lstStyle>
-            <a:lvl1pPr algn="l" indent="0" marL="0">
-              <a:buNone/>
-              <a:defRPr lang="en-US" sz="2600" b="1" dirty="0">
-                <a:solidFill>
-                  <a:schemeClr val="tx1"/>
-                </a:solidFill>
-                <a:latin typeface="Arial" pitchFamily="34" charset="0"/>
-                <a:ea typeface="Arial" pitchFamily="34" charset="-122"/>
-                <a:cs typeface="Arial" pitchFamily="34" charset="-120"/>
-              </a:defRPr>
-            </a:lvl1pPr>
-          </a:lstStyle>
-          <a:p>
-            <a:pPr algn="l" indent="0" marL="0">
-              <a:buNone/>
-            </a:pPr>
-            <a:endParaRPr lang="en-US" sz="2600" dirty="0"/>
-          </a:p>
-        </p:txBody>
-      </p:sp>
-      <p:sp>
-        <p:nvSpPr>
-          <p:cNvPr id="4" name="Text 1"/>
-          <p:cNvSpPr/>
-          <p:nvPr>
-            <p:ph idx="104" hasCustomPrompt="1"/>
-          </p:nvPr>
-        </p:nvSpPr>
-        <p:spPr>
-          <a:xfrm>
-            <a:off x="0" y="4791456"/>
-            <a:ext cx="7863840" cy="356616"/>
-          </a:xfrm>
-          <a:prstGeom prst="rect">
-            <a:avLst/>
-          </a:prstGeom>
-          <a:noFill/>
-          <a:ln/>
-        </p:spPr>
-        <p:txBody>
-          <a:bodyPr wrap="square" rtlCol="0"/>
-          <a:lstStyle>
-            <a:lvl1pPr indent="0" marL="0">
-              <a:buNone/>
-              <a:defRPr lang="en-US" sz="800" dirty="0">
-                <a:solidFill>
-                  <a:schemeClr val="tx1"/>
-                </a:solidFill>
-                <a:latin typeface="Arial" pitchFamily="34" charset="0"/>
-                <a:ea typeface="Arial" pitchFamily="34" charset="-122"/>
-                <a:cs typeface="Arial" pitchFamily="34" charset="-120"/>
-              </a:defRPr>
-            </a:lvl1pPr>
-          </a:lstStyle>
-          <a:p>
-            <a:pPr indent="0" marL="0">
-              <a:buNone/>
-            </a:pPr>
-            <a:endParaRPr lang="en-US" sz="800" dirty="0"/>
-          </a:p>
-        </p:txBody>
-      </p:sp>
-      <p:sp>
-        <p:nvSpPr>
           <p:cNvPr id="25" name="Slide Number Placeholder 0"/>
           <p:cNvSpPr>
             <a:spLocks noGrp="1"/>
@@ -2163,7 +1995,7 @@
             <a:lvl1pPr>
               <a:defRPr sz="1200">
                 <a:solidFill>
-                  <a:schemeClr val="tx1"/>
+                  <a:srgbClr val="000000"/>
                 </a:solidFill>
                 <a:latin typeface="Arial"/>
                 <a:ea typeface="Arial"/>
@@ -2215,48 +2047,6 @@
       </p:grpSpPr>
       <p:sp>
         <p:nvSpPr>
-          <p:cNvPr id="2" name="Text 0"/>
-          <p:cNvSpPr/>
-          <p:nvPr>
-            <p:ph idx="100" type="title" hasCustomPrompt="1"/>
-          </p:nvPr>
-        </p:nvSpPr>
-        <p:spPr>
-          <a:xfrm>
-            <a:off x="301752" y="2350008"/>
-            <a:ext cx="8531352" cy="438912"/>
-          </a:xfrm>
-          <a:prstGeom prst="rect">
-            <a:avLst/>
-          </a:prstGeom>
-          <a:noFill/>
-          <a:ln/>
-        </p:spPr>
-        <p:txBody>
-          <a:bodyPr wrap="square" rtlCol="0"/>
-          <a:lstStyle>
-            <a:lvl1pPr algn="ctr" indent="0" marL="0">
-              <a:buNone/>
-              <a:defRPr lang="en-US" sz="2200" dirty="0">
-                <a:solidFill>
-                  <a:schemeClr val="tx1"/>
-                </a:solidFill>
-                <a:latin typeface="Arial" pitchFamily="34" charset="0"/>
-                <a:ea typeface="Arial" pitchFamily="34" charset="-122"/>
-                <a:cs typeface="Arial" pitchFamily="34" charset="-120"/>
-              </a:defRPr>
-            </a:lvl1pPr>
-          </a:lstStyle>
-          <a:p>
-            <a:pPr algn="ctr" indent="0" marL="0">
-              <a:buNone/>
-            </a:pPr>
-            <a:endParaRPr lang="en-US" sz="2200" dirty="0"/>
-          </a:p>
-        </p:txBody>
-      </p:sp>
-      <p:sp>
-        <p:nvSpPr>
           <p:cNvPr id="25" name="Slide Number Placeholder 0"/>
           <p:cNvSpPr>
             <a:spLocks noGrp="1"/>
@@ -2285,7 +2075,7 @@
             <a:lvl1pPr>
               <a:defRPr sz="1200">
                 <a:solidFill>
-                  <a:schemeClr val="tx1"/>
+                  <a:srgbClr val="000000"/>
                 </a:solidFill>
                 <a:latin typeface="Arial"/>
                 <a:ea typeface="Arial"/>
@@ -2337,91 +2127,7 @@
       </p:grpSpPr>
       <p:sp>
         <p:nvSpPr>
-          <p:cNvPr id="2" name="Text 0"/>
-          <p:cNvSpPr/>
-          <p:nvPr>
-            <p:ph idx="100" hasCustomPrompt="1"/>
-          </p:nvPr>
-        </p:nvSpPr>
-        <p:spPr>
-          <a:xfrm>
-            <a:off x="365760" y="182880"/>
-            <a:ext cx="8412480" cy="411480"/>
-          </a:xfrm>
-          <a:prstGeom prst="rect">
-            <a:avLst/>
-          </a:prstGeom>
-          <a:noFill/>
-          <a:ln/>
-        </p:spPr>
-        <p:txBody>
-          <a:bodyPr wrap="square" rtlCol="0"/>
-          <a:lstStyle>
-            <a:lvl1pPr algn="l" indent="0" marL="0">
-              <a:buNone/>
-              <a:defRPr lang="en-US" sz="2200" dirty="0">
-                <a:solidFill>
-                  <a:schemeClr val="tx1"/>
-                </a:solidFill>
-                <a:latin typeface="Arial" pitchFamily="34" charset="0"/>
-                <a:ea typeface="Arial" pitchFamily="34" charset="-122"/>
-                <a:cs typeface="Arial" pitchFamily="34" charset="-120"/>
-              </a:defRPr>
-            </a:lvl1pPr>
-          </a:lstStyle>
-          <a:p>
-            <a:pPr algn="l" indent="0" marL="0">
-              <a:buNone/>
-            </a:pPr>
-            <a:endParaRPr lang="en-US" sz="2200" dirty="0"/>
-          </a:p>
-        </p:txBody>
-      </p:sp>
-      <p:sp>
-        <p:nvSpPr>
-          <p:cNvPr id="3" name="Text 0"/>
-          <p:cNvSpPr/>
-          <p:nvPr>
-            <p:ph idx="101" hasCustomPrompt="1"/>
-          </p:nvPr>
-        </p:nvSpPr>
-        <p:spPr>
-          <a:xfrm>
-            <a:off x="365760" y="576072"/>
-            <a:ext cx="8412480" cy="274320"/>
-          </a:xfrm>
-          <a:prstGeom prst="rect">
-            <a:avLst/>
-          </a:prstGeom>
-          <a:noFill/>
-          <a:ln/>
-        </p:spPr>
-        <p:txBody>
-          <a:bodyPr wrap="square" rtlCol="0"/>
-          <a:lstStyle>
-            <a:lvl1pPr algn="l" indent="0" marL="0">
-              <a:buNone/>
-              <a:defRPr lang="en-US" sz="1250" dirty="0">
-                <a:solidFill>
-                  <a:schemeClr val="accent1"/>
-                </a:solidFill>
-                <a:latin typeface="Arial" pitchFamily="34" charset="0"/>
-                <a:ea typeface="Arial" pitchFamily="34" charset="-122"/>
-                <a:cs typeface="Arial" pitchFamily="34" charset="-120"/>
-              </a:defRPr>
-            </a:lvl1pPr>
-          </a:lstStyle>
-          <a:p>
-            <a:pPr algn="l" indent="0" marL="0">
-              <a:buNone/>
-            </a:pPr>
-            <a:endParaRPr lang="en-US" sz="1250" dirty="0"/>
-          </a:p>
-        </p:txBody>
-      </p:sp>
-      <p:sp>
-        <p:nvSpPr>
-          <p:cNvPr id="4" name="Shape 0"/>
+          <p:cNvPr id="2" name="Shape 0"/>
           <p:cNvSpPr/>
           <p:nvPr/>
         </p:nvSpPr>
@@ -2436,53 +2142,11 @@
           <a:noFill/>
           <a:ln w="12700">
             <a:solidFill>
-              <a:schemeClr val="tx1"/>
+              <a:srgbClr val="000000"/>
             </a:solidFill>
             <a:prstDash val="solid"/>
           </a:ln>
         </p:spPr>
-      </p:sp>
-      <p:sp>
-        <p:nvSpPr>
-          <p:cNvPr id="5" name="Text 1"/>
-          <p:cNvSpPr/>
-          <p:nvPr>
-            <p:ph idx="104" hasCustomPrompt="1"/>
-          </p:nvPr>
-        </p:nvSpPr>
-        <p:spPr>
-          <a:xfrm>
-            <a:off x="0" y="4791456"/>
-            <a:ext cx="7863840" cy="356616"/>
-          </a:xfrm>
-          <a:prstGeom prst="rect">
-            <a:avLst/>
-          </a:prstGeom>
-          <a:noFill/>
-          <a:ln/>
-        </p:spPr>
-        <p:txBody>
-          <a:bodyPr wrap="square" rtlCol="0"/>
-          <a:lstStyle>
-            <a:lvl1pPr indent="0" marL="0">
-              <a:buNone/>
-              <a:defRPr lang="en-US" sz="800" dirty="0">
-                <a:solidFill>
-                  <a:schemeClr val="tx1"/>
-                </a:solidFill>
-                <a:latin typeface="Arial" pitchFamily="34" charset="0"/>
-                <a:ea typeface="Arial" pitchFamily="34" charset="-122"/>
-                <a:cs typeface="Arial" pitchFamily="34" charset="-120"/>
-              </a:defRPr>
-            </a:lvl1pPr>
-          </a:lstStyle>
-          <a:p>
-            <a:pPr indent="0" marL="0">
-              <a:buNone/>
-            </a:pPr>
-            <a:endParaRPr lang="en-US" sz="800" dirty="0"/>
-          </a:p>
-        </p:txBody>
       </p:sp>
       <p:sp>
         <p:nvSpPr>
@@ -2514,7 +2178,7 @@
             <a:lvl1pPr>
               <a:defRPr sz="1200">
                 <a:solidFill>
-                  <a:schemeClr val="tx1"/>
+                  <a:srgbClr val="000000"/>
                 </a:solidFill>
                 <a:latin typeface="Arial"/>
                 <a:ea typeface="Arial"/>
@@ -2566,91 +2230,7 @@
       </p:grpSpPr>
       <p:sp>
         <p:nvSpPr>
-          <p:cNvPr id="2" name="Text 0"/>
-          <p:cNvSpPr/>
-          <p:nvPr>
-            <p:ph idx="100" hasCustomPrompt="1"/>
-          </p:nvPr>
-        </p:nvSpPr>
-        <p:spPr>
-          <a:xfrm>
-            <a:off x="365760" y="182880"/>
-            <a:ext cx="8412480" cy="411480"/>
-          </a:xfrm>
-          <a:prstGeom prst="rect">
-            <a:avLst/>
-          </a:prstGeom>
-          <a:noFill/>
-          <a:ln/>
-        </p:spPr>
-        <p:txBody>
-          <a:bodyPr wrap="square" rtlCol="0"/>
-          <a:lstStyle>
-            <a:lvl1pPr algn="l" indent="0" marL="0">
-              <a:buNone/>
-              <a:defRPr lang="en-US" sz="2200" dirty="0">
-                <a:solidFill>
-                  <a:schemeClr val="tx1"/>
-                </a:solidFill>
-                <a:latin typeface="Arial" pitchFamily="34" charset="0"/>
-                <a:ea typeface="Arial" pitchFamily="34" charset="-122"/>
-                <a:cs typeface="Arial" pitchFamily="34" charset="-120"/>
-              </a:defRPr>
-            </a:lvl1pPr>
-          </a:lstStyle>
-          <a:p>
-            <a:pPr algn="l" indent="0" marL="0">
-              <a:buNone/>
-            </a:pPr>
-            <a:endParaRPr lang="en-US" sz="2200" dirty="0"/>
-          </a:p>
-        </p:txBody>
-      </p:sp>
-      <p:sp>
-        <p:nvSpPr>
-          <p:cNvPr id="3" name="Text 0"/>
-          <p:cNvSpPr/>
-          <p:nvPr>
-            <p:ph idx="101" hasCustomPrompt="1"/>
-          </p:nvPr>
-        </p:nvSpPr>
-        <p:spPr>
-          <a:xfrm>
-            <a:off x="365760" y="576072"/>
-            <a:ext cx="8412480" cy="274320"/>
-          </a:xfrm>
-          <a:prstGeom prst="rect">
-            <a:avLst/>
-          </a:prstGeom>
-          <a:noFill/>
-          <a:ln/>
-        </p:spPr>
-        <p:txBody>
-          <a:bodyPr wrap="square" rtlCol="0"/>
-          <a:lstStyle>
-            <a:lvl1pPr algn="l" indent="0" marL="0">
-              <a:buNone/>
-              <a:defRPr lang="en-US" sz="1250" dirty="0">
-                <a:solidFill>
-                  <a:schemeClr val="accent1"/>
-                </a:solidFill>
-                <a:latin typeface="Arial" pitchFamily="34" charset="0"/>
-                <a:ea typeface="Arial" pitchFamily="34" charset="-122"/>
-                <a:cs typeface="Arial" pitchFamily="34" charset="-120"/>
-              </a:defRPr>
-            </a:lvl1pPr>
-          </a:lstStyle>
-          <a:p>
-            <a:pPr algn="l" indent="0" marL="0">
-              <a:buNone/>
-            </a:pPr>
-            <a:endParaRPr lang="en-US" sz="1250" dirty="0"/>
-          </a:p>
-        </p:txBody>
-      </p:sp>
-      <p:sp>
-        <p:nvSpPr>
-          <p:cNvPr id="4" name="Shape 0"/>
+          <p:cNvPr id="2" name="Shape 0"/>
           <p:cNvSpPr/>
           <p:nvPr/>
         </p:nvSpPr>
@@ -2665,95 +2245,11 @@
           <a:noFill/>
           <a:ln w="12700">
             <a:solidFill>
-              <a:schemeClr val="tx1"/>
+              <a:srgbClr val="000000"/>
             </a:solidFill>
             <a:prstDash val="solid"/>
           </a:ln>
         </p:spPr>
-      </p:sp>
-      <p:sp>
-        <p:nvSpPr>
-          <p:cNvPr id="5" name="Text 1"/>
-          <p:cNvSpPr/>
-          <p:nvPr>
-            <p:ph idx="103" type="body" hasCustomPrompt="1"/>
-          </p:nvPr>
-        </p:nvSpPr>
-        <p:spPr>
-          <a:xfrm>
-            <a:off x="301752" y="932688"/>
-            <a:ext cx="8531352" cy="557784"/>
-          </a:xfrm>
-          <a:prstGeom prst="rect">
-            <a:avLst/>
-          </a:prstGeom>
-          <a:noFill/>
-          <a:ln/>
-        </p:spPr>
-        <p:txBody>
-          <a:bodyPr wrap="square" rtlCol="0"/>
-          <a:lstStyle>
-            <a:lvl1pPr algn="l" indent="0" marL="0">
-              <a:buNone/>
-              <a:defRPr lang="en-US" sz="1200" dirty="0">
-                <a:solidFill>
-                  <a:schemeClr val="tx1"/>
-                </a:solidFill>
-                <a:latin typeface="Times New Roman" pitchFamily="34" charset="0"/>
-                <a:ea typeface="Times New Roman" pitchFamily="34" charset="-122"/>
-                <a:cs typeface="Times New Roman" pitchFamily="34" charset="-120"/>
-              </a:defRPr>
-            </a:lvl1pPr>
-          </a:lstStyle>
-          <a:p>
-            <a:pPr algn="l" indent="0" marL="0">
-              <a:buNone/>
-            </a:pPr>
-            <a:endParaRPr lang="en-US" sz="1200" dirty="0"/>
-          </a:p>
-        </p:txBody>
-      </p:sp>
-      <p:sp>
-        <p:nvSpPr>
-          <p:cNvPr id="6" name="Text 1"/>
-          <p:cNvSpPr/>
-          <p:nvPr>
-            <p:ph idx="104" hasCustomPrompt="1"/>
-          </p:nvPr>
-        </p:nvSpPr>
-        <p:spPr>
-          <a:xfrm>
-            <a:off x="0" y="4791456"/>
-            <a:ext cx="7863840" cy="356616"/>
-          </a:xfrm>
-          <a:prstGeom prst="rect">
-            <a:avLst/>
-          </a:prstGeom>
-          <a:noFill/>
-          <a:ln/>
-        </p:spPr>
-        <p:txBody>
-          <a:bodyPr wrap="square" rtlCol="0"/>
-          <a:lstStyle>
-            <a:lvl1pPr indent="0" marL="0">
-              <a:buNone/>
-              <a:defRPr lang="en-US" sz="800" dirty="0">
-                <a:solidFill>
-                  <a:schemeClr val="tx1"/>
-                </a:solidFill>
-                <a:latin typeface="Arial" pitchFamily="34" charset="0"/>
-                <a:ea typeface="Arial" pitchFamily="34" charset="-122"/>
-                <a:cs typeface="Arial" pitchFamily="34" charset="-120"/>
-              </a:defRPr>
-            </a:lvl1pPr>
-          </a:lstStyle>
-          <a:p>
-            <a:pPr indent="0" marL="0">
-              <a:buNone/>
-            </a:pPr>
-            <a:endParaRPr lang="en-US" sz="800" dirty="0"/>
-          </a:p>
-        </p:txBody>
       </p:sp>
       <p:sp>
         <p:nvSpPr>
@@ -2785,7 +2281,7 @@
             <a:lvl1pPr>
               <a:defRPr sz="1200">
                 <a:solidFill>
-                  <a:schemeClr val="tx1"/>
+                  <a:srgbClr val="000000"/>
                 </a:solidFill>
                 <a:latin typeface="Arial"/>
                 <a:ea typeface="Arial"/>
@@ -2858,7 +2354,7 @@
             <a:lvl1pPr>
               <a:defRPr sz="1200">
                 <a:solidFill>
-                  <a:schemeClr val="tx1"/>
+                  <a:srgbClr val="000000"/>
                 </a:solidFill>
                 <a:latin typeface="Arial"/>
                 <a:ea typeface="Arial"/>
@@ -3160,14 +2656,14 @@
       </p:grpSpPr>
       <p:sp>
         <p:nvSpPr>
-          <p:cNvPr id="2" name="Text 0"/>
-          <p:cNvSpPr/>
+          <p:cNvPr id="2" name="Cover title"/>
+          <p:cNvSpPr txBox="1"/>
           <p:nvPr/>
         </p:nvSpPr>
         <p:spPr>
           <a:xfrm>
-            <a:off x="0" y="0"/>
-            <a:ext cx="6858000" cy="0"/>
+            <a:off x="310896" y="1682496"/>
+            <a:ext cx="8522208" cy="1773936"/>
           </a:xfrm>
           <a:prstGeom prst="rect">
             <a:avLst/>
@@ -3176,27 +2672,32 @@
           <a:ln/>
         </p:spPr>
         <p:txBody>
-          <a:bodyPr wrap="square" rtlCol="0"/>
+          <a:bodyPr wrap="square" lIns="0" tIns="0" rIns="0" bIns="0" rtlCol="0" anchor="ctr"/>
           <a:lstStyle/>
           <a:p>
-            <a:pPr indent="0" marL="0">
+            <a:pPr algn="l" indent="0" marL="0">
               <a:buNone/>
             </a:pPr>
             <a:r>
-              <a:rPr lang="en-US" dirty="0"/>
+              <a:rPr lang="en-US" sz="2600" b="1" dirty="0">
+                <a:solidFill>
+                  <a:srgbClr val="000000"/>
+                </a:solidFill>
+                <a:latin typeface="Arial" pitchFamily="34" charset="0"/>
+                <a:ea typeface="Arial" pitchFamily="34" charset="-122"/>
+                <a:cs typeface="Arial" pitchFamily="34" charset="-120"/>
+              </a:rPr>
               <a:t>Progress Report</a:t>
             </a:r>
-            <a:endParaRPr lang="en-US" dirty="0"/>
+            <a:endParaRPr lang="en-US" sz="2600" dirty="0"/>
           </a:p>
         </p:txBody>
       </p:sp>
       <p:sp>
         <p:nvSpPr>
-          <p:cNvPr id="3" name="Text 1"/>
-          <p:cNvSpPr/>
-          <p:nvPr>
-            <p:ph idx="102" type="body" hasCustomPrompt="1"/>
-          </p:nvPr>
+          <p:cNvPr id="3" name="Cover subtitle"/>
+          <p:cNvSpPr txBox="1"/>
+          <p:nvPr/>
         </p:nvSpPr>
         <p:spPr>
           <a:xfrm>
@@ -3219,7 +2720,7 @@
             <a:r>
               <a:rPr lang="en-US" sz="1400" b="1" dirty="0">
                 <a:solidFill>
-                  <a:schemeClr val="tx2"/>
+                  <a:srgbClr val="595959"/>
                 </a:solidFill>
                 <a:latin typeface="Times New Roman" pitchFamily="34" charset="0"/>
                 <a:ea typeface="Times New Roman" pitchFamily="34" charset="-122"/>
@@ -3236,7 +2737,7 @@
             <a:r>
               <a:rPr lang="en-US" sz="1400" b="1" dirty="0">
                 <a:solidFill>
-                  <a:schemeClr val="tx2"/>
+                  <a:srgbClr val="595959"/>
                 </a:solidFill>
                 <a:latin typeface="Times New Roman" pitchFamily="34" charset="0"/>
                 <a:ea typeface="Times New Roman" pitchFamily="34" charset="-122"/>
@@ -3245,34 +2746,6 @@
               <a:t>Oct. 28, 2026</a:t>
             </a:r>
             <a:endParaRPr lang="en-US" sz="1400" dirty="0"/>
-          </a:p>
-        </p:txBody>
-      </p:sp>
-      <p:sp>
-        <p:nvSpPr>
-          <p:cNvPr id="5" name="Text 1"/>
-          <p:cNvSpPr/>
-          <p:nvPr/>
-        </p:nvSpPr>
-        <p:spPr>
-          <a:xfrm>
-            <a:off x="310896" y="1682496"/>
-            <a:ext cx="8522208" cy="1773936"/>
-          </a:xfrm>
-          <a:prstGeom prst="rect">
-            <a:avLst/>
-          </a:prstGeom>
-          <a:noFill/>
-          <a:ln/>
-        </p:spPr>
-        <p:txBody>
-          <a:bodyPr wrap="square" lIns="0" tIns="0" rIns="0" bIns="0" rtlCol="0" anchor="ctr"/>
-          <a:lstStyle/>
-          <a:p>
-            <a:pPr algn="l" indent="0" marL="0">
-              <a:buNone/>
-            </a:pPr>
-            <a:endParaRPr lang="en-US" sz="2600" dirty="0"/>
           </a:p>
         </p:txBody>
       </p:sp>
@@ -3303,14 +2776,14 @@
       </p:grpSpPr>
       <p:sp>
         <p:nvSpPr>
-          <p:cNvPr id="2" name="Text 0"/>
-          <p:cNvSpPr/>
+          <p:cNvPr id="2" name="Title"/>
+          <p:cNvSpPr txBox="1"/>
           <p:nvPr/>
         </p:nvSpPr>
         <p:spPr>
           <a:xfrm>
-            <a:off x="0" y="0"/>
-            <a:ext cx="6858000" cy="0"/>
+            <a:off x="365760" y="182880"/>
+            <a:ext cx="8412480" cy="411480"/>
           </a:xfrm>
           <a:prstGeom prst="rect">
             <a:avLst/>
@@ -3319,30 +2792,37 @@
           <a:ln/>
         </p:spPr>
         <p:txBody>
-          <a:bodyPr wrap="square" rtlCol="0"/>
+          <a:bodyPr wrap="square" lIns="0" tIns="0" rIns="0" bIns="0" rtlCol="0" anchor="t"/>
           <a:lstStyle/>
           <a:p>
-            <a:pPr indent="0" marL="0">
+            <a:pPr algn="l" indent="0" marL="0">
               <a:buNone/>
             </a:pPr>
             <a:r>
-              <a:rPr lang="en-US" dirty="0"/>
+              <a:rPr lang="en-US" sz="2200" dirty="0">
+                <a:solidFill>
+                  <a:srgbClr val="000000"/>
+                </a:solidFill>
+                <a:latin typeface="Arial" pitchFamily="34" charset="0"/>
+                <a:ea typeface="Arial" pitchFamily="34" charset="-122"/>
+                <a:cs typeface="Arial" pitchFamily="34" charset="-120"/>
+              </a:rPr>
               <a:t>Coding evaluation pipeline</a:t>
             </a:r>
-            <a:endParaRPr lang="en-US" dirty="0"/>
+            <a:endParaRPr lang="en-US" sz="2200" dirty="0"/>
           </a:p>
         </p:txBody>
       </p:sp>
       <p:sp>
         <p:nvSpPr>
-          <p:cNvPr id="3" name="Text 1"/>
-          <p:cNvSpPr/>
+          <p:cNvPr id="3" name="Topic"/>
+          <p:cNvSpPr txBox="1"/>
           <p:nvPr/>
         </p:nvSpPr>
         <p:spPr>
           <a:xfrm>
-            <a:off x="0" y="0"/>
-            <a:ext cx="6858000" cy="0"/>
+            <a:off x="365760" y="576072"/>
+            <a:ext cx="8412480" cy="274320"/>
           </a:xfrm>
           <a:prstGeom prst="rect">
             <a:avLst/>
@@ -3351,30 +2831,37 @@
           <a:ln/>
         </p:spPr>
         <p:txBody>
-          <a:bodyPr wrap="square" rtlCol="0"/>
+          <a:bodyPr wrap="square" lIns="0" tIns="0" rIns="0" bIns="0" rtlCol="0" anchor="t"/>
           <a:lstStyle/>
           <a:p>
-            <a:pPr indent="0" marL="0">
+            <a:pPr algn="l" indent="0" marL="0">
               <a:buNone/>
             </a:pPr>
             <a:r>
-              <a:rPr lang="en-US" dirty="0"/>
+              <a:rPr lang="en-US" sz="1250" dirty="0">
+                <a:solidFill>
+                  <a:srgbClr val="9C6B1E"/>
+                </a:solidFill>
+                <a:latin typeface="Arial" pitchFamily="34" charset="0"/>
+                <a:ea typeface="Arial" pitchFamily="34" charset="-122"/>
+                <a:cs typeface="Arial" pitchFamily="34" charset="-120"/>
+              </a:rPr>
               <a:t>HumanEval</a:t>
             </a:r>
-            <a:endParaRPr lang="en-US" dirty="0"/>
+            <a:endParaRPr lang="en-US" sz="1250" dirty="0"/>
           </a:p>
         </p:txBody>
       </p:sp>
       <p:sp>
         <p:nvSpPr>
-          <p:cNvPr id="4" name="Text 2"/>
-          <p:cNvSpPr/>
+          <p:cNvPr id="4" name="Footnote"/>
+          <p:cNvSpPr txBox="1"/>
           <p:nvPr/>
         </p:nvSpPr>
         <p:spPr>
           <a:xfrm>
-            <a:off x="0" y="0"/>
-            <a:ext cx="6858000" cy="0"/>
+            <a:off x="0" y="4791456"/>
+            <a:ext cx="7863840" cy="356616"/>
           </a:xfrm>
           <a:prstGeom prst="rect">
             <a:avLst/>
@@ -3383,39 +2870,48 @@
           <a:ln/>
         </p:spPr>
         <p:txBody>
-          <a:bodyPr wrap="square" rtlCol="0"/>
+          <a:bodyPr wrap="square" lIns="91440" tIns="91440" rIns="91440" bIns="91440" rtlCol="0" anchor="ctr"/>
           <a:lstStyle/>
           <a:p>
-            <a:pPr indent="0" marL="0">
+            <a:pPr algn="l" indent="0" marL="0">
               <a:buNone/>
             </a:pPr>
             <a:r>
-              <a:rPr lang="en-US" b="1" u="sng" dirty="0">
+              <a:rPr lang="en-US" sz="800" b="1" u="sng" dirty="0">
                 <a:solidFill>
                   <a:srgbClr val="000000"/>
                 </a:solidFill>
+                <a:latin typeface="Arial" pitchFamily="34" charset="0"/>
+                <a:ea typeface="Arial" pitchFamily="34" charset="-122"/>
+                <a:cs typeface="Arial" pitchFamily="34" charset="-120"/>
               </a:rPr>
               <a:t>*1</a:t>
             </a:r>
-            <a:pPr indent="0" marL="0">
+            <a:pPr algn="l" indent="0" marL="0">
               <a:buNone/>
             </a:pPr>
             <a:r>
-              <a:rPr lang="en-US" dirty="0">
+              <a:rPr lang="en-US" sz="800" dirty="0">
                 <a:solidFill>
                   <a:srgbClr val="000000"/>
                 </a:solidFill>
+                <a:latin typeface="Arial" pitchFamily="34" charset="0"/>
+                <a:ea typeface="Arial" pitchFamily="34" charset="-122"/>
+                <a:cs typeface="Arial" pitchFamily="34" charset="-120"/>
               </a:rPr>
               <a:t> </a:t>
             </a:r>
-            <a:pPr indent="0" marL="0">
+            <a:pPr algn="l" indent="0" marL="0">
               <a:buNone/>
             </a:pPr>
             <a:r>
-              <a:rPr lang="en-US" u="sng" dirty="0">
+              <a:rPr lang="en-US" sz="800" u="sng" dirty="0">
                 <a:solidFill>
                   <a:srgbClr val="0000EE"/>
                 </a:solidFill>
+                <a:latin typeface="Arial" pitchFamily="34" charset="0"/>
+                <a:ea typeface="Arial" pitchFamily="34" charset="-122"/>
+                <a:cs typeface="Arial" pitchFamily="34" charset="-120"/>
                 <a:hlinkClick r:id="rId1" invalidUrl="" action="" tgtFrame="" tooltip="" history="1" highlightClick="0" endSnd="0">
                   <a:extLst>
                     <a:ext uri="{A12FA001-AC4F-418D-AE19-62706E023703}">
@@ -3426,7 +2922,7 @@
               </a:rPr>
               <a:t>https://github.com/torridfish/lrm/issues/6</a:t>
             </a:r>
-            <a:endParaRPr lang="en-US" dirty="0"/>
+            <a:endParaRPr lang="en-US" sz="800" dirty="0"/>
           </a:p>
         </p:txBody>
       </p:sp>
@@ -3649,7 +3145,7 @@
             <a:lvl1pPr>
               <a:defRPr sz="1200">
                 <a:solidFill>
-                  <a:schemeClr val="tx1"/>
+                  <a:srgbClr val="000000"/>
                 </a:solidFill>
                 <a:latin typeface="Arial"/>
                 <a:ea typeface="Arial"/>
@@ -3694,14 +3190,14 @@
       </p:grpSpPr>
       <p:sp>
         <p:nvSpPr>
-          <p:cNvPr id="2" name="Text 0"/>
-          <p:cNvSpPr/>
+          <p:cNvPr id="2" name="Title"/>
+          <p:cNvSpPr txBox="1"/>
           <p:nvPr/>
         </p:nvSpPr>
         <p:spPr>
           <a:xfrm>
-            <a:off x="0" y="0"/>
-            <a:ext cx="6858000" cy="0"/>
+            <a:off x="365760" y="182880"/>
+            <a:ext cx="8412480" cy="411480"/>
           </a:xfrm>
           <a:prstGeom prst="rect">
             <a:avLst/>
@@ -3710,30 +3206,37 @@
           <a:ln/>
         </p:spPr>
         <p:txBody>
-          <a:bodyPr wrap="square" rtlCol="0"/>
+          <a:bodyPr wrap="square" lIns="0" tIns="0" rIns="0" bIns="0" rtlCol="0" anchor="t"/>
           <a:lstStyle/>
           <a:p>
-            <a:pPr indent="0" marL="0">
+            <a:pPr algn="l" indent="0" marL="0">
               <a:buNone/>
             </a:pPr>
             <a:r>
-              <a:rPr lang="en-US" dirty="0"/>
+              <a:rPr lang="en-US" sz="2200" dirty="0">
+                <a:solidFill>
+                  <a:srgbClr val="000000"/>
+                </a:solidFill>
+                <a:latin typeface="Arial" pitchFamily="34" charset="0"/>
+                <a:ea typeface="Arial" pitchFamily="34" charset="-122"/>
+                <a:cs typeface="Arial" pitchFamily="34" charset="-120"/>
+              </a:rPr>
               <a:t>Setup</a:t>
             </a:r>
-            <a:endParaRPr lang="en-US" dirty="0"/>
+            <a:endParaRPr lang="en-US" sz="2200" dirty="0"/>
           </a:p>
         </p:txBody>
       </p:sp>
       <p:sp>
         <p:nvSpPr>
-          <p:cNvPr id="3" name="Text 1"/>
-          <p:cNvSpPr/>
+          <p:cNvPr id="3" name="Topic"/>
+          <p:cNvSpPr txBox="1"/>
           <p:nvPr/>
         </p:nvSpPr>
         <p:spPr>
           <a:xfrm>
-            <a:off x="0" y="0"/>
-            <a:ext cx="6858000" cy="0"/>
+            <a:off x="365760" y="576072"/>
+            <a:ext cx="8412480" cy="274320"/>
           </a:xfrm>
           <a:prstGeom prst="rect">
             <a:avLst/>
@@ -3742,27 +3245,32 @@
           <a:ln/>
         </p:spPr>
         <p:txBody>
-          <a:bodyPr wrap="square" rtlCol="0"/>
+          <a:bodyPr wrap="square" lIns="0" tIns="0" rIns="0" bIns="0" rtlCol="0" anchor="t"/>
           <a:lstStyle/>
           <a:p>
-            <a:pPr indent="0" marL="0">
+            <a:pPr algn="l" indent="0" marL="0">
               <a:buNone/>
             </a:pPr>
             <a:r>
-              <a:rPr lang="en-US" dirty="0"/>
+              <a:rPr lang="en-US" sz="1250" dirty="0">
+                <a:solidFill>
+                  <a:srgbClr val="9C6B1E"/>
+                </a:solidFill>
+                <a:latin typeface="Arial" pitchFamily="34" charset="0"/>
+                <a:ea typeface="Arial" pitchFamily="34" charset="-122"/>
+                <a:cs typeface="Arial" pitchFamily="34" charset="-120"/>
+              </a:rPr>
               <a:t>Training loss and the two-stage procedure</a:t>
             </a:r>
-            <a:endParaRPr lang="en-US" dirty="0"/>
+            <a:endParaRPr lang="en-US" sz="1250" dirty="0"/>
           </a:p>
         </p:txBody>
       </p:sp>
       <p:sp>
         <p:nvSpPr>
-          <p:cNvPr id="4" name="Text 1"/>
-          <p:cNvSpPr/>
-          <p:nvPr>
-            <p:ph idx="103" type="body" hasCustomPrompt="1"/>
-          </p:nvPr>
+          <p:cNvPr id="4" name="Lead"/>
+          <p:cNvSpPr txBox="1"/>
+          <p:nvPr/>
         </p:nvSpPr>
         <p:spPr>
           <a:xfrm>
@@ -3785,7 +3293,7 @@
             <a:r>
               <a:rPr lang="en-US" sz="1200" dirty="0">
                 <a:solidFill>
-                  <a:schemeClr val="tx1"/>
+                  <a:srgbClr val="000000"/>
                 </a:solidFill>
                 <a:latin typeface="Times New Roman" pitchFamily="34" charset="0"/>
                 <a:ea typeface="Times New Roman" pitchFamily="34" charset="-122"/>
@@ -3799,14 +3307,14 @@
       </p:sp>
       <p:sp>
         <p:nvSpPr>
-          <p:cNvPr id="5" name="Text 3"/>
-          <p:cNvSpPr/>
+          <p:cNvPr id="5" name="Footnote"/>
+          <p:cNvSpPr txBox="1"/>
           <p:nvPr/>
         </p:nvSpPr>
         <p:spPr>
           <a:xfrm>
-            <a:off x="0" y="0"/>
-            <a:ext cx="6858000" cy="0"/>
+            <a:off x="0" y="4791456"/>
+            <a:ext cx="7863840" cy="356616"/>
           </a:xfrm>
           <a:prstGeom prst="rect">
             <a:avLst/>
@@ -3815,32 +3323,38 @@
           <a:ln/>
         </p:spPr>
         <p:txBody>
-          <a:bodyPr wrap="square" rtlCol="0"/>
+          <a:bodyPr wrap="square" lIns="91440" tIns="91440" rIns="91440" bIns="91440" rtlCol="0" anchor="ctr"/>
           <a:lstStyle/>
           <a:p>
-            <a:pPr indent="0" marL="0">
+            <a:pPr algn="l" indent="0" marL="0">
               <a:buNone/>
             </a:pPr>
             <a:r>
-              <a:rPr lang="en-US" b="1" u="sng" dirty="0">
+              <a:rPr lang="en-US" sz="800" b="1" u="sng" dirty="0">
                 <a:solidFill>
                   <a:srgbClr val="000000"/>
                 </a:solidFill>
+                <a:latin typeface="Arial" pitchFamily="34" charset="0"/>
+                <a:ea typeface="Arial" pitchFamily="34" charset="-122"/>
+                <a:cs typeface="Arial" pitchFamily="34" charset="-120"/>
               </a:rPr>
               <a:t>*1</a:t>
             </a:r>
-            <a:pPr indent="0" marL="0">
+            <a:pPr algn="l" indent="0" marL="0">
               <a:buNone/>
             </a:pPr>
             <a:r>
-              <a:rPr lang="en-US" dirty="0">
+              <a:rPr lang="en-US" sz="800" dirty="0">
                 <a:solidFill>
                   <a:srgbClr val="000000"/>
                 </a:solidFill>
+                <a:latin typeface="Arial" pitchFamily="34" charset="0"/>
+                <a:ea typeface="Arial" pitchFamily="34" charset="-122"/>
+                <a:cs typeface="Arial" pitchFamily="34" charset="-120"/>
               </a:rPr>
               <a:t> Rendered with the local TeX Live by the research-slides skill (tex2img.sh); sources under assets/Math/.</a:t>
             </a:r>
-            <a:endParaRPr lang="en-US" dirty="0"/>
+            <a:endParaRPr lang="en-US" sz="800" dirty="0"/>
           </a:p>
         </p:txBody>
       </p:sp>
@@ -3922,7 +3436,7 @@
             <a:lvl1pPr>
               <a:defRPr sz="1200">
                 <a:solidFill>
-                  <a:schemeClr val="tx1"/>
+                  <a:srgbClr val="000000"/>
                 </a:solidFill>
                 <a:latin typeface="Arial"/>
                 <a:ea typeface="Arial"/>
@@ -3967,14 +3481,14 @@
       </p:grpSpPr>
       <p:sp>
         <p:nvSpPr>
-          <p:cNvPr id="2" name="Text 0"/>
-          <p:cNvSpPr/>
+          <p:cNvPr id="2" name="Title"/>
+          <p:cNvSpPr txBox="1"/>
           <p:nvPr/>
         </p:nvSpPr>
         <p:spPr>
           <a:xfrm>
-            <a:off x="0" y="0"/>
-            <a:ext cx="6858000" cy="0"/>
+            <a:off x="365760" y="182880"/>
+            <a:ext cx="8412480" cy="411480"/>
           </a:xfrm>
           <a:prstGeom prst="rect">
             <a:avLst/>
@@ -3983,30 +3497,37 @@
           <a:ln/>
         </p:spPr>
         <p:txBody>
-          <a:bodyPr wrap="square" rtlCol="0"/>
+          <a:bodyPr wrap="square" lIns="0" tIns="0" rIns="0" bIns="0" rtlCol="0" anchor="t"/>
           <a:lstStyle/>
           <a:p>
-            <a:pPr indent="0" marL="0">
+            <a:pPr algn="l" indent="0" marL="0">
               <a:buNone/>
             </a:pPr>
             <a:r>
-              <a:rPr lang="en-US" dirty="0"/>
+              <a:rPr lang="en-US" sz="2200" dirty="0">
+                <a:solidFill>
+                  <a:srgbClr val="000000"/>
+                </a:solidFill>
+                <a:latin typeface="Arial" pitchFamily="34" charset="0"/>
+                <a:ea typeface="Arial" pitchFamily="34" charset="-122"/>
+                <a:cs typeface="Arial" pitchFamily="34" charset="-120"/>
+              </a:rPr>
               <a:t>Experiment</a:t>
             </a:r>
-            <a:endParaRPr lang="en-US" dirty="0"/>
+            <a:endParaRPr lang="en-US" sz="2200" dirty="0"/>
           </a:p>
         </p:txBody>
       </p:sp>
       <p:sp>
         <p:nvSpPr>
-          <p:cNvPr id="3" name="Text 1"/>
-          <p:cNvSpPr/>
+          <p:cNvPr id="3" name="Topic"/>
+          <p:cNvSpPr txBox="1"/>
           <p:nvPr/>
         </p:nvSpPr>
         <p:spPr>
           <a:xfrm>
-            <a:off x="0" y="0"/>
-            <a:ext cx="6858000" cy="0"/>
+            <a:off x="365760" y="576072"/>
+            <a:ext cx="8412480" cy="274320"/>
           </a:xfrm>
           <a:prstGeom prst="rect">
             <a:avLst/>
@@ -4015,27 +3536,32 @@
           <a:ln/>
         </p:spPr>
         <p:txBody>
-          <a:bodyPr wrap="square" rtlCol="0"/>
+          <a:bodyPr wrap="square" lIns="0" tIns="0" rIns="0" bIns="0" rtlCol="0" anchor="t"/>
           <a:lstStyle/>
           <a:p>
-            <a:pPr indent="0" marL="0">
+            <a:pPr algn="l" indent="0" marL="0">
               <a:buNone/>
             </a:pPr>
             <a:r>
-              <a:rPr lang="en-US" dirty="0"/>
+              <a:rPr lang="en-US" sz="1250" dirty="0">
+                <a:solidFill>
+                  <a:srgbClr val="9C6B1E"/>
+                </a:solidFill>
+                <a:latin typeface="Arial" pitchFamily="34" charset="0"/>
+                <a:ea typeface="Arial" pitchFamily="34" charset="-122"/>
+                <a:cs typeface="Arial" pitchFamily="34" charset="-120"/>
+              </a:rPr>
               <a:t>Category C: Observation</a:t>
             </a:r>
-            <a:endParaRPr lang="en-US" dirty="0"/>
+            <a:endParaRPr lang="en-US" sz="1250" dirty="0"/>
           </a:p>
         </p:txBody>
       </p:sp>
       <p:sp>
         <p:nvSpPr>
-          <p:cNvPr id="4" name="Text 1"/>
-          <p:cNvSpPr/>
-          <p:nvPr>
-            <p:ph idx="103" type="body" hasCustomPrompt="1"/>
-          </p:nvPr>
+          <p:cNvPr id="4" name="Lead"/>
+          <p:cNvSpPr txBox="1"/>
+          <p:nvPr/>
         </p:nvSpPr>
         <p:spPr>
           <a:xfrm>
@@ -4058,7 +3584,7 @@
             <a:r>
               <a:rPr lang="en-US" sz="1200" dirty="0">
                 <a:solidFill>
-                  <a:schemeClr val="tx1"/>
+                  <a:srgbClr val="000000"/>
                 </a:solidFill>
                 <a:latin typeface="Times New Roman" pitchFamily="34" charset="0"/>
                 <a:ea typeface="Times New Roman" pitchFamily="34" charset="-122"/>
@@ -4075,7 +3601,7 @@
             <a:r>
               <a:rPr lang="en-US" sz="1200" dirty="0">
                 <a:solidFill>
-                  <a:schemeClr val="tx1"/>
+                  <a:srgbClr val="000000"/>
                 </a:solidFill>
                 <a:latin typeface="Times New Roman" pitchFamily="34" charset="0"/>
                 <a:ea typeface="Times New Roman" pitchFamily="34" charset="-122"/>
@@ -4373,7 +3899,7 @@
             <a:lvl1pPr>
               <a:defRPr sz="1200">
                 <a:solidFill>
-                  <a:schemeClr val="tx1"/>
+                  <a:srgbClr val="000000"/>
                 </a:solidFill>
                 <a:latin typeface="Arial"/>
                 <a:ea typeface="Arial"/>
@@ -4418,14 +3944,14 @@
       </p:grpSpPr>
       <p:sp>
         <p:nvSpPr>
-          <p:cNvPr id="2" name="Text 0"/>
-          <p:cNvSpPr/>
+          <p:cNvPr id="2" name="Title"/>
+          <p:cNvSpPr txBox="1"/>
           <p:nvPr/>
         </p:nvSpPr>
         <p:spPr>
           <a:xfrm>
-            <a:off x="0" y="0"/>
-            <a:ext cx="6858000" cy="0"/>
+            <a:off x="365760" y="182880"/>
+            <a:ext cx="8412480" cy="411480"/>
           </a:xfrm>
           <a:prstGeom prst="rect">
             <a:avLst/>
@@ -4434,30 +3960,37 @@
           <a:ln/>
         </p:spPr>
         <p:txBody>
-          <a:bodyPr wrap="square" rtlCol="0"/>
+          <a:bodyPr wrap="square" lIns="0" tIns="0" rIns="0" bIns="0" rtlCol="0" anchor="t"/>
           <a:lstStyle/>
           <a:p>
-            <a:pPr indent="0" marL="0">
+            <a:pPr algn="l" indent="0" marL="0">
               <a:buNone/>
             </a:pPr>
             <a:r>
-              <a:rPr lang="en-US" dirty="0"/>
+              <a:rPr lang="en-US" sz="2200" dirty="0">
+                <a:solidFill>
+                  <a:srgbClr val="000000"/>
+                </a:solidFill>
+                <a:latin typeface="Arial" pitchFamily="34" charset="0"/>
+                <a:ea typeface="Arial" pitchFamily="34" charset="-122"/>
+                <a:cs typeface="Arial" pitchFamily="34" charset="-120"/>
+              </a:rPr>
               <a:t>Setup</a:t>
             </a:r>
-            <a:endParaRPr lang="en-US" dirty="0"/>
+            <a:endParaRPr lang="en-US" sz="2200" dirty="0"/>
           </a:p>
         </p:txBody>
       </p:sp>
       <p:sp>
         <p:nvSpPr>
-          <p:cNvPr id="3" name="Text 1"/>
-          <p:cNvSpPr/>
+          <p:cNvPr id="3" name="Topic"/>
+          <p:cNvSpPr txBox="1"/>
           <p:nvPr/>
         </p:nvSpPr>
         <p:spPr>
           <a:xfrm>
-            <a:off x="0" y="0"/>
-            <a:ext cx="6858000" cy="0"/>
+            <a:off x="365760" y="576072"/>
+            <a:ext cx="8412480" cy="274320"/>
           </a:xfrm>
           <a:prstGeom prst="rect">
             <a:avLst/>
@@ -4466,27 +3999,32 @@
           <a:ln/>
         </p:spPr>
         <p:txBody>
-          <a:bodyPr wrap="square" rtlCol="0"/>
+          <a:bodyPr wrap="square" lIns="0" tIns="0" rIns="0" bIns="0" rtlCol="0" anchor="t"/>
           <a:lstStyle/>
           <a:p>
-            <a:pPr indent="0" marL="0">
+            <a:pPr algn="l" indent="0" marL="0">
               <a:buNone/>
             </a:pPr>
             <a:r>
-              <a:rPr lang="en-US" dirty="0"/>
+              <a:rPr lang="en-US" sz="1250" dirty="0">
+                <a:solidFill>
+                  <a:srgbClr val="9C6B1E"/>
+                </a:solidFill>
+                <a:latin typeface="Arial" pitchFamily="34" charset="0"/>
+                <a:ea typeface="Arial" pitchFamily="34" charset="-122"/>
+                <a:cs typeface="Arial" pitchFamily="34" charset="-120"/>
+              </a:rPr>
               <a:t>Prompt template</a:t>
             </a:r>
-            <a:endParaRPr lang="en-US" dirty="0"/>
+            <a:endParaRPr lang="en-US" sz="1250" dirty="0"/>
           </a:p>
         </p:txBody>
       </p:sp>
       <p:sp>
         <p:nvSpPr>
-          <p:cNvPr id="4" name="Text 1"/>
-          <p:cNvSpPr/>
-          <p:nvPr>
-            <p:ph idx="103" type="body" hasCustomPrompt="1"/>
-          </p:nvPr>
+          <p:cNvPr id="4" name="Lead"/>
+          <p:cNvSpPr txBox="1"/>
+          <p:nvPr/>
         </p:nvSpPr>
         <p:spPr>
           <a:xfrm>
@@ -4509,7 +4047,7 @@
             <a:r>
               <a:rPr lang="en-US" sz="1200" dirty="0">
                 <a:solidFill>
-                  <a:schemeClr val="tx1"/>
+                  <a:srgbClr val="000000"/>
                 </a:solidFill>
                 <a:latin typeface="Times New Roman" pitchFamily="34" charset="0"/>
                 <a:ea typeface="Times New Roman" pitchFamily="34" charset="-122"/>
@@ -4884,7 +4422,7 @@
             <a:lvl1pPr>
               <a:defRPr sz="1200">
                 <a:solidFill>
-                  <a:schemeClr val="tx1"/>
+                  <a:srgbClr val="000000"/>
                 </a:solidFill>
                 <a:latin typeface="Arial"/>
                 <a:ea typeface="Arial"/>
@@ -4929,14 +4467,14 @@
       </p:grpSpPr>
       <p:sp>
         <p:nvSpPr>
-          <p:cNvPr id="2" name="Text 0"/>
-          <p:cNvSpPr/>
+          <p:cNvPr id="2" name="Title"/>
+          <p:cNvSpPr txBox="1"/>
           <p:nvPr/>
         </p:nvSpPr>
         <p:spPr>
           <a:xfrm>
-            <a:off x="0" y="0"/>
-            <a:ext cx="6858000" cy="0"/>
+            <a:off x="365760" y="182880"/>
+            <a:ext cx="8412480" cy="411480"/>
           </a:xfrm>
           <a:prstGeom prst="rect">
             <a:avLst/>
@@ -4945,30 +4483,37 @@
           <a:ln/>
         </p:spPr>
         <p:txBody>
-          <a:bodyPr wrap="square" rtlCol="0"/>
+          <a:bodyPr wrap="square" lIns="0" tIns="0" rIns="0" bIns="0" rtlCol="0" anchor="t"/>
           <a:lstStyle/>
           <a:p>
-            <a:pPr indent="0" marL="0">
+            <a:pPr algn="l" indent="0" marL="0">
               <a:buNone/>
             </a:pPr>
             <a:r>
-              <a:rPr lang="en-US" dirty="0"/>
+              <a:rPr lang="en-US" sz="2200" dirty="0">
+                <a:solidFill>
+                  <a:srgbClr val="000000"/>
+                </a:solidFill>
+                <a:latin typeface="Arial" pitchFamily="34" charset="0"/>
+                <a:ea typeface="Arial" pitchFamily="34" charset="-122"/>
+                <a:cs typeface="Arial" pitchFamily="34" charset="-120"/>
+              </a:rPr>
               <a:t>Experiment</a:t>
             </a:r>
-            <a:endParaRPr lang="en-US" dirty="0"/>
+            <a:endParaRPr lang="en-US" sz="2200" dirty="0"/>
           </a:p>
         </p:txBody>
       </p:sp>
       <p:sp>
         <p:nvSpPr>
-          <p:cNvPr id="3" name="Text 1"/>
-          <p:cNvSpPr/>
+          <p:cNvPr id="3" name="Topic"/>
+          <p:cNvSpPr txBox="1"/>
           <p:nvPr/>
         </p:nvSpPr>
         <p:spPr>
           <a:xfrm>
-            <a:off x="0" y="0"/>
-            <a:ext cx="6858000" cy="0"/>
+            <a:off x="365760" y="576072"/>
+            <a:ext cx="8412480" cy="274320"/>
           </a:xfrm>
           <a:prstGeom prst="rect">
             <a:avLst/>
@@ -4977,30 +4522,37 @@
           <a:ln/>
         </p:spPr>
         <p:txBody>
-          <a:bodyPr wrap="square" rtlCol="0"/>
+          <a:bodyPr wrap="square" lIns="0" tIns="0" rIns="0" bIns="0" rtlCol="0" anchor="t"/>
           <a:lstStyle/>
           <a:p>
-            <a:pPr indent="0" marL="0">
+            <a:pPr algn="l" indent="0" marL="0">
               <a:buNone/>
             </a:pPr>
             <a:r>
-              <a:rPr lang="en-US" dirty="0"/>
+              <a:rPr lang="en-US" sz="1250" dirty="0">
+                <a:solidFill>
+                  <a:srgbClr val="9C6B1E"/>
+                </a:solidFill>
+                <a:latin typeface="Arial" pitchFamily="34" charset="0"/>
+                <a:ea typeface="Arial" pitchFamily="34" charset="-122"/>
+                <a:cs typeface="Arial" pitchFamily="34" charset="-120"/>
+              </a:rPr>
               <a:t>Category B setups</a:t>
             </a:r>
-            <a:endParaRPr lang="en-US" dirty="0"/>
+            <a:endParaRPr lang="en-US" sz="1250" dirty="0"/>
           </a:p>
         </p:txBody>
       </p:sp>
       <p:sp>
         <p:nvSpPr>
-          <p:cNvPr id="4" name="Text 2"/>
-          <p:cNvSpPr/>
+          <p:cNvPr id="4" name="Footnote"/>
+          <p:cNvSpPr txBox="1"/>
           <p:nvPr/>
         </p:nvSpPr>
         <p:spPr>
           <a:xfrm>
-            <a:off x="0" y="0"/>
-            <a:ext cx="6858000" cy="0"/>
+            <a:off x="0" y="4791456"/>
+            <a:ext cx="7863840" cy="356616"/>
           </a:xfrm>
           <a:prstGeom prst="rect">
             <a:avLst/>
@@ -5009,32 +4561,38 @@
           <a:ln/>
         </p:spPr>
         <p:txBody>
-          <a:bodyPr wrap="square" rtlCol="0"/>
+          <a:bodyPr wrap="square" lIns="91440" tIns="91440" rIns="91440" bIns="91440" rtlCol="0" anchor="ctr"/>
           <a:lstStyle/>
           <a:p>
-            <a:pPr indent="0" marL="0">
+            <a:pPr algn="l" indent="0" marL="0">
               <a:buNone/>
             </a:pPr>
             <a:r>
-              <a:rPr lang="en-US" b="1" u="sng" dirty="0">
+              <a:rPr lang="en-US" sz="800" b="1" u="sng" dirty="0">
                 <a:solidFill>
                   <a:srgbClr val="000000"/>
                 </a:solidFill>
+                <a:latin typeface="Arial" pitchFamily="34" charset="0"/>
+                <a:ea typeface="Arial" pitchFamily="34" charset="-122"/>
+                <a:cs typeface="Arial" pitchFamily="34" charset="-120"/>
               </a:rPr>
               <a:t>*1</a:t>
             </a:r>
-            <a:pPr indent="0" marL="0">
+            <a:pPr algn="l" indent="0" marL="0">
               <a:buNone/>
             </a:pPr>
             <a:r>
-              <a:rPr lang="en-US" dirty="0">
+              <a:rPr lang="en-US" sz="800" dirty="0">
                 <a:solidFill>
                   <a:srgbClr val="000000"/>
                 </a:solidFill>
+                <a:latin typeface="Arial" pitchFamily="34" charset="0"/>
+                <a:ea typeface="Arial" pitchFamily="34" charset="-122"/>
+                <a:cs typeface="Arial" pitchFamily="34" charset="-120"/>
               </a:rPr>
               <a:t> → means the difference from the base run.</a:t>
             </a:r>
-            <a:endParaRPr lang="en-US" dirty="0"/>
+            <a:endParaRPr lang="en-US" sz="800" dirty="0"/>
           </a:p>
         </p:txBody>
       </p:sp>
@@ -5197,7 +4755,7 @@
             <a:lvl1pPr>
               <a:defRPr sz="1200">
                 <a:solidFill>
-                  <a:schemeClr val="tx1"/>
+                  <a:srgbClr val="000000"/>
                 </a:solidFill>
                 <a:latin typeface="Arial"/>
                 <a:ea typeface="Arial"/>
@@ -5242,14 +4800,14 @@
       </p:grpSpPr>
       <p:sp>
         <p:nvSpPr>
-          <p:cNvPr id="2" name="Text 0"/>
-          <p:cNvSpPr/>
+          <p:cNvPr id="2" name="Title"/>
+          <p:cNvSpPr txBox="1"/>
           <p:nvPr/>
         </p:nvSpPr>
         <p:spPr>
           <a:xfrm>
-            <a:off x="0" y="0"/>
-            <a:ext cx="6858000" cy="0"/>
+            <a:off x="365760" y="182880"/>
+            <a:ext cx="8412480" cy="411480"/>
           </a:xfrm>
           <a:prstGeom prst="rect">
             <a:avLst/>
@@ -5258,30 +4816,37 @@
           <a:ln/>
         </p:spPr>
         <p:txBody>
-          <a:bodyPr wrap="square" rtlCol="0"/>
+          <a:bodyPr wrap="square" lIns="0" tIns="0" rIns="0" bIns="0" rtlCol="0" anchor="t"/>
           <a:lstStyle/>
           <a:p>
-            <a:pPr indent="0" marL="0">
+            <a:pPr algn="l" indent="0" marL="0">
               <a:buNone/>
             </a:pPr>
             <a:r>
-              <a:rPr lang="en-US" dirty="0"/>
+              <a:rPr lang="en-US" sz="2200" dirty="0">
+                <a:solidFill>
+                  <a:srgbClr val="000000"/>
+                </a:solidFill>
+                <a:latin typeface="Arial" pitchFamily="34" charset="0"/>
+                <a:ea typeface="Arial" pitchFamily="34" charset="-122"/>
+                <a:cs typeface="Arial" pitchFamily="34" charset="-120"/>
+              </a:rPr>
               <a:t>TODO</a:t>
             </a:r>
-            <a:endParaRPr lang="en-US" dirty="0"/>
+            <a:endParaRPr lang="en-US" sz="2200" dirty="0"/>
           </a:p>
         </p:txBody>
       </p:sp>
       <p:sp>
         <p:nvSpPr>
-          <p:cNvPr id="3" name="Text 1"/>
-          <p:cNvSpPr/>
+          <p:cNvPr id="3" name="Topic"/>
+          <p:cNvSpPr txBox="1"/>
           <p:nvPr/>
         </p:nvSpPr>
         <p:spPr>
           <a:xfrm>
-            <a:off x="0" y="0"/>
-            <a:ext cx="6858000" cy="0"/>
+            <a:off x="365760" y="576072"/>
+            <a:ext cx="8412480" cy="274320"/>
           </a:xfrm>
           <a:prstGeom prst="rect">
             <a:avLst/>
@@ -5290,17 +4855,24 @@
           <a:ln/>
         </p:spPr>
         <p:txBody>
-          <a:bodyPr wrap="square" rtlCol="0"/>
+          <a:bodyPr wrap="square" lIns="0" tIns="0" rIns="0" bIns="0" rtlCol="0" anchor="t"/>
           <a:lstStyle/>
           <a:p>
-            <a:pPr indent="0" marL="0">
+            <a:pPr algn="l" indent="0" marL="0">
               <a:buNone/>
             </a:pPr>
             <a:r>
-              <a:rPr lang="en-US" dirty="0"/>
+              <a:rPr lang="en-US" sz="1250" dirty="0">
+                <a:solidFill>
+                  <a:srgbClr val="9C6B1E"/>
+                </a:solidFill>
+                <a:latin typeface="Arial" pitchFamily="34" charset="0"/>
+                <a:ea typeface="Arial" pitchFamily="34" charset="-122"/>
+                <a:cs typeface="Arial" pitchFamily="34" charset="-120"/>
+              </a:rPr>
               <a:t>Week of Oct. 13</a:t>
             </a:r>
-            <a:endParaRPr lang="en-US" dirty="0"/>
+            <a:endParaRPr lang="en-US" sz="1250" dirty="0"/>
           </a:p>
         </p:txBody>
       </p:sp>
@@ -5489,7 +5061,7 @@
             <a:lvl1pPr>
               <a:defRPr sz="1200">
                 <a:solidFill>
-                  <a:schemeClr val="tx1"/>
+                  <a:srgbClr val="000000"/>
                 </a:solidFill>
                 <a:latin typeface="Arial"/>
                 <a:ea typeface="Arial"/>
@@ -5534,105 +5106,8 @@
       </p:grpSpPr>
       <p:sp>
         <p:nvSpPr>
-          <p:cNvPr id="2" name="Text 0"/>
-          <p:cNvSpPr/>
-          <p:nvPr/>
-        </p:nvSpPr>
-        <p:spPr>
-          <a:xfrm>
-            <a:off x="0" y="0"/>
-            <a:ext cx="6858000" cy="0"/>
-          </a:xfrm>
-          <a:prstGeom prst="rect">
-            <a:avLst/>
-          </a:prstGeom>
-          <a:noFill/>
-          <a:ln/>
-        </p:spPr>
-        <p:txBody>
-          <a:bodyPr wrap="square" rtlCol="0"/>
-          <a:lstStyle/>
-          <a:p>
-            <a:pPr indent="0" marL="0">
-              <a:buNone/>
-            </a:pPr>
-            <a:r>
-              <a:rPr lang="en-US" dirty="0"/>
-              <a:t>Experiment: Does KV cache help?</a:t>
-            </a:r>
-            <a:endParaRPr lang="en-US" dirty="0"/>
-          </a:p>
-        </p:txBody>
-      </p:sp>
-      <p:sp>
-        <p:nvSpPr>
-          <p:cNvPr id="3" name="Text 1"/>
-          <p:cNvSpPr/>
-          <p:nvPr/>
-        </p:nvSpPr>
-        <p:spPr>
-          <a:xfrm>
-            <a:off x="0" y="0"/>
-            <a:ext cx="6858000" cy="0"/>
-          </a:xfrm>
-          <a:prstGeom prst="rect">
-            <a:avLst/>
-          </a:prstGeom>
-          <a:noFill/>
-          <a:ln/>
-        </p:spPr>
-        <p:txBody>
-          <a:bodyPr wrap="square" rtlCol="0"/>
-          <a:lstStyle/>
-          <a:p>
-            <a:pPr indent="0" marL="0">
-              <a:buNone/>
-            </a:pPr>
-            <a:r>
-              <a:rPr lang="en-US" b="1" u="sng" dirty="0">
-                <a:solidFill>
-                  <a:srgbClr val="000000"/>
-                </a:solidFill>
-              </a:rPr>
-              <a:t>*1</a:t>
-            </a:r>
-            <a:pPr indent="0" marL="0">
-              <a:buNone/>
-            </a:pPr>
-            <a:r>
-              <a:rPr lang="en-US" dirty="0">
-                <a:solidFill>
-                  <a:srgbClr val="000000"/>
-                </a:solidFill>
-              </a:rPr>
-              <a:t> Link: </a:t>
-            </a:r>
-            <a:pPr indent="0" marL="0">
-              <a:buNone/>
-            </a:pPr>
-            <a:r>
-              <a:rPr lang="en-US" u="sng" dirty="0">
-                <a:solidFill>
-                  <a:srgbClr val="0000EE"/>
-                </a:solidFill>
-                <a:hlinkClick r:id="rId1" invalidUrl="" action="" tgtFrame="" tooltip="" history="1" highlightClick="0" endSnd="0">
-                  <a:extLst>
-                    <a:ext uri="{A12FA001-AC4F-418D-AE19-62706E023703}">
-                      <ahyp:hlinkClr xmlns:ahyp="http://schemas.microsoft.com/office/drawing/2018/hyperlinkcolor" val="tx"/>
-                    </a:ext>
-                  </a:extLst>
-                </a:hlinkClick>
-              </a:rPr>
-              <a:t>https://github.com/torridfish/just3d/issues/17</a:t>
-            </a:r>
-            <a:endParaRPr lang="en-US" dirty="0"/>
-          </a:p>
-        </p:txBody>
-      </p:sp>
-      <p:sp>
-        <p:nvSpPr>
-          <p:cNvPr id="5" name="Text 1"/>
-          <p:cNvSpPr/>
+          <p:cNvPr id="2" name="Cover title"/>
+          <p:cNvSpPr txBox="1"/>
           <p:nvPr/>
         </p:nvSpPr>
         <p:spPr>
@@ -5653,7 +5128,92 @@
             <a:pPr algn="l" indent="0" marL="0">
               <a:buNone/>
             </a:pPr>
+            <a:r>
+              <a:rPr lang="en-US" sz="2600" b="1" dirty="0">
+                <a:solidFill>
+                  <a:srgbClr val="000000"/>
+                </a:solidFill>
+                <a:latin typeface="Arial" pitchFamily="34" charset="0"/>
+                <a:ea typeface="Arial" pitchFamily="34" charset="-122"/>
+                <a:cs typeface="Arial" pitchFamily="34" charset="-120"/>
+              </a:rPr>
+              <a:t>Experiment: Does KV cache help?</a:t>
+            </a:r>
             <a:endParaRPr lang="en-US" sz="2600" dirty="0"/>
+          </a:p>
+        </p:txBody>
+      </p:sp>
+      <p:sp>
+        <p:nvSpPr>
+          <p:cNvPr id="3" name="Footnote"/>
+          <p:cNvSpPr txBox="1"/>
+          <p:nvPr/>
+        </p:nvSpPr>
+        <p:spPr>
+          <a:xfrm>
+            <a:off x="0" y="4791456"/>
+            <a:ext cx="7863840" cy="356616"/>
+          </a:xfrm>
+          <a:prstGeom prst="rect">
+            <a:avLst/>
+          </a:prstGeom>
+          <a:noFill/>
+          <a:ln/>
+        </p:spPr>
+        <p:txBody>
+          <a:bodyPr wrap="square" lIns="91440" tIns="91440" rIns="91440" bIns="91440" rtlCol="0" anchor="ctr"/>
+          <a:lstStyle/>
+          <a:p>
+            <a:pPr algn="l" indent="0" marL="0">
+              <a:buNone/>
+            </a:pPr>
+            <a:r>
+              <a:rPr lang="en-US" sz="800" b="1" u="sng" dirty="0">
+                <a:solidFill>
+                  <a:srgbClr val="000000"/>
+                </a:solidFill>
+                <a:latin typeface="Arial" pitchFamily="34" charset="0"/>
+                <a:ea typeface="Arial" pitchFamily="34" charset="-122"/>
+                <a:cs typeface="Arial" pitchFamily="34" charset="-120"/>
+              </a:rPr>
+              <a:t>*1</a:t>
+            </a:r>
+            <a:pPr algn="l" indent="0" marL="0">
+              <a:buNone/>
+            </a:pPr>
+            <a:r>
+              <a:rPr lang="en-US" sz="800" dirty="0">
+                <a:solidFill>
+                  <a:srgbClr val="000000"/>
+                </a:solidFill>
+                <a:latin typeface="Arial" pitchFamily="34" charset="0"/>
+                <a:ea typeface="Arial" pitchFamily="34" charset="-122"/>
+                <a:cs typeface="Arial" pitchFamily="34" charset="-120"/>
+              </a:rPr>
+              <a:t> Link: </a:t>
+            </a:r>
+            <a:pPr algn="l" indent="0" marL="0">
+              <a:buNone/>
+            </a:pPr>
+            <a:r>
+              <a:rPr lang="en-US" sz="800" u="sng" dirty="0">
+                <a:solidFill>
+                  <a:srgbClr val="0000EE"/>
+                </a:solidFill>
+                <a:latin typeface="Arial" pitchFamily="34" charset="0"/>
+                <a:ea typeface="Arial" pitchFamily="34" charset="-122"/>
+                <a:cs typeface="Arial" pitchFamily="34" charset="-120"/>
+                <a:hlinkClick r:id="rId1" invalidUrl="" action="" tgtFrame="" tooltip="" history="1" highlightClick="0" endSnd="0">
+                  <a:extLst>
+                    <a:ext uri="{A12FA001-AC4F-418D-AE19-62706E023703}">
+                      <ahyp:hlinkClr xmlns:ahyp="http://schemas.microsoft.com/office/drawing/2018/hyperlinkcolor" val="tx"/>
+                    </a:ext>
+                  </a:extLst>
+                </a:hlinkClick>
+              </a:rPr>
+              <a:t>https://github.com/torridfish/just3d/issues/17</a:t>
+            </a:r>
+            <a:endParaRPr lang="en-US" sz="800" dirty="0"/>
           </a:p>
         </p:txBody>
       </p:sp>
@@ -5687,7 +5247,7 @@
             <a:lvl1pPr>
               <a:defRPr sz="1200">
                 <a:solidFill>
-                  <a:schemeClr val="tx1"/>
+                  <a:srgbClr val="000000"/>
                 </a:solidFill>
                 <a:latin typeface="Arial"/>
                 <a:ea typeface="Arial"/>
@@ -5732,11 +5292,9 @@
       </p:grpSpPr>
       <p:sp>
         <p:nvSpPr>
-          <p:cNvPr id="2" name="Text 0"/>
-          <p:cNvSpPr/>
-          <p:nvPr>
-            <p:ph idx="100" type="title" hasCustomPrompt="1"/>
-          </p:nvPr>
+          <p:cNvPr id="2" name="Divider"/>
+          <p:cNvSpPr txBox="1"/>
+          <p:nvPr/>
         </p:nvSpPr>
         <p:spPr>
           <a:xfrm>
@@ -5759,7 +5317,7 @@
             <a:r>
               <a:rPr lang="en-US" sz="2200" dirty="0">
                 <a:solidFill>
-                  <a:schemeClr val="tx1"/>
+                  <a:srgbClr val="000000"/>
                 </a:solidFill>
                 <a:latin typeface="Arial" pitchFamily="34" charset="0"/>
                 <a:ea typeface="Arial" pitchFamily="34" charset="-122"/>
@@ -5801,7 +5359,7 @@
             <a:lvl1pPr>
               <a:defRPr sz="1200">
                 <a:solidFill>
-                  <a:schemeClr val="tx1"/>
+                  <a:srgbClr val="000000"/>
                 </a:solidFill>
                 <a:latin typeface="Arial"/>
                 <a:ea typeface="Arial"/>
@@ -5846,14 +5404,14 @@
       </p:grpSpPr>
       <p:sp>
         <p:nvSpPr>
-          <p:cNvPr id="2" name="Text 0"/>
-          <p:cNvSpPr/>
+          <p:cNvPr id="2" name="Title"/>
+          <p:cNvSpPr txBox="1"/>
           <p:nvPr/>
         </p:nvSpPr>
         <p:spPr>
           <a:xfrm>
-            <a:off x="0" y="0"/>
-            <a:ext cx="6858000" cy="0"/>
+            <a:off x="365760" y="182880"/>
+            <a:ext cx="8412480" cy="411480"/>
           </a:xfrm>
           <a:prstGeom prst="rect">
             <a:avLst/>
@@ -5862,30 +5420,37 @@
           <a:ln/>
         </p:spPr>
         <p:txBody>
-          <a:bodyPr wrap="square" rtlCol="0"/>
+          <a:bodyPr wrap="square" lIns="0" tIns="0" rIns="0" bIns="0" rtlCol="0" anchor="t"/>
           <a:lstStyle/>
           <a:p>
-            <a:pPr indent="0" marL="0">
+            <a:pPr algn="l" indent="0" marL="0">
               <a:buNone/>
             </a:pPr>
             <a:r>
-              <a:rPr lang="en-US" dirty="0"/>
+              <a:rPr lang="en-US" sz="2200" dirty="0">
+                <a:solidFill>
+                  <a:srgbClr val="000000"/>
+                </a:solidFill>
+                <a:latin typeface="Arial" pitchFamily="34" charset="0"/>
+                <a:ea typeface="Arial" pitchFamily="34" charset="-122"/>
+                <a:cs typeface="Arial" pitchFamily="34" charset="-120"/>
+              </a:rPr>
               <a:t>Experiment</a:t>
             </a:r>
-            <a:endParaRPr lang="en-US" dirty="0"/>
+            <a:endParaRPr lang="en-US" sz="2200" dirty="0"/>
           </a:p>
         </p:txBody>
       </p:sp>
       <p:sp>
         <p:nvSpPr>
-          <p:cNvPr id="3" name="Text 1"/>
-          <p:cNvSpPr/>
+          <p:cNvPr id="3" name="Topic"/>
+          <p:cNvSpPr txBox="1"/>
           <p:nvPr/>
         </p:nvSpPr>
         <p:spPr>
           <a:xfrm>
-            <a:off x="0" y="0"/>
-            <a:ext cx="6858000" cy="0"/>
+            <a:off x="365760" y="576072"/>
+            <a:ext cx="8412480" cy="274320"/>
           </a:xfrm>
           <a:prstGeom prst="rect">
             <a:avLst/>
@@ -5894,27 +5459,32 @@
           <a:ln/>
         </p:spPr>
         <p:txBody>
-          <a:bodyPr wrap="square" rtlCol="0"/>
+          <a:bodyPr wrap="square" lIns="0" tIns="0" rIns="0" bIns="0" rtlCol="0" anchor="t"/>
           <a:lstStyle/>
           <a:p>
-            <a:pPr indent="0" marL="0">
+            <a:pPr algn="l" indent="0" marL="0">
               <a:buNone/>
             </a:pPr>
             <a:r>
-              <a:rPr lang="en-US" dirty="0"/>
+              <a:rPr lang="en-US" sz="1250" dirty="0">
+                <a:solidFill>
+                  <a:srgbClr val="9C6B1E"/>
+                </a:solidFill>
+                <a:latin typeface="Arial" pitchFamily="34" charset="0"/>
+                <a:ea typeface="Arial" pitchFamily="34" charset="-122"/>
+                <a:cs typeface="Arial" pitchFamily="34" charset="-120"/>
+              </a:rPr>
               <a:t>LLM backbone as its own proposer</a:t>
             </a:r>
-            <a:endParaRPr lang="en-US" dirty="0"/>
+            <a:endParaRPr lang="en-US" sz="1250" dirty="0"/>
           </a:p>
         </p:txBody>
       </p:sp>
       <p:sp>
         <p:nvSpPr>
-          <p:cNvPr id="4" name="Text 1"/>
-          <p:cNvSpPr/>
-          <p:nvPr>
-            <p:ph idx="103" type="body" hasCustomPrompt="1"/>
-          </p:nvPr>
+          <p:cNvPr id="4" name="Lead"/>
+          <p:cNvSpPr txBox="1"/>
+          <p:nvPr/>
         </p:nvSpPr>
         <p:spPr>
           <a:xfrm>
@@ -5937,7 +5507,7 @@
             <a:r>
               <a:rPr lang="en-US" sz="1200" dirty="0">
                 <a:solidFill>
-                  <a:schemeClr val="tx1"/>
+                  <a:srgbClr val="000000"/>
                 </a:solidFill>
                 <a:latin typeface="Times New Roman" pitchFamily="34" charset="0"/>
                 <a:ea typeface="Times New Roman" pitchFamily="34" charset="-122"/>
@@ -5954,7 +5524,7 @@
             <a:r>
               <a:rPr lang="en-US" sz="1200" dirty="0">
                 <a:solidFill>
-                  <a:schemeClr val="tx1"/>
+                  <a:srgbClr val="000000"/>
                 </a:solidFill>
                 <a:latin typeface="Times New Roman" pitchFamily="34" charset="0"/>
                 <a:ea typeface="Times New Roman" pitchFamily="34" charset="-122"/>
@@ -5968,14 +5538,14 @@
       </p:sp>
       <p:sp>
         <p:nvSpPr>
-          <p:cNvPr id="5" name="Text 3"/>
-          <p:cNvSpPr/>
+          <p:cNvPr id="5" name="Footnote"/>
+          <p:cNvSpPr txBox="1"/>
           <p:nvPr/>
         </p:nvSpPr>
         <p:spPr>
           <a:xfrm>
-            <a:off x="0" y="0"/>
-            <a:ext cx="6858000" cy="0"/>
+            <a:off x="0" y="4791456"/>
+            <a:ext cx="7863840" cy="356616"/>
           </a:xfrm>
           <a:prstGeom prst="rect">
             <a:avLst/>
@@ -5984,54 +5554,66 @@
           <a:ln/>
         </p:spPr>
         <p:txBody>
-          <a:bodyPr wrap="square" rtlCol="0"/>
+          <a:bodyPr wrap="square" lIns="91440" tIns="91440" rIns="91440" bIns="91440" rtlCol="0" anchor="ctr"/>
           <a:lstStyle/>
           <a:p>
-            <a:pPr indent="0" marL="0">
+            <a:pPr algn="l" indent="0" marL="0">
               <a:buNone/>
             </a:pPr>
             <a:r>
-              <a:rPr lang="en-US" b="1" u="sng" dirty="0">
+              <a:rPr lang="en-US" sz="800" b="1" u="sng" dirty="0">
                 <a:solidFill>
                   <a:srgbClr val="000000"/>
                 </a:solidFill>
+                <a:latin typeface="Arial" pitchFamily="34" charset="0"/>
+                <a:ea typeface="Arial" pitchFamily="34" charset="-122"/>
+                <a:cs typeface="Arial" pitchFamily="34" charset="-120"/>
               </a:rPr>
               <a:t>*1</a:t>
             </a:r>
-            <a:pPr indent="0" marL="0">
+            <a:pPr algn="l" indent="0" marL="0">
               <a:buNone/>
             </a:pPr>
             <a:r>
-              <a:rPr lang="en-US" dirty="0">
+              <a:rPr lang="en-US" sz="800" dirty="0">
                 <a:solidFill>
                   <a:srgbClr val="000000"/>
                 </a:solidFill>
+                <a:latin typeface="Arial" pitchFamily="34" charset="0"/>
+                <a:ea typeface="Arial" pitchFamily="34" charset="-122"/>
+                <a:cs typeface="Arial" pitchFamily="34" charset="-120"/>
               </a:rPr>
               <a:t> Proposal should be scene-shared, so KV cache </a:t>
             </a:r>
-            <a:pPr indent="0" marL="0">
+            <a:pPr algn="l" indent="0" marL="0">
               <a:buNone/>
             </a:pPr>
             <a:r>
-              <a:rPr lang="en-US" b="1" dirty="0">
+              <a:rPr lang="en-US" sz="800" b="1" dirty="0">
                 <a:solidFill>
                   <a:srgbClr val="000000"/>
                 </a:solidFill>
+                <a:latin typeface="Arial" pitchFamily="34" charset="0"/>
+                <a:ea typeface="Arial" pitchFamily="34" charset="-122"/>
+                <a:cs typeface="Arial" pitchFamily="34" charset="-120"/>
               </a:rPr>
               <a:t>reuse</a:t>
             </a:r>
-            <a:pPr indent="0" marL="0">
+            <a:pPr algn="l" indent="0" marL="0">
               <a:buNone/>
             </a:pPr>
             <a:r>
-              <a:rPr lang="en-US" dirty="0">
+              <a:rPr lang="en-US" sz="800" dirty="0">
                 <a:solidFill>
                   <a:srgbClr val="000000"/>
                 </a:solidFill>
+                <a:latin typeface="Arial" pitchFamily="34" charset="0"/>
+                <a:ea typeface="Arial" pitchFamily="34" charset="-122"/>
+                <a:cs typeface="Arial" pitchFamily="34" charset="-120"/>
               </a:rPr>
               <a:t> here might not be the main proposal.</a:t>
             </a:r>
-            <a:endParaRPr lang="en-US" dirty="0"/>
+            <a:endParaRPr lang="en-US" sz="800" dirty="0"/>
           </a:p>
         </p:txBody>
       </p:sp>
@@ -6089,7 +5671,7 @@
             <a:lvl1pPr>
               <a:defRPr sz="1200">
                 <a:solidFill>
-                  <a:schemeClr val="tx1"/>
+                  <a:srgbClr val="000000"/>
                 </a:solidFill>
                 <a:latin typeface="Arial"/>
                 <a:ea typeface="Arial"/>
@@ -6134,14 +5716,14 @@
       </p:grpSpPr>
       <p:sp>
         <p:nvSpPr>
-          <p:cNvPr id="2" name="Text 0"/>
-          <p:cNvSpPr/>
+          <p:cNvPr id="2" name="Title"/>
+          <p:cNvSpPr txBox="1"/>
           <p:nvPr/>
         </p:nvSpPr>
         <p:spPr>
           <a:xfrm>
-            <a:off x="0" y="0"/>
-            <a:ext cx="6858000" cy="0"/>
+            <a:off x="365760" y="182880"/>
+            <a:ext cx="8412480" cy="411480"/>
           </a:xfrm>
           <a:prstGeom prst="rect">
             <a:avLst/>
@@ -6150,30 +5732,37 @@
           <a:ln/>
         </p:spPr>
         <p:txBody>
-          <a:bodyPr wrap="square" rtlCol="0"/>
+          <a:bodyPr wrap="square" lIns="0" tIns="0" rIns="0" bIns="0" rtlCol="0" anchor="t"/>
           <a:lstStyle/>
           <a:p>
-            <a:pPr indent="0" marL="0">
+            <a:pPr algn="l" indent="0" marL="0">
               <a:buNone/>
             </a:pPr>
             <a:r>
-              <a:rPr lang="en-US" dirty="0"/>
+              <a:rPr lang="en-US" sz="2200" dirty="0">
+                <a:solidFill>
+                  <a:srgbClr val="000000"/>
+                </a:solidFill>
+                <a:latin typeface="Arial" pitchFamily="34" charset="0"/>
+                <a:ea typeface="Arial" pitchFamily="34" charset="-122"/>
+                <a:cs typeface="Arial" pitchFamily="34" charset="-120"/>
+              </a:rPr>
               <a:t>Setup</a:t>
             </a:r>
-            <a:endParaRPr lang="en-US" dirty="0"/>
+            <a:endParaRPr lang="en-US" sz="2200" dirty="0"/>
           </a:p>
         </p:txBody>
       </p:sp>
       <p:sp>
         <p:nvSpPr>
-          <p:cNvPr id="3" name="Text 1"/>
-          <p:cNvSpPr/>
+          <p:cNvPr id="3" name="Topic"/>
+          <p:cNvSpPr txBox="1"/>
           <p:nvPr/>
         </p:nvSpPr>
         <p:spPr>
           <a:xfrm>
-            <a:off x="0" y="0"/>
-            <a:ext cx="6858000" cy="0"/>
+            <a:off x="365760" y="576072"/>
+            <a:ext cx="8412480" cy="274320"/>
           </a:xfrm>
           <a:prstGeom prst="rect">
             <a:avLst/>
@@ -6182,27 +5771,32 @@
           <a:ln/>
         </p:spPr>
         <p:txBody>
-          <a:bodyPr wrap="square" rtlCol="0"/>
+          <a:bodyPr wrap="square" lIns="0" tIns="0" rIns="0" bIns="0" rtlCol="0" anchor="t"/>
           <a:lstStyle/>
           <a:p>
-            <a:pPr indent="0" marL="0">
+            <a:pPr algn="l" indent="0" marL="0">
               <a:buNone/>
             </a:pPr>
             <a:r>
-              <a:rPr lang="en-US" dirty="0"/>
+              <a:rPr lang="en-US" sz="1250" dirty="0">
+                <a:solidFill>
+                  <a:srgbClr val="9C6B1E"/>
+                </a:solidFill>
+                <a:latin typeface="Arial" pitchFamily="34" charset="0"/>
+                <a:ea typeface="Arial" pitchFamily="34" charset="-122"/>
+                <a:cs typeface="Arial" pitchFamily="34" charset="-120"/>
+              </a:rPr>
               <a:t>draw.io diagram kit</a:t>
             </a:r>
-            <a:endParaRPr lang="en-US" dirty="0"/>
+            <a:endParaRPr lang="en-US" sz="1250" dirty="0"/>
           </a:p>
         </p:txBody>
       </p:sp>
       <p:sp>
         <p:nvSpPr>
-          <p:cNvPr id="4" name="Text 1"/>
-          <p:cNvSpPr/>
-          <p:nvPr>
-            <p:ph idx="103" type="body" hasCustomPrompt="1"/>
-          </p:nvPr>
+          <p:cNvPr id="4" name="Lead"/>
+          <p:cNvSpPr txBox="1"/>
+          <p:nvPr/>
         </p:nvSpPr>
         <p:spPr>
           <a:xfrm>
@@ -6225,7 +5819,7 @@
             <a:r>
               <a:rPr lang="en-US" sz="1200" dirty="0">
                 <a:solidFill>
-                  <a:schemeClr val="tx1"/>
+                  <a:srgbClr val="000000"/>
                 </a:solidFill>
                 <a:latin typeface="Times New Roman" pitchFamily="34" charset="0"/>
                 <a:ea typeface="Times New Roman" pitchFamily="34" charset="-122"/>
@@ -6239,14 +5833,14 @@
       </p:sp>
       <p:sp>
         <p:nvSpPr>
-          <p:cNvPr id="5" name="Text 3"/>
-          <p:cNvSpPr/>
+          <p:cNvPr id="5" name="Footnote"/>
+          <p:cNvSpPr txBox="1"/>
           <p:nvPr/>
         </p:nvSpPr>
         <p:spPr>
           <a:xfrm>
-            <a:off x="0" y="0"/>
-            <a:ext cx="6858000" cy="0"/>
+            <a:off x="0" y="4791456"/>
+            <a:ext cx="7863840" cy="356616"/>
           </a:xfrm>
           <a:prstGeom prst="rect">
             <a:avLst/>
@@ -6255,32 +5849,38 @@
           <a:ln/>
         </p:spPr>
         <p:txBody>
-          <a:bodyPr wrap="square" rtlCol="0"/>
+          <a:bodyPr wrap="square" lIns="91440" tIns="91440" rIns="91440" bIns="91440" rtlCol="0" anchor="ctr"/>
           <a:lstStyle/>
           <a:p>
-            <a:pPr indent="0" marL="0">
+            <a:pPr algn="l" indent="0" marL="0">
               <a:buNone/>
             </a:pPr>
             <a:r>
-              <a:rPr lang="en-US" b="1" u="sng" dirty="0">
+              <a:rPr lang="en-US" sz="800" b="1" u="sng" dirty="0">
                 <a:solidFill>
                   <a:srgbClr val="000000"/>
                 </a:solidFill>
+                <a:latin typeface="Arial" pitchFamily="34" charset="0"/>
+                <a:ea typeface="Arial" pitchFamily="34" charset="-122"/>
+                <a:cs typeface="Arial" pitchFamily="34" charset="-120"/>
               </a:rPr>
               <a:t>*1</a:t>
             </a:r>
-            <a:pPr indent="0" marL="0">
+            <a:pPr algn="l" indent="0" marL="0">
               <a:buNone/>
             </a:pPr>
             <a:r>
-              <a:rPr lang="en-US" dirty="0">
+              <a:rPr lang="en-US" sz="800" dirty="0">
                 <a:solidFill>
                   <a:srgbClr val="000000"/>
                 </a:solidFill>
+                <a:latin typeface="Arial" pitchFamily="34" charset="0"/>
+                <a:ea typeface="Arial" pitchFamily="34" charset="-122"/>
+                <a:cs typeface="Arial" pitchFamily="34" charset="-120"/>
               </a:rPr>
               <a:t> Source: assets/Diagrams/research-slides-diagram-kit.drawio — export with the research-slides skill: scripts/drawio-export.sh</a:t>
             </a:r>
-            <a:endParaRPr lang="en-US" dirty="0"/>
+            <a:endParaRPr lang="en-US" sz="800" dirty="0"/>
           </a:p>
         </p:txBody>
       </p:sp>
@@ -6338,7 +5938,7 @@
             <a:lvl1pPr>
               <a:defRPr sz="1200">
                 <a:solidFill>
-                  <a:schemeClr val="tx1"/>
+                  <a:srgbClr val="000000"/>
                 </a:solidFill>
                 <a:latin typeface="Arial"/>
                 <a:ea typeface="Arial"/>
@@ -6383,14 +5983,14 @@
       </p:grpSpPr>
       <p:sp>
         <p:nvSpPr>
-          <p:cNvPr id="2" name="Text 0"/>
-          <p:cNvSpPr/>
+          <p:cNvPr id="2" name="Title"/>
+          <p:cNvSpPr txBox="1"/>
           <p:nvPr/>
         </p:nvSpPr>
         <p:spPr>
           <a:xfrm>
-            <a:off x="0" y="0"/>
-            <a:ext cx="6858000" cy="0"/>
+            <a:off x="365760" y="182880"/>
+            <a:ext cx="8412480" cy="411480"/>
           </a:xfrm>
           <a:prstGeom prst="rect">
             <a:avLst/>
@@ -6399,30 +5999,37 @@
           <a:ln/>
         </p:spPr>
         <p:txBody>
-          <a:bodyPr wrap="square" rtlCol="0"/>
+          <a:bodyPr wrap="square" lIns="0" tIns="0" rIns="0" bIns="0" rtlCol="0" anchor="t"/>
           <a:lstStyle/>
           <a:p>
-            <a:pPr indent="0" marL="0">
+            <a:pPr algn="l" indent="0" marL="0">
               <a:buNone/>
             </a:pPr>
             <a:r>
-              <a:rPr lang="en-US" dirty="0"/>
+              <a:rPr lang="en-US" sz="2200" dirty="0">
+                <a:solidFill>
+                  <a:srgbClr val="000000"/>
+                </a:solidFill>
+                <a:latin typeface="Arial" pitchFamily="34" charset="0"/>
+                <a:ea typeface="Arial" pitchFamily="34" charset="-122"/>
+                <a:cs typeface="Arial" pitchFamily="34" charset="-120"/>
+              </a:rPr>
               <a:t>Benchmark</a:t>
             </a:r>
-            <a:endParaRPr lang="en-US" dirty="0"/>
+            <a:endParaRPr lang="en-US" sz="2200" dirty="0"/>
           </a:p>
         </p:txBody>
       </p:sp>
       <p:sp>
         <p:nvSpPr>
-          <p:cNvPr id="3" name="Text 1"/>
-          <p:cNvSpPr/>
+          <p:cNvPr id="3" name="Topic"/>
+          <p:cNvSpPr txBox="1"/>
           <p:nvPr/>
         </p:nvSpPr>
         <p:spPr>
           <a:xfrm>
-            <a:off x="0" y="0"/>
-            <a:ext cx="6858000" cy="0"/>
+            <a:off x="365760" y="576072"/>
+            <a:ext cx="8412480" cy="274320"/>
           </a:xfrm>
           <a:prstGeom prst="rect">
             <a:avLst/>
@@ -6431,30 +6038,37 @@
           <a:ln/>
         </p:spPr>
         <p:txBody>
-          <a:bodyPr wrap="square" rtlCol="0"/>
+          <a:bodyPr wrap="square" lIns="0" tIns="0" rIns="0" bIns="0" rtlCol="0" anchor="t"/>
           <a:lstStyle/>
           <a:p>
-            <a:pPr indent="0" marL="0">
+            <a:pPr algn="l" indent="0" marL="0">
               <a:buNone/>
             </a:pPr>
             <a:r>
-              <a:rPr lang="en-US" dirty="0"/>
+              <a:rPr lang="en-US" sz="1250" dirty="0">
+                <a:solidFill>
+                  <a:srgbClr val="9C6B1E"/>
+                </a:solidFill>
+                <a:latin typeface="Arial" pitchFamily="34" charset="0"/>
+                <a:ea typeface="Arial" pitchFamily="34" charset="-122"/>
+                <a:cs typeface="Arial" pitchFamily="34" charset="-120"/>
+              </a:rPr>
               <a:t>ScanRefer</a:t>
             </a:r>
-            <a:endParaRPr lang="en-US" dirty="0"/>
+            <a:endParaRPr lang="en-US" sz="1250" dirty="0"/>
           </a:p>
         </p:txBody>
       </p:sp>
       <p:sp>
         <p:nvSpPr>
-          <p:cNvPr id="4" name="Text 2"/>
-          <p:cNvSpPr/>
+          <p:cNvPr id="4" name="Footnote"/>
+          <p:cNvSpPr txBox="1"/>
           <p:nvPr/>
         </p:nvSpPr>
         <p:spPr>
           <a:xfrm>
-            <a:off x="0" y="0"/>
-            <a:ext cx="6858000" cy="0"/>
+            <a:off x="0" y="4791456"/>
+            <a:ext cx="7863840" cy="356616"/>
           </a:xfrm>
           <a:prstGeom prst="rect">
             <a:avLst/>
@@ -6463,32 +6077,38 @@
           <a:ln/>
         </p:spPr>
         <p:txBody>
-          <a:bodyPr wrap="square" rtlCol="0"/>
+          <a:bodyPr wrap="square" lIns="91440" tIns="91440" rIns="91440" bIns="91440" rtlCol="0" anchor="ctr"/>
           <a:lstStyle/>
           <a:p>
-            <a:pPr indent="0" marL="0">
+            <a:pPr algn="l" indent="0" marL="0">
               <a:buNone/>
             </a:pPr>
             <a:r>
-              <a:rPr lang="en-US" b="1" u="sng" dirty="0">
+              <a:rPr lang="en-US" sz="800" b="1" u="sng" dirty="0">
                 <a:solidFill>
                   <a:srgbClr val="000000"/>
                 </a:solidFill>
+                <a:latin typeface="Arial" pitchFamily="34" charset="0"/>
+                <a:ea typeface="Arial" pitchFamily="34" charset="-122"/>
+                <a:cs typeface="Arial" pitchFamily="34" charset="-120"/>
               </a:rPr>
               <a:t>*1</a:t>
             </a:r>
-            <a:pPr indent="0" marL="0">
+            <a:pPr algn="l" indent="0" marL="0">
               <a:buNone/>
             </a:pPr>
             <a:r>
-              <a:rPr lang="en-US" dirty="0">
+              <a:rPr lang="en-US" sz="800" dirty="0">
                 <a:solidFill>
                   <a:srgbClr val="000000"/>
                 </a:solidFill>
+                <a:latin typeface="Arial" pitchFamily="34" charset="0"/>
+                <a:ea typeface="Arial" pitchFamily="34" charset="-122"/>
+                <a:cs typeface="Arial" pitchFamily="34" charset="-120"/>
               </a:rPr>
               <a:t> 2-92 is last week's reference; 4-00 is this week's run, 4-03 the best of the category C setups.</a:t>
             </a:r>
-            <a:endParaRPr lang="en-US" dirty="0"/>
+            <a:endParaRPr lang="en-US" sz="800" dirty="0"/>
           </a:p>
         </p:txBody>
       </p:sp>
@@ -13039,7 +12659,7 @@
             <a:lvl1pPr>
               <a:defRPr sz="1200">
                 <a:solidFill>
-                  <a:schemeClr val="tx1"/>
+                  <a:srgbClr val="000000"/>
                 </a:solidFill>
                 <a:latin typeface="Arial"/>
                 <a:ea typeface="Arial"/>
@@ -13084,14 +12704,14 @@
       </p:grpSpPr>
       <p:sp>
         <p:nvSpPr>
-          <p:cNvPr id="2" name="Text 0"/>
-          <p:cNvSpPr/>
+          <p:cNvPr id="2" name="Title"/>
+          <p:cNvSpPr txBox="1"/>
           <p:nvPr/>
         </p:nvSpPr>
         <p:spPr>
           <a:xfrm>
-            <a:off x="0" y="0"/>
-            <a:ext cx="6858000" cy="0"/>
+            <a:off x="365760" y="182880"/>
+            <a:ext cx="8412480" cy="411480"/>
           </a:xfrm>
           <a:prstGeom prst="rect">
             <a:avLst/>
@@ -13100,30 +12720,37 @@
           <a:ln/>
         </p:spPr>
         <p:txBody>
-          <a:bodyPr wrap="square" rtlCol="0"/>
+          <a:bodyPr wrap="square" lIns="0" tIns="0" rIns="0" bIns="0" rtlCol="0" anchor="t"/>
           <a:lstStyle/>
           <a:p>
-            <a:pPr indent="0" marL="0">
+            <a:pPr algn="l" indent="0" marL="0">
               <a:buNone/>
             </a:pPr>
             <a:r>
-              <a:rPr lang="en-US" dirty="0"/>
+              <a:rPr lang="en-US" sz="2200" dirty="0">
+                <a:solidFill>
+                  <a:srgbClr val="000000"/>
+                </a:solidFill>
+                <a:latin typeface="Arial" pitchFamily="34" charset="0"/>
+                <a:ea typeface="Arial" pitchFamily="34" charset="-122"/>
+                <a:cs typeface="Arial" pitchFamily="34" charset="-120"/>
+              </a:rPr>
               <a:t>Appendix: Reasoning representation</a:t>
             </a:r>
-            <a:endParaRPr lang="en-US" dirty="0"/>
+            <a:endParaRPr lang="en-US" sz="2200" dirty="0"/>
           </a:p>
         </p:txBody>
       </p:sp>
       <p:sp>
         <p:nvSpPr>
-          <p:cNvPr id="3" name="Text 1"/>
-          <p:cNvSpPr/>
+          <p:cNvPr id="3" name="Topic"/>
+          <p:cNvSpPr txBox="1"/>
           <p:nvPr/>
         </p:nvSpPr>
         <p:spPr>
           <a:xfrm>
-            <a:off x="0" y="0"/>
-            <a:ext cx="6858000" cy="0"/>
+            <a:off x="365760" y="576072"/>
+            <a:ext cx="8412480" cy="274320"/>
           </a:xfrm>
           <a:prstGeom prst="rect">
             <a:avLst/>
@@ -13132,30 +12759,37 @@
           <a:ln/>
         </p:spPr>
         <p:txBody>
-          <a:bodyPr wrap="square" rtlCol="0"/>
+          <a:bodyPr wrap="square" lIns="0" tIns="0" rIns="0" bIns="0" rtlCol="0" anchor="t"/>
           <a:lstStyle/>
           <a:p>
-            <a:pPr indent="0" marL="0">
+            <a:pPr algn="l" indent="0" marL="0">
               <a:buNone/>
             </a:pPr>
             <a:r>
-              <a:rPr lang="en-US" dirty="0"/>
+              <a:rPr lang="en-US" sz="1250" dirty="0">
+                <a:solidFill>
+                  <a:srgbClr val="9C6B1E"/>
+                </a:solidFill>
+                <a:latin typeface="Arial" pitchFamily="34" charset="0"/>
+                <a:ea typeface="Arial" pitchFamily="34" charset="-122"/>
+                <a:cs typeface="Arial" pitchFamily="34" charset="-120"/>
+              </a:rPr>
               <a:t>Previous work</a:t>
             </a:r>
-            <a:endParaRPr lang="en-US" dirty="0"/>
+            <a:endParaRPr lang="en-US" sz="1250" dirty="0"/>
           </a:p>
         </p:txBody>
       </p:sp>
       <p:sp>
         <p:nvSpPr>
-          <p:cNvPr id="4" name="Text 2"/>
-          <p:cNvSpPr/>
+          <p:cNvPr id="4" name="Footnote"/>
+          <p:cNvSpPr txBox="1"/>
           <p:nvPr/>
         </p:nvSpPr>
         <p:spPr>
           <a:xfrm>
-            <a:off x="0" y="0"/>
-            <a:ext cx="6858000" cy="0"/>
+            <a:off x="0" y="4791456"/>
+            <a:ext cx="7863840" cy="356616"/>
           </a:xfrm>
           <a:prstGeom prst="rect">
             <a:avLst/>
@@ -13164,39 +12798,48 @@
           <a:ln/>
         </p:spPr>
         <p:txBody>
-          <a:bodyPr wrap="square" rtlCol="0"/>
+          <a:bodyPr wrap="square" lIns="91440" tIns="91440" rIns="91440" bIns="91440" rtlCol="0" anchor="ctr"/>
           <a:lstStyle/>
           <a:p>
-            <a:pPr indent="0" marL="0">
+            <a:pPr algn="l" indent="0" marL="0">
               <a:buNone/>
             </a:pPr>
             <a:r>
-              <a:rPr lang="en-US" b="1" u="sng" dirty="0">
+              <a:rPr lang="en-US" sz="800" b="1" u="sng" dirty="0">
                 <a:solidFill>
                   <a:srgbClr val="000000"/>
                 </a:solidFill>
+                <a:latin typeface="Arial" pitchFamily="34" charset="0"/>
+                <a:ea typeface="Arial" pitchFamily="34" charset="-122"/>
+                <a:cs typeface="Arial" pitchFamily="34" charset="-120"/>
               </a:rPr>
               <a:t>*1</a:t>
             </a:r>
-            <a:pPr indent="0" marL="0">
+            <a:pPr algn="l" indent="0" marL="0">
               <a:buNone/>
             </a:pPr>
             <a:r>
-              <a:rPr lang="en-US" dirty="0">
+              <a:rPr lang="en-US" sz="800" dirty="0">
                 <a:solidFill>
                   <a:srgbClr val="000000"/>
                 </a:solidFill>
+                <a:latin typeface="Arial" pitchFamily="34" charset="0"/>
+                <a:ea typeface="Arial" pitchFamily="34" charset="-122"/>
+                <a:cs typeface="Arial" pitchFamily="34" charset="-120"/>
               </a:rPr>
               <a:t> </a:t>
             </a:r>
-            <a:pPr indent="0" marL="0">
+            <a:pPr algn="l" indent="0" marL="0">
               <a:buNone/>
             </a:pPr>
             <a:r>
-              <a:rPr lang="en-US" u="sng" dirty="0">
+              <a:rPr lang="en-US" sz="800" u="sng" dirty="0">
                 <a:solidFill>
                   <a:srgbClr val="0000EE"/>
                 </a:solidFill>
+                <a:latin typeface="Arial" pitchFamily="34" charset="0"/>
+                <a:ea typeface="Arial" pitchFamily="34" charset="-122"/>
+                <a:cs typeface="Arial" pitchFamily="34" charset="-120"/>
                 <a:hlinkClick r:id="rId1" invalidUrl="" action="" tgtFrame="" tooltip="" history="1" highlightClick="0" endSnd="0">
                   <a:extLst>
                     <a:ext uri="{A12FA001-AC4F-418D-AE19-62706E023703}">
@@ -13207,7 +12850,7 @@
               </a:rPr>
               <a:t>https://github.com/torridfish/lrm/issues/6</a:t>
             </a:r>
-            <a:endParaRPr lang="en-US" dirty="0"/>
+            <a:endParaRPr lang="en-US" sz="800" dirty="0"/>
           </a:p>
         </p:txBody>
       </p:sp>
@@ -15014,7 +14657,7 @@
             <a:lvl1pPr>
               <a:defRPr sz="1200">
                 <a:solidFill>
-                  <a:schemeClr val="tx1"/>
+                  <a:srgbClr val="000000"/>
                 </a:solidFill>
                 <a:latin typeface="Arial"/>
                 <a:ea typeface="Arial"/>
@@ -15059,14 +14702,14 @@
       </p:grpSpPr>
       <p:sp>
         <p:nvSpPr>
-          <p:cNvPr id="2" name="Text 0"/>
-          <p:cNvSpPr/>
+          <p:cNvPr id="2" name="Title"/>
+          <p:cNvSpPr txBox="1"/>
           <p:nvPr/>
         </p:nvSpPr>
         <p:spPr>
           <a:xfrm>
-            <a:off x="0" y="0"/>
-            <a:ext cx="6858000" cy="0"/>
+            <a:off x="365760" y="182880"/>
+            <a:ext cx="8412480" cy="411480"/>
           </a:xfrm>
           <a:prstGeom prst="rect">
             <a:avLst/>
@@ -15075,30 +14718,37 @@
           <a:ln/>
         </p:spPr>
         <p:txBody>
-          <a:bodyPr wrap="square" rtlCol="0"/>
+          <a:bodyPr wrap="square" lIns="0" tIns="0" rIns="0" bIns="0" rtlCol="0" anchor="t"/>
           <a:lstStyle/>
           <a:p>
-            <a:pPr indent="0" marL="0">
+            <a:pPr algn="l" indent="0" marL="0">
               <a:buNone/>
             </a:pPr>
             <a:r>
-              <a:rPr lang="en-US" dirty="0"/>
+              <a:rPr lang="en-US" sz="2200" dirty="0">
+                <a:solidFill>
+                  <a:srgbClr val="000000"/>
+                </a:solidFill>
+                <a:latin typeface="Arial" pitchFamily="34" charset="0"/>
+                <a:ea typeface="Arial" pitchFamily="34" charset="-122"/>
+                <a:cs typeface="Arial" pitchFamily="34" charset="-120"/>
+              </a:rPr>
               <a:t>Backbone sharing</a:t>
             </a:r>
-            <a:endParaRPr lang="en-US" dirty="0"/>
+            <a:endParaRPr lang="en-US" sz="2200" dirty="0"/>
           </a:p>
         </p:txBody>
       </p:sp>
       <p:sp>
         <p:nvSpPr>
-          <p:cNvPr id="3" name="Text 1"/>
-          <p:cNvSpPr/>
+          <p:cNvPr id="3" name="Topic"/>
+          <p:cNvSpPr txBox="1"/>
           <p:nvPr/>
         </p:nvSpPr>
         <p:spPr>
           <a:xfrm>
-            <a:off x="0" y="0"/>
-            <a:ext cx="6858000" cy="0"/>
+            <a:off x="365760" y="576072"/>
+            <a:ext cx="8412480" cy="274320"/>
           </a:xfrm>
           <a:prstGeom prst="rect">
             <a:avLst/>
@@ -15107,30 +14757,37 @@
           <a:ln/>
         </p:spPr>
         <p:txBody>
-          <a:bodyPr wrap="square" rtlCol="0"/>
+          <a:bodyPr wrap="square" lIns="0" tIns="0" rIns="0" bIns="0" rtlCol="0" anchor="t"/>
           <a:lstStyle/>
           <a:p>
-            <a:pPr indent="0" marL="0">
+            <a:pPr algn="l" indent="0" marL="0">
               <a:buNone/>
             </a:pPr>
             <a:r>
-              <a:rPr lang="en-US" dirty="0"/>
+              <a:rPr lang="en-US" sz="1250" dirty="0">
+                <a:solidFill>
+                  <a:srgbClr val="9C6B1E"/>
+                </a:solidFill>
+                <a:latin typeface="Arial" pitchFamily="34" charset="0"/>
+                <a:ea typeface="Arial" pitchFamily="34" charset="-122"/>
+                <a:cs typeface="Arial" pitchFamily="34" charset="-120"/>
+              </a:rPr>
               <a:t>Transfusion</a:t>
             </a:r>
-            <a:endParaRPr lang="en-US" dirty="0"/>
+            <a:endParaRPr lang="en-US" sz="1250" dirty="0"/>
           </a:p>
         </p:txBody>
       </p:sp>
       <p:sp>
         <p:nvSpPr>
-          <p:cNvPr id="4" name="Text 2"/>
-          <p:cNvSpPr/>
+          <p:cNvPr id="4" name="Footnote"/>
+          <p:cNvSpPr txBox="1"/>
           <p:nvPr/>
         </p:nvSpPr>
         <p:spPr>
           <a:xfrm>
-            <a:off x="0" y="0"/>
-            <a:ext cx="6858000" cy="0"/>
+            <a:off x="0" y="4791456"/>
+            <a:ext cx="7863840" cy="356616"/>
           </a:xfrm>
           <a:prstGeom prst="rect">
             <a:avLst/>
@@ -15139,39 +14796,48 @@
           <a:ln/>
         </p:spPr>
         <p:txBody>
-          <a:bodyPr wrap="square" rtlCol="0"/>
+          <a:bodyPr wrap="square" lIns="91440" tIns="91440" rIns="91440" bIns="91440" rtlCol="0" anchor="ctr"/>
           <a:lstStyle/>
           <a:p>
-            <a:pPr indent="0" marL="0">
+            <a:pPr algn="l" indent="0" marL="0">
               <a:buNone/>
             </a:pPr>
             <a:r>
-              <a:rPr lang="en-US" b="1" u="sng" dirty="0">
+              <a:rPr lang="en-US" sz="800" b="1" u="sng" dirty="0">
                 <a:solidFill>
                   <a:srgbClr val="000000"/>
                 </a:solidFill>
+                <a:latin typeface="Arial" pitchFamily="34" charset="0"/>
+                <a:ea typeface="Arial" pitchFamily="34" charset="-122"/>
+                <a:cs typeface="Arial" pitchFamily="34" charset="-120"/>
               </a:rPr>
               <a:t>*1</a:t>
             </a:r>
-            <a:pPr indent="0" marL="0">
+            <a:pPr algn="l" indent="0" marL="0">
               <a:buNone/>
             </a:pPr>
             <a:r>
-              <a:rPr lang="en-US" dirty="0">
+              <a:rPr lang="en-US" sz="800" dirty="0">
                 <a:solidFill>
                   <a:srgbClr val="000000"/>
                 </a:solidFill>
+                <a:latin typeface="Arial" pitchFamily="34" charset="0"/>
+                <a:ea typeface="Arial" pitchFamily="34" charset="-122"/>
+                <a:cs typeface="Arial" pitchFamily="34" charset="-120"/>
               </a:rPr>
               <a:t> </a:t>
             </a:r>
-            <a:pPr indent="0" marL="0">
+            <a:pPr algn="l" indent="0" marL="0">
               <a:buNone/>
             </a:pPr>
             <a:r>
-              <a:rPr lang="en-US" u="sng" dirty="0">
+              <a:rPr lang="en-US" sz="800" u="sng" dirty="0">
                 <a:solidFill>
                   <a:srgbClr val="0000EE"/>
                 </a:solidFill>
+                <a:latin typeface="Arial" pitchFamily="34" charset="0"/>
+                <a:ea typeface="Arial" pitchFamily="34" charset="-122"/>
+                <a:cs typeface="Arial" pitchFamily="34" charset="-120"/>
                 <a:hlinkClick r:id="rId1" invalidUrl="" action="" tgtFrame="" tooltip="" history="1" highlightClick="0" endSnd="0">
                   <a:extLst>
                     <a:ext uri="{A12FA001-AC4F-418D-AE19-62706E023703}">
@@ -15182,7 +14848,7 @@
               </a:rPr>
               <a:t>https://arxiv.org/pdf/2408.11039</a:t>
             </a:r>
-            <a:endParaRPr lang="en-US" dirty="0"/>
+            <a:endParaRPr lang="en-US" sz="800" dirty="0"/>
           </a:p>
         </p:txBody>
       </p:sp>
@@ -15396,7 +15062,7 @@
             <a:lvl1pPr>
               <a:defRPr sz="1200">
                 <a:solidFill>
-                  <a:schemeClr val="tx1"/>
+                  <a:srgbClr val="000000"/>
                 </a:solidFill>
                 <a:latin typeface="Arial"/>
                 <a:ea typeface="Arial"/>
@@ -15441,14 +15107,14 @@
       </p:grpSpPr>
       <p:sp>
         <p:nvSpPr>
-          <p:cNvPr id="2" name="Text 0"/>
-          <p:cNvSpPr/>
+          <p:cNvPr id="2" name="Title"/>
+          <p:cNvSpPr txBox="1"/>
           <p:nvPr/>
         </p:nvSpPr>
         <p:spPr>
           <a:xfrm>
-            <a:off x="0" y="0"/>
-            <a:ext cx="6858000" cy="0"/>
+            <a:off x="365760" y="182880"/>
+            <a:ext cx="8412480" cy="411480"/>
           </a:xfrm>
           <a:prstGeom prst="rect">
             <a:avLst/>
@@ -15457,30 +15123,37 @@
           <a:ln/>
         </p:spPr>
         <p:txBody>
-          <a:bodyPr wrap="square" rtlCol="0"/>
+          <a:bodyPr wrap="square" lIns="0" tIns="0" rIns="0" bIns="0" rtlCol="0" anchor="t"/>
           <a:lstStyle/>
           <a:p>
-            <a:pPr indent="0" marL="0">
+            <a:pPr algn="l" indent="0" marL="0">
               <a:buNone/>
             </a:pPr>
             <a:r>
-              <a:rPr lang="en-US" dirty="0"/>
+              <a:rPr lang="en-US" sz="2200" dirty="0">
+                <a:solidFill>
+                  <a:srgbClr val="000000"/>
+                </a:solidFill>
+                <a:latin typeface="Arial" pitchFamily="34" charset="0"/>
+                <a:ea typeface="Arial" pitchFamily="34" charset="-122"/>
+                <a:cs typeface="Arial" pitchFamily="34" charset="-120"/>
+              </a:rPr>
               <a:t>Reasoning quality</a:t>
             </a:r>
-            <a:endParaRPr lang="en-US" dirty="0"/>
+            <a:endParaRPr lang="en-US" sz="2200" dirty="0"/>
           </a:p>
         </p:txBody>
       </p:sp>
       <p:sp>
         <p:nvSpPr>
-          <p:cNvPr id="3" name="Text 1"/>
-          <p:cNvSpPr/>
+          <p:cNvPr id="3" name="Topic"/>
+          <p:cNvSpPr txBox="1"/>
           <p:nvPr/>
         </p:nvSpPr>
         <p:spPr>
           <a:xfrm>
-            <a:off x="0" y="0"/>
-            <a:ext cx="6858000" cy="0"/>
+            <a:off x="365760" y="576072"/>
+            <a:ext cx="8412480" cy="274320"/>
           </a:xfrm>
           <a:prstGeom prst="rect">
             <a:avLst/>
@@ -15489,30 +15162,37 @@
           <a:ln/>
         </p:spPr>
         <p:txBody>
-          <a:bodyPr wrap="square" rtlCol="0"/>
+          <a:bodyPr wrap="square" lIns="0" tIns="0" rIns="0" bIns="0" rtlCol="0" anchor="t"/>
           <a:lstStyle/>
           <a:p>
-            <a:pPr indent="0" marL="0">
+            <a:pPr algn="l" indent="0" marL="0">
               <a:buNone/>
             </a:pPr>
             <a:r>
-              <a:rPr lang="en-US" dirty="0"/>
+              <a:rPr lang="en-US" sz="1250" dirty="0">
+                <a:solidFill>
+                  <a:srgbClr val="9C6B1E"/>
+                </a:solidFill>
+                <a:latin typeface="Arial" pitchFamily="34" charset="0"/>
+                <a:ea typeface="Arial" pitchFamily="34" charset="-122"/>
+                <a:cs typeface="Arial" pitchFamily="34" charset="-120"/>
+              </a:rPr>
               <a:t>Helpfulness (WIP)</a:t>
             </a:r>
-            <a:endParaRPr lang="en-US" dirty="0"/>
+            <a:endParaRPr lang="en-US" sz="1250" dirty="0"/>
           </a:p>
         </p:txBody>
       </p:sp>
       <p:sp>
         <p:nvSpPr>
-          <p:cNvPr id="4" name="Text 2"/>
-          <p:cNvSpPr/>
+          <p:cNvPr id="4" name="Footnote"/>
+          <p:cNvSpPr txBox="1"/>
           <p:nvPr/>
         </p:nvSpPr>
         <p:spPr>
           <a:xfrm>
-            <a:off x="0" y="0"/>
-            <a:ext cx="6858000" cy="0"/>
+            <a:off x="0" y="4791456"/>
+            <a:ext cx="7863840" cy="356616"/>
           </a:xfrm>
           <a:prstGeom prst="rect">
             <a:avLst/>
@@ -15521,39 +15201,48 @@
           <a:ln/>
         </p:spPr>
         <p:txBody>
-          <a:bodyPr wrap="square" rtlCol="0"/>
+          <a:bodyPr wrap="square" lIns="91440" tIns="91440" rIns="91440" bIns="91440" rtlCol="0" anchor="ctr"/>
           <a:lstStyle/>
           <a:p>
-            <a:pPr indent="0" marL="0">
+            <a:pPr algn="l" indent="0" marL="0">
               <a:buNone/>
             </a:pPr>
             <a:r>
-              <a:rPr lang="en-US" b="1" u="sng" dirty="0">
+              <a:rPr lang="en-US" sz="800" b="1" u="sng" dirty="0">
                 <a:solidFill>
                   <a:srgbClr val="000000"/>
                 </a:solidFill>
+                <a:latin typeface="Arial" pitchFamily="34" charset="0"/>
+                <a:ea typeface="Arial" pitchFamily="34" charset="-122"/>
+                <a:cs typeface="Arial" pitchFamily="34" charset="-120"/>
               </a:rPr>
               <a:t>*1</a:t>
             </a:r>
-            <a:pPr indent="0" marL="0">
+            <a:pPr algn="l" indent="0" marL="0">
               <a:buNone/>
             </a:pPr>
             <a:r>
-              <a:rPr lang="en-US" dirty="0">
+              <a:rPr lang="en-US" sz="800" dirty="0">
                 <a:solidFill>
                   <a:srgbClr val="000000"/>
                 </a:solidFill>
+                <a:latin typeface="Arial" pitchFamily="34" charset="0"/>
+                <a:ea typeface="Arial" pitchFamily="34" charset="-122"/>
+                <a:cs typeface="Arial" pitchFamily="34" charset="-120"/>
               </a:rPr>
               <a:t> </a:t>
             </a:r>
-            <a:pPr indent="0" marL="0">
+            <a:pPr algn="l" indent="0" marL="0">
               <a:buNone/>
             </a:pPr>
             <a:r>
-              <a:rPr lang="en-US" u="sng" dirty="0">
+              <a:rPr lang="en-US" sz="800" u="sng" dirty="0">
                 <a:solidFill>
                   <a:srgbClr val="0000EE"/>
                 </a:solidFill>
+                <a:latin typeface="Arial" pitchFamily="34" charset="0"/>
+                <a:ea typeface="Arial" pitchFamily="34" charset="-122"/>
+                <a:cs typeface="Arial" pitchFamily="34" charset="-120"/>
                 <a:hlinkClick r:id="rId1" invalidUrl="" action="" tgtFrame="" tooltip="" history="1" highlightClick="0" endSnd="0">
                   <a:extLst>
                     <a:ext uri="{A12FA001-AC4F-418D-AE19-62706E023703}">
@@ -15564,7 +15253,7 @@
               </a:rPr>
               <a:t>https://arxiv.org/abs/2505.05470</a:t>
             </a:r>
-            <a:endParaRPr lang="en-US" dirty="0"/>
+            <a:endParaRPr lang="en-US" sz="800" dirty="0"/>
           </a:p>
         </p:txBody>
       </p:sp>
@@ -15875,7 +15564,7 @@
             <a:lvl1pPr>
               <a:defRPr sz="1200">
                 <a:solidFill>
-                  <a:schemeClr val="tx1"/>
+                  <a:srgbClr val="000000"/>
                 </a:solidFill>
                 <a:latin typeface="Arial"/>
                 <a:ea typeface="Arial"/>

--- a/agents/.agents/skills/research-slides/assets/research-slides-template.pptx
+++ b/agents/.agents/skills/research-slides/assets/research-slides-template.pptx
@@ -121,10 +121,10 @@
   <p:extLst>
     <p:ext uri="{521415D9-36F7-43E2-AB2F-B90AF26B5E84}">
       <p14:sectionLst xmlns:p14="http://schemas.microsoft.com/office/powerpoint/2010/main">
-        <p14:section name="Templates" id="{e547fee6-67e7-8e17-fddc-e417c2337ab3}">
+        <p14:section name="Templates" id="{74da7f44-836c-b97c-ba86-e1841c6fd802}">
           <p14:sldIdLst/>
         </p14:section>
-        <p14:section name="Default-1" id="{0e0066a8-0bd3-490c-7603-a8bb4e3f8250}">
+        <p14:section name="Default-1" id="{bd91bf3c-cc33-0329-eb53-8ddcf4ed30f6}">
           <p14:sldIdLst>
             <p14:sldId id="256"/>
             <p14:sldId id="257"/>
@@ -547,7 +547,7 @@
           <a:p>
             <a:r>
               <a:rPr lang="en-US" dirty="0"/>
-              <a:t>CoverSlide: photo under veil (78% white), cover-title 26pt bold, cover-subtitle 14pt bold Times New Roman in ink-muted. Date form: Oct. 28, 2026. No slide number.</a:t>
+              <a:t>CoverSlide: photo under veil (78% white), cover-title 26pt bold, cover-subtitle 14pt bold Arial in ink-muted. Date form: Oct. 28, 2026. No slide number.</a:t>
             </a:r>
             <a:endParaRPr lang="en-US" dirty="0"/>
           </a:p>
@@ -1075,7 +1075,7 @@
           <a:p>
             <a:r>
               <a:rPr lang="en-US" dirty="0"/>
-              <a:t>TodoSlide: title TODO, a dated dash list in Arial 12pt with a 0.075in inset; bold the blocking item; ➔ for what follows. No figure, no table.</a:t>
+              <a:t>TodoSlide: title TODO, a dated dash list in Times New Roman 12pt with a 0.075in inset; bold the blocking item; ➔ for what follows. No figure, no table.</a:t>
             </a:r>
             <a:endParaRPr lang="en-US" dirty="0"/>
           </a:p>
@@ -1691,7 +1691,7 @@
           <a:p>
             <a:r>
               <a:rPr lang="en-US" dirty="0"/>
-              <a:t>PaperSlide: area as title, paper as topic, typed-dash notes in Arial 12pt with a 0.075in inset, the paper's own figures in the body, arXiv link as *1. Figures never climb beside the title.</a:t>
+              <a:t>PaperSlide: area as title, paper as topic, typed-dash notes in Times New Roman 12pt with a 0.075in inset, the paper's own figures in the body, arXiv link as *1. Figures never climb beside the title.</a:t>
             </a:r>
             <a:endParaRPr lang="en-US" dirty="0"/>
           </a:p>
@@ -1997,9 +1997,9 @@
                 <a:solidFill>
                   <a:srgbClr val="000000"/>
                 </a:solidFill>
-                <a:latin typeface="Arial"/>
-                <a:ea typeface="Arial"/>
-                <a:cs typeface="Arial"/>
+                <a:latin typeface="Times New Roman"/>
+                <a:ea typeface="Times New Roman"/>
+                <a:cs typeface="Times New Roman"/>
               </a:defRPr>
             </a:lvl1pPr>
           </a:lstStyle>
@@ -2077,9 +2077,9 @@
                 <a:solidFill>
                   <a:srgbClr val="000000"/>
                 </a:solidFill>
-                <a:latin typeface="Arial"/>
-                <a:ea typeface="Arial"/>
-                <a:cs typeface="Arial"/>
+                <a:latin typeface="Times New Roman"/>
+                <a:ea typeface="Times New Roman"/>
+                <a:cs typeface="Times New Roman"/>
               </a:defRPr>
             </a:lvl1pPr>
           </a:lstStyle>
@@ -2180,9 +2180,9 @@
                 <a:solidFill>
                   <a:srgbClr val="000000"/>
                 </a:solidFill>
-                <a:latin typeface="Arial"/>
-                <a:ea typeface="Arial"/>
-                <a:cs typeface="Arial"/>
+                <a:latin typeface="Times New Roman"/>
+                <a:ea typeface="Times New Roman"/>
+                <a:cs typeface="Times New Roman"/>
               </a:defRPr>
             </a:lvl1pPr>
           </a:lstStyle>
@@ -2283,9 +2283,9 @@
                 <a:solidFill>
                   <a:srgbClr val="000000"/>
                 </a:solidFill>
-                <a:latin typeface="Arial"/>
-                <a:ea typeface="Arial"/>
-                <a:cs typeface="Arial"/>
+                <a:latin typeface="Times New Roman"/>
+                <a:ea typeface="Times New Roman"/>
+                <a:cs typeface="Times New Roman"/>
               </a:defRPr>
             </a:lvl1pPr>
           </a:lstStyle>
@@ -2356,9 +2356,9 @@
                 <a:solidFill>
                   <a:srgbClr val="000000"/>
                 </a:solidFill>
-                <a:latin typeface="Arial"/>
-                <a:ea typeface="Arial"/>
-                <a:cs typeface="Arial"/>
+                <a:latin typeface="Times New Roman"/>
+                <a:ea typeface="Times New Roman"/>
+                <a:cs typeface="Times New Roman"/>
               </a:defRPr>
             </a:lvl1pPr>
           </a:lstStyle>
@@ -2722,9 +2722,9 @@
                 <a:solidFill>
                   <a:srgbClr val="595959"/>
                 </a:solidFill>
-                <a:latin typeface="Times New Roman" pitchFamily="34" charset="0"/>
-                <a:ea typeface="Times New Roman" pitchFamily="34" charset="-122"/>
-                <a:cs typeface="Times New Roman" pitchFamily="34" charset="-120"/>
+                <a:latin typeface="Arial" pitchFamily="34" charset="0"/>
+                <a:ea typeface="Arial" pitchFamily="34" charset="-122"/>
+                <a:cs typeface="Arial" pitchFamily="34" charset="-120"/>
               </a:rPr>
               <a:t>Woven Anypoint Project</a:t>
             </a:r>
@@ -2739,9 +2739,9 @@
                 <a:solidFill>
                   <a:srgbClr val="595959"/>
                 </a:solidFill>
-                <a:latin typeface="Times New Roman" pitchFamily="34" charset="0"/>
-                <a:ea typeface="Times New Roman" pitchFamily="34" charset="-122"/>
-                <a:cs typeface="Times New Roman" pitchFamily="34" charset="-120"/>
+                <a:latin typeface="Arial" pitchFamily="34" charset="0"/>
+                <a:ea typeface="Arial" pitchFamily="34" charset="-122"/>
+                <a:cs typeface="Arial" pitchFamily="34" charset="-120"/>
               </a:rPr>
               <a:t>Oct. 28, 2026</a:t>
             </a:r>
@@ -2881,9 +2881,9 @@
                 <a:solidFill>
                   <a:srgbClr val="000000"/>
                 </a:solidFill>
-                <a:latin typeface="Arial" pitchFamily="34" charset="0"/>
-                <a:ea typeface="Arial" pitchFamily="34" charset="-122"/>
-                <a:cs typeface="Arial" pitchFamily="34" charset="-120"/>
+                <a:latin typeface="Times New Roman" pitchFamily="34" charset="0"/>
+                <a:ea typeface="Times New Roman" pitchFamily="34" charset="-122"/>
+                <a:cs typeface="Times New Roman" pitchFamily="34" charset="-120"/>
               </a:rPr>
               <a:t>*1</a:t>
             </a:r>
@@ -2895,9 +2895,9 @@
                 <a:solidFill>
                   <a:srgbClr val="000000"/>
                 </a:solidFill>
-                <a:latin typeface="Arial" pitchFamily="34" charset="0"/>
-                <a:ea typeface="Arial" pitchFamily="34" charset="-122"/>
-                <a:cs typeface="Arial" pitchFamily="34" charset="-120"/>
+                <a:latin typeface="Times New Roman" pitchFamily="34" charset="0"/>
+                <a:ea typeface="Times New Roman" pitchFamily="34" charset="-122"/>
+                <a:cs typeface="Times New Roman" pitchFamily="34" charset="-120"/>
               </a:rPr>
               <a:t> </a:t>
             </a:r>
@@ -2909,9 +2909,9 @@
                 <a:solidFill>
                   <a:srgbClr val="0000EE"/>
                 </a:solidFill>
-                <a:latin typeface="Arial" pitchFamily="34" charset="0"/>
-                <a:ea typeface="Arial" pitchFamily="34" charset="-122"/>
-                <a:cs typeface="Arial" pitchFamily="34" charset="-120"/>
+                <a:latin typeface="Times New Roman" pitchFamily="34" charset="0"/>
+                <a:ea typeface="Times New Roman" pitchFamily="34" charset="-122"/>
+                <a:cs typeface="Times New Roman" pitchFamily="34" charset="-120"/>
                 <a:hlinkClick r:id="rId1" invalidUrl="" action="" tgtFrame="" tooltip="" history="1" highlightClick="0" endSnd="0">
                   <a:extLst>
                     <a:ext uri="{A12FA001-AC4F-418D-AE19-62706E023703}">
@@ -3147,9 +3147,9 @@
                 <a:solidFill>
                   <a:srgbClr val="000000"/>
                 </a:solidFill>
-                <a:latin typeface="Arial"/>
-                <a:ea typeface="Arial"/>
-                <a:cs typeface="Arial"/>
+                <a:latin typeface="Times New Roman"/>
+                <a:ea typeface="Times New Roman"/>
+                <a:cs typeface="Times New Roman"/>
               </a:defRPr>
             </a:lvl1pPr>
           </a:lstStyle>
@@ -3334,9 +3334,9 @@
                 <a:solidFill>
                   <a:srgbClr val="000000"/>
                 </a:solidFill>
-                <a:latin typeface="Arial" pitchFamily="34" charset="0"/>
-                <a:ea typeface="Arial" pitchFamily="34" charset="-122"/>
-                <a:cs typeface="Arial" pitchFamily="34" charset="-120"/>
+                <a:latin typeface="Times New Roman" pitchFamily="34" charset="0"/>
+                <a:ea typeface="Times New Roman" pitchFamily="34" charset="-122"/>
+                <a:cs typeface="Times New Roman" pitchFamily="34" charset="-120"/>
               </a:rPr>
               <a:t>*1</a:t>
             </a:r>
@@ -3348,9 +3348,9 @@
                 <a:solidFill>
                   <a:srgbClr val="000000"/>
                 </a:solidFill>
-                <a:latin typeface="Arial" pitchFamily="34" charset="0"/>
-                <a:ea typeface="Arial" pitchFamily="34" charset="-122"/>
-                <a:cs typeface="Arial" pitchFamily="34" charset="-120"/>
+                <a:latin typeface="Times New Roman" pitchFamily="34" charset="0"/>
+                <a:ea typeface="Times New Roman" pitchFamily="34" charset="-122"/>
+                <a:cs typeface="Times New Roman" pitchFamily="34" charset="-120"/>
               </a:rPr>
               <a:t> Rendered with the local TeX Live by the research-slides skill (tex2img.sh); sources under assets/Math/.</a:t>
             </a:r>
@@ -3438,9 +3438,9 @@
                 <a:solidFill>
                   <a:srgbClr val="000000"/>
                 </a:solidFill>
-                <a:latin typeface="Arial"/>
-                <a:ea typeface="Arial"/>
-                <a:cs typeface="Arial"/>
+                <a:latin typeface="Times New Roman"/>
+                <a:ea typeface="Times New Roman"/>
+                <a:cs typeface="Times New Roman"/>
               </a:defRPr>
             </a:lvl1pPr>
           </a:lstStyle>
@@ -3642,9 +3642,9 @@
                 <a:solidFill>
                   <a:srgbClr val="000000"/>
                 </a:solidFill>
-                <a:latin typeface="Arial" pitchFamily="34" charset="0"/>
-                <a:ea typeface="Arial" pitchFamily="34" charset="-122"/>
-                <a:cs typeface="Arial" pitchFamily="34" charset="-120"/>
+                <a:latin typeface="Times New Roman" pitchFamily="34" charset="0"/>
+                <a:ea typeface="Times New Roman" pitchFamily="34" charset="-122"/>
+                <a:cs typeface="Times New Roman" pitchFamily="34" charset="-120"/>
               </a:rPr>
               <a:t>- Union + LM [REJ]: multi-positive over voxels, decision loss on logit margin (</a:t>
             </a:r>
@@ -3673,9 +3673,9 @@
                 <a:solidFill>
                   <a:srgbClr val="000000"/>
                 </a:solidFill>
-                <a:latin typeface="Arial" pitchFamily="34" charset="0"/>
-                <a:ea typeface="Arial" pitchFamily="34" charset="-122"/>
-                <a:cs typeface="Arial" pitchFamily="34" charset="-120"/>
+                <a:latin typeface="Times New Roman" pitchFamily="34" charset="0"/>
+                <a:ea typeface="Times New Roman" pitchFamily="34" charset="-122"/>
+                <a:cs typeface="Times New Roman" pitchFamily="34" charset="-120"/>
               </a:rPr>
               <a:t>)</a:t>
             </a:r>
@@ -3690,9 +3690,9 @@
                 <a:solidFill>
                   <a:srgbClr val="000000"/>
                 </a:solidFill>
-                <a:latin typeface="Arial" pitchFamily="34" charset="0"/>
-                <a:ea typeface="Arial" pitchFamily="34" charset="-122"/>
-                <a:cs typeface="Arial" pitchFamily="34" charset="-120"/>
+                <a:latin typeface="Times New Roman" pitchFamily="34" charset="0"/>
+                <a:ea typeface="Times New Roman" pitchFamily="34" charset="-122"/>
+                <a:cs typeface="Times New Roman" pitchFamily="34" charset="-120"/>
               </a:rPr>
               <a:t>- Union + head null: softmax over [null, voxels]; no-target samples ×1 (6%) and ×5 (~24%)</a:t>
             </a:r>
@@ -3707,9 +3707,9 @@
                 <a:solidFill>
                   <a:srgbClr val="000000"/>
                 </a:solidFill>
-                <a:latin typeface="Arial" pitchFamily="34" charset="0"/>
-                <a:ea typeface="Arial" pitchFamily="34" charset="-122"/>
-                <a:cs typeface="Arial" pitchFamily="34" charset="-120"/>
+                <a:latin typeface="Times New Roman" pitchFamily="34" charset="0"/>
+                <a:ea typeface="Times New Roman" pitchFamily="34" charset="-122"/>
+                <a:cs typeface="Times New Roman" pitchFamily="34" charset="-120"/>
               </a:rPr>
               <a:t>- </a:t>
             </a:r>
@@ -3724,9 +3724,9 @@
                 <a:highlight>
                   <a:srgbClr val="F9CB9C"/>
                 </a:highlight>
-                <a:latin typeface="Arial" pitchFamily="34" charset="0"/>
-                <a:ea typeface="Arial" pitchFamily="34" charset="-122"/>
-                <a:cs typeface="Arial" pitchFamily="34" charset="-120"/>
+                <a:latin typeface="Times New Roman" pitchFamily="34" charset="0"/>
+                <a:ea typeface="Times New Roman" pitchFamily="34" charset="-122"/>
+                <a:cs typeface="Times New Roman" pitchFamily="34" charset="-120"/>
               </a:rPr>
               <a:t>⤷ 4-03</a:t>
             </a:r>
@@ -3738,9 +3738,9 @@
                 <a:solidFill>
                   <a:srgbClr val="000000"/>
                 </a:solidFill>
-                <a:latin typeface="Arial" pitchFamily="34" charset="0"/>
-                <a:ea typeface="Arial" pitchFamily="34" charset="-122"/>
-                <a:cs typeface="Arial" pitchFamily="34" charset="-120"/>
+                <a:latin typeface="Times New Roman" pitchFamily="34" charset="0"/>
+                <a:ea typeface="Times New Roman" pitchFamily="34" charset="-122"/>
+                <a:cs typeface="Times New Roman" pitchFamily="34" charset="-120"/>
               </a:rPr>
               <a:t> is the best of the category C setups on ScanRefer Acc@0.25</a:t>
             </a:r>
@@ -3755,9 +3755,9 @@
                 <a:solidFill>
                   <a:srgbClr val="000000"/>
                 </a:solidFill>
-                <a:latin typeface="Arial" pitchFamily="34" charset="0"/>
-                <a:ea typeface="Arial" pitchFamily="34" charset="-122"/>
-                <a:cs typeface="Arial" pitchFamily="34" charset="-120"/>
+                <a:latin typeface="Times New Roman" pitchFamily="34" charset="0"/>
+                <a:ea typeface="Times New Roman" pitchFamily="34" charset="-122"/>
+                <a:cs typeface="Times New Roman" pitchFamily="34" charset="-120"/>
               </a:rPr>
               <a:t>➔ Next: train the </a:t>
             </a:r>
@@ -3769,9 +3769,9 @@
                 <a:solidFill>
                   <a:srgbClr val="000000"/>
                 </a:solidFill>
-                <a:latin typeface="Arial" pitchFamily="34" charset="0"/>
-                <a:ea typeface="Arial" pitchFamily="34" charset="-122"/>
-                <a:cs typeface="Arial" pitchFamily="34" charset="-120"/>
+                <a:latin typeface="Times New Roman" pitchFamily="34" charset="0"/>
+                <a:ea typeface="Times New Roman" pitchFamily="34" charset="-122"/>
+                <a:cs typeface="Times New Roman" pitchFamily="34" charset="-120"/>
               </a:rPr>
               <a:t>task-agnostic proposal</a:t>
             </a:r>
@@ -3783,9 +3783,9 @@
                 <a:solidFill>
                   <a:srgbClr val="000000"/>
                 </a:solidFill>
-                <a:latin typeface="Arial" pitchFamily="34" charset="0"/>
-                <a:ea typeface="Arial" pitchFamily="34" charset="-122"/>
-                <a:cs typeface="Arial" pitchFamily="34" charset="-120"/>
+                <a:latin typeface="Times New Roman" pitchFamily="34" charset="0"/>
+                <a:ea typeface="Times New Roman" pitchFamily="34" charset="-122"/>
+                <a:cs typeface="Times New Roman" pitchFamily="34" charset="-120"/>
               </a:rPr>
               <a:t> part only, benchmark on ScanNet200 against CLASP and Mask3D</a:t>
             </a:r>
@@ -3800,9 +3800,9 @@
                 <a:solidFill>
                   <a:srgbClr val="000000"/>
                 </a:solidFill>
-                <a:latin typeface="Arial" pitchFamily="34" charset="0"/>
-                <a:ea typeface="Arial" pitchFamily="34" charset="-122"/>
-                <a:cs typeface="Arial" pitchFamily="34" charset="-120"/>
+                <a:latin typeface="Times New Roman" pitchFamily="34" charset="0"/>
+                <a:ea typeface="Times New Roman" pitchFamily="34" charset="-122"/>
+                <a:cs typeface="Times New Roman" pitchFamily="34" charset="-120"/>
               </a:rPr>
               <a:t>➔ </a:t>
             </a:r>
@@ -3814,9 +3814,9 @@
                 <a:solidFill>
                   <a:srgbClr val="CC0000"/>
                 </a:solidFill>
-                <a:latin typeface="Arial" pitchFamily="34" charset="0"/>
-                <a:ea typeface="Arial" pitchFamily="34" charset="-122"/>
-                <a:cs typeface="Arial" pitchFamily="34" charset="-120"/>
+                <a:latin typeface="Times New Roman" pitchFamily="34" charset="0"/>
+                <a:ea typeface="Times New Roman" pitchFamily="34" charset="-122"/>
+                <a:cs typeface="Times New Roman" pitchFamily="34" charset="-120"/>
               </a:rPr>
               <a:t>Disk炸滿了，why</a:t>
             </a:r>
@@ -3828,9 +3828,9 @@
                 <a:solidFill>
                   <a:srgbClr val="000000"/>
                 </a:solidFill>
-                <a:latin typeface="Arial" pitchFamily="34" charset="0"/>
-                <a:ea typeface="Arial" pitchFamily="34" charset="-122"/>
-                <a:cs typeface="Arial" pitchFamily="34" charset="-120"/>
+                <a:latin typeface="Times New Roman" pitchFamily="34" charset="0"/>
+                <a:ea typeface="Times New Roman" pitchFamily="34" charset="-122"/>
+                <a:cs typeface="Times New Roman" pitchFamily="34" charset="-120"/>
               </a:rPr>
               <a:t> — clean </a:t>
             </a:r>
@@ -3859,9 +3859,9 @@
                 <a:solidFill>
                   <a:srgbClr val="000000"/>
                 </a:solidFill>
-                <a:latin typeface="Arial" pitchFamily="34" charset="0"/>
-                <a:ea typeface="Arial" pitchFamily="34" charset="-122"/>
-                <a:cs typeface="Arial" pitchFamily="34" charset="-120"/>
+                <a:latin typeface="Times New Roman" pitchFamily="34" charset="0"/>
+                <a:ea typeface="Times New Roman" pitchFamily="34" charset="-122"/>
+                <a:cs typeface="Times New Roman" pitchFamily="34" charset="-120"/>
               </a:rPr>
               <a:t> after merging its GT-mask keys</a:t>
             </a:r>
@@ -3901,9 +3901,9 @@
                 <a:solidFill>
                   <a:srgbClr val="000000"/>
                 </a:solidFill>
-                <a:latin typeface="Arial"/>
-                <a:ea typeface="Arial"/>
-                <a:cs typeface="Arial"/>
+                <a:latin typeface="Times New Roman"/>
+                <a:ea typeface="Times New Roman"/>
+                <a:cs typeface="Times New Roman"/>
               </a:defRPr>
             </a:lvl1pPr>
           </a:lstStyle>
@@ -4424,9 +4424,9 @@
                 <a:solidFill>
                   <a:srgbClr val="000000"/>
                 </a:solidFill>
-                <a:latin typeface="Arial"/>
-                <a:ea typeface="Arial"/>
-                <a:cs typeface="Arial"/>
+                <a:latin typeface="Times New Roman"/>
+                <a:ea typeface="Times New Roman"/>
+                <a:cs typeface="Times New Roman"/>
               </a:defRPr>
             </a:lvl1pPr>
           </a:lstStyle>
@@ -4572,9 +4572,9 @@
                 <a:solidFill>
                   <a:srgbClr val="000000"/>
                 </a:solidFill>
-                <a:latin typeface="Arial" pitchFamily="34" charset="0"/>
-                <a:ea typeface="Arial" pitchFamily="34" charset="-122"/>
-                <a:cs typeface="Arial" pitchFamily="34" charset="-120"/>
+                <a:latin typeface="Times New Roman" pitchFamily="34" charset="0"/>
+                <a:ea typeface="Times New Roman" pitchFamily="34" charset="-122"/>
+                <a:cs typeface="Times New Roman" pitchFamily="34" charset="-120"/>
               </a:rPr>
               <a:t>*1</a:t>
             </a:r>
@@ -4586,9 +4586,9 @@
                 <a:solidFill>
                   <a:srgbClr val="000000"/>
                 </a:solidFill>
-                <a:latin typeface="Arial" pitchFamily="34" charset="0"/>
-                <a:ea typeface="Arial" pitchFamily="34" charset="-122"/>
-                <a:cs typeface="Arial" pitchFamily="34" charset="-120"/>
+                <a:latin typeface="Times New Roman" pitchFamily="34" charset="0"/>
+                <a:ea typeface="Times New Roman" pitchFamily="34" charset="-122"/>
+                <a:cs typeface="Times New Roman" pitchFamily="34" charset="-120"/>
               </a:rPr>
               <a:t> → means the difference from the base run.</a:t>
             </a:r>
@@ -4637,7 +4637,7 @@
       </p:sp>
       <p:pic>
         <p:nvPicPr>
-          <p:cNvPr id="7" name="Run matrix for the category B setups" descr="/tmp/claude-1000/-home-torridfish-Downloads-slides/120c0694-8c40-4ae3-895f-f20aa4908c6d/scratchpad/ds/project/assets/Figures/run-table-category-b.png">    </p:cNvPr>
+          <p:cNvPr id="7" name="Run matrix for the category B setups" descr="/home/torridfish/Downloads/slides/research-slides/project/assets/Diagrams/research-slides-diagram-kit.png">    </p:cNvPr>
           <p:cNvPicPr>
             <a:picLocks noChangeAspect="1"/>
           </p:cNvPicPr>
@@ -4757,9 +4757,9 @@
                 <a:solidFill>
                   <a:srgbClr val="000000"/>
                 </a:solidFill>
-                <a:latin typeface="Arial"/>
-                <a:ea typeface="Arial"/>
-                <a:cs typeface="Arial"/>
+                <a:latin typeface="Times New Roman"/>
+                <a:ea typeface="Times New Roman"/>
+                <a:cs typeface="Times New Roman"/>
               </a:defRPr>
             </a:lvl1pPr>
           </a:lstStyle>
@@ -4905,9 +4905,9 @@
                 <a:solidFill>
                   <a:srgbClr val="000000"/>
                 </a:solidFill>
-                <a:latin typeface="Arial" pitchFamily="34" charset="0"/>
-                <a:ea typeface="Arial" pitchFamily="34" charset="-122"/>
-                <a:cs typeface="Arial" pitchFamily="34" charset="-120"/>
+                <a:latin typeface="Times New Roman" pitchFamily="34" charset="0"/>
+                <a:ea typeface="Times New Roman" pitchFamily="34" charset="-122"/>
+                <a:cs typeface="Times New Roman" pitchFamily="34" charset="-120"/>
               </a:rPr>
               <a:t>- 08/31 – 09/03: AMD HPC under maintenance</a:t>
             </a:r>
@@ -4922,9 +4922,9 @@
                 <a:solidFill>
                   <a:srgbClr val="000000"/>
                 </a:solidFill>
-                <a:latin typeface="Arial" pitchFamily="34" charset="0"/>
-                <a:ea typeface="Arial" pitchFamily="34" charset="-122"/>
-                <a:cs typeface="Arial" pitchFamily="34" charset="-120"/>
+                <a:latin typeface="Times New Roman" pitchFamily="34" charset="0"/>
+                <a:ea typeface="Times New Roman" pitchFamily="34" charset="-122"/>
+                <a:cs typeface="Times New Roman" pitchFamily="34" charset="-120"/>
               </a:rPr>
               <a:t>- </a:t>
             </a:r>
@@ -4936,9 +4936,9 @@
                 <a:solidFill>
                   <a:srgbClr val="000000"/>
                 </a:solidFill>
-                <a:latin typeface="Arial" pitchFamily="34" charset="0"/>
-                <a:ea typeface="Arial" pitchFamily="34" charset="-122"/>
-                <a:cs typeface="Arial" pitchFamily="34" charset="-120"/>
+                <a:latin typeface="Times New Roman" pitchFamily="34" charset="0"/>
+                <a:ea typeface="Times New Roman" pitchFamily="34" charset="-122"/>
+                <a:cs typeface="Times New Roman" pitchFamily="34" charset="-120"/>
               </a:rPr>
               <a:t>Summarize experiment results of the new VAE</a:t>
             </a:r>
@@ -4953,9 +4953,9 @@
                 <a:solidFill>
                   <a:srgbClr val="000000"/>
                 </a:solidFill>
-                <a:latin typeface="Arial" pitchFamily="34" charset="0"/>
-                <a:ea typeface="Arial" pitchFamily="34" charset="-122"/>
-                <a:cs typeface="Arial" pitchFamily="34" charset="-120"/>
+                <a:latin typeface="Times New Roman" pitchFamily="34" charset="0"/>
+                <a:ea typeface="Times New Roman" pitchFamily="34" charset="-122"/>
+                <a:cs typeface="Times New Roman" pitchFamily="34" charset="-120"/>
               </a:rPr>
               <a:t>    - Does the VAE form a space that is good for the FM model to generate?</a:t>
             </a:r>
@@ -4970,9 +4970,9 @@
                 <a:solidFill>
                   <a:srgbClr val="000000"/>
                 </a:solidFill>
-                <a:latin typeface="Arial" pitchFamily="34" charset="0"/>
-                <a:ea typeface="Arial" pitchFamily="34" charset="-122"/>
-                <a:cs typeface="Arial" pitchFamily="34" charset="-120"/>
+                <a:latin typeface="Times New Roman" pitchFamily="34" charset="0"/>
+                <a:ea typeface="Times New Roman" pitchFamily="34" charset="-122"/>
+                <a:cs typeface="Times New Roman" pitchFamily="34" charset="-120"/>
               </a:rPr>
               <a:t>    - Does the backbone use the thoughts to solve the problem?</a:t>
             </a:r>
@@ -4987,9 +4987,9 @@
                 <a:solidFill>
                   <a:srgbClr val="000000"/>
                 </a:solidFill>
-                <a:latin typeface="Arial" pitchFamily="34" charset="0"/>
-                <a:ea typeface="Arial" pitchFamily="34" charset="-122"/>
-                <a:cs typeface="Arial" pitchFamily="34" charset="-120"/>
+                <a:latin typeface="Times New Roman" pitchFamily="34" charset="0"/>
+                <a:ea typeface="Times New Roman" pitchFamily="34" charset="-122"/>
+                <a:cs typeface="Times New Roman" pitchFamily="34" charset="-120"/>
               </a:rPr>
               <a:t>- Error-case classification (thought / generated code)</a:t>
             </a:r>
@@ -5004,9 +5004,9 @@
                 <a:solidFill>
                   <a:srgbClr val="000000"/>
                 </a:solidFill>
-                <a:latin typeface="Arial" pitchFamily="34" charset="0"/>
-                <a:ea typeface="Arial" pitchFamily="34" charset="-122"/>
-                <a:cs typeface="Arial" pitchFamily="34" charset="-120"/>
+                <a:latin typeface="Times New Roman" pitchFamily="34" charset="0"/>
+                <a:ea typeface="Times New Roman" pitchFamily="34" charset="-122"/>
+                <a:cs typeface="Times New Roman" pitchFamily="34" charset="-120"/>
               </a:rPr>
               <a:t>- Apply the new VAE with the pretrained flow_proj; ablate flow_proj</a:t>
             </a:r>
@@ -5021,9 +5021,9 @@
                 <a:solidFill>
                   <a:srgbClr val="000000"/>
                 </a:solidFill>
-                <a:latin typeface="Arial" pitchFamily="34" charset="0"/>
-                <a:ea typeface="Arial" pitchFamily="34" charset="-122"/>
-                <a:cs typeface="Arial" pitchFamily="34" charset="-120"/>
+                <a:latin typeface="Times New Roman" pitchFamily="34" charset="0"/>
+                <a:ea typeface="Times New Roman" pitchFamily="34" charset="-122"/>
+                <a:cs typeface="Times New Roman" pitchFamily="34" charset="-120"/>
               </a:rPr>
               <a:t>➔ Faithfulness interpretability on HumanEval once the machine is back</a:t>
             </a:r>
@@ -5063,9 +5063,9 @@
                 <a:solidFill>
                   <a:srgbClr val="000000"/>
                 </a:solidFill>
-                <a:latin typeface="Arial"/>
-                <a:ea typeface="Arial"/>
-                <a:cs typeface="Arial"/>
+                <a:latin typeface="Times New Roman"/>
+                <a:ea typeface="Times New Roman"/>
+                <a:cs typeface="Times New Roman"/>
               </a:defRPr>
             </a:lvl1pPr>
           </a:lstStyle>
@@ -5172,9 +5172,9 @@
                 <a:solidFill>
                   <a:srgbClr val="000000"/>
                 </a:solidFill>
-                <a:latin typeface="Arial" pitchFamily="34" charset="0"/>
-                <a:ea typeface="Arial" pitchFamily="34" charset="-122"/>
-                <a:cs typeface="Arial" pitchFamily="34" charset="-120"/>
+                <a:latin typeface="Times New Roman" pitchFamily="34" charset="0"/>
+                <a:ea typeface="Times New Roman" pitchFamily="34" charset="-122"/>
+                <a:cs typeface="Times New Roman" pitchFamily="34" charset="-120"/>
               </a:rPr>
               <a:t>*1</a:t>
             </a:r>
@@ -5186,9 +5186,9 @@
                 <a:solidFill>
                   <a:srgbClr val="000000"/>
                 </a:solidFill>
-                <a:latin typeface="Arial" pitchFamily="34" charset="0"/>
-                <a:ea typeface="Arial" pitchFamily="34" charset="-122"/>
-                <a:cs typeface="Arial" pitchFamily="34" charset="-120"/>
+                <a:latin typeface="Times New Roman" pitchFamily="34" charset="0"/>
+                <a:ea typeface="Times New Roman" pitchFamily="34" charset="-122"/>
+                <a:cs typeface="Times New Roman" pitchFamily="34" charset="-120"/>
               </a:rPr>
               <a:t> Link: </a:t>
             </a:r>
@@ -5200,9 +5200,9 @@
                 <a:solidFill>
                   <a:srgbClr val="0000EE"/>
                 </a:solidFill>
-                <a:latin typeface="Arial" pitchFamily="34" charset="0"/>
-                <a:ea typeface="Arial" pitchFamily="34" charset="-122"/>
-                <a:cs typeface="Arial" pitchFamily="34" charset="-120"/>
+                <a:latin typeface="Times New Roman" pitchFamily="34" charset="0"/>
+                <a:ea typeface="Times New Roman" pitchFamily="34" charset="-122"/>
+                <a:cs typeface="Times New Roman" pitchFamily="34" charset="-120"/>
                 <a:hlinkClick r:id="rId1" invalidUrl="" action="" tgtFrame="" tooltip="" history="1" highlightClick="0" endSnd="0">
                   <a:extLst>
                     <a:ext uri="{A12FA001-AC4F-418D-AE19-62706E023703}">
@@ -5249,9 +5249,9 @@
                 <a:solidFill>
                   <a:srgbClr val="000000"/>
                 </a:solidFill>
-                <a:latin typeface="Arial"/>
-                <a:ea typeface="Arial"/>
-                <a:cs typeface="Arial"/>
+                <a:latin typeface="Times New Roman"/>
+                <a:ea typeface="Times New Roman"/>
+                <a:cs typeface="Times New Roman"/>
               </a:defRPr>
             </a:lvl1pPr>
           </a:lstStyle>
@@ -5361,9 +5361,9 @@
                 <a:solidFill>
                   <a:srgbClr val="000000"/>
                 </a:solidFill>
-                <a:latin typeface="Arial"/>
-                <a:ea typeface="Arial"/>
-                <a:cs typeface="Arial"/>
+                <a:latin typeface="Times New Roman"/>
+                <a:ea typeface="Times New Roman"/>
+                <a:cs typeface="Times New Roman"/>
               </a:defRPr>
             </a:lvl1pPr>
           </a:lstStyle>
@@ -5565,9 +5565,9 @@
                 <a:solidFill>
                   <a:srgbClr val="000000"/>
                 </a:solidFill>
-                <a:latin typeface="Arial" pitchFamily="34" charset="0"/>
-                <a:ea typeface="Arial" pitchFamily="34" charset="-122"/>
-                <a:cs typeface="Arial" pitchFamily="34" charset="-120"/>
+                <a:latin typeface="Times New Roman" pitchFamily="34" charset="0"/>
+                <a:ea typeface="Times New Roman" pitchFamily="34" charset="-122"/>
+                <a:cs typeface="Times New Roman" pitchFamily="34" charset="-120"/>
               </a:rPr>
               <a:t>*1</a:t>
             </a:r>
@@ -5579,9 +5579,9 @@
                 <a:solidFill>
                   <a:srgbClr val="000000"/>
                 </a:solidFill>
-                <a:latin typeface="Arial" pitchFamily="34" charset="0"/>
-                <a:ea typeface="Arial" pitchFamily="34" charset="-122"/>
-                <a:cs typeface="Arial" pitchFamily="34" charset="-120"/>
+                <a:latin typeface="Times New Roman" pitchFamily="34" charset="0"/>
+                <a:ea typeface="Times New Roman" pitchFamily="34" charset="-122"/>
+                <a:cs typeface="Times New Roman" pitchFamily="34" charset="-120"/>
               </a:rPr>
               <a:t> Proposal should be scene-shared, so KV cache </a:t>
             </a:r>
@@ -5593,9 +5593,9 @@
                 <a:solidFill>
                   <a:srgbClr val="000000"/>
                 </a:solidFill>
-                <a:latin typeface="Arial" pitchFamily="34" charset="0"/>
-                <a:ea typeface="Arial" pitchFamily="34" charset="-122"/>
-                <a:cs typeface="Arial" pitchFamily="34" charset="-120"/>
+                <a:latin typeface="Times New Roman" pitchFamily="34" charset="0"/>
+                <a:ea typeface="Times New Roman" pitchFamily="34" charset="-122"/>
+                <a:cs typeface="Times New Roman" pitchFamily="34" charset="-120"/>
               </a:rPr>
               <a:t>reuse</a:t>
             </a:r>
@@ -5607,9 +5607,9 @@
                 <a:solidFill>
                   <a:srgbClr val="000000"/>
                 </a:solidFill>
-                <a:latin typeface="Arial" pitchFamily="34" charset="0"/>
-                <a:ea typeface="Arial" pitchFamily="34" charset="-122"/>
-                <a:cs typeface="Arial" pitchFamily="34" charset="-120"/>
+                <a:latin typeface="Times New Roman" pitchFamily="34" charset="0"/>
+                <a:ea typeface="Times New Roman" pitchFamily="34" charset="-122"/>
+                <a:cs typeface="Times New Roman" pitchFamily="34" charset="-120"/>
               </a:rPr>
               <a:t> here might not be the main proposal.</a:t>
             </a:r>
@@ -5673,9 +5673,9 @@
                 <a:solidFill>
                   <a:srgbClr val="000000"/>
                 </a:solidFill>
-                <a:latin typeface="Arial"/>
-                <a:ea typeface="Arial"/>
-                <a:cs typeface="Arial"/>
+                <a:latin typeface="Times New Roman"/>
+                <a:ea typeface="Times New Roman"/>
+                <a:cs typeface="Times New Roman"/>
               </a:defRPr>
             </a:lvl1pPr>
           </a:lstStyle>
@@ -5860,9 +5860,9 @@
                 <a:solidFill>
                   <a:srgbClr val="000000"/>
                 </a:solidFill>
-                <a:latin typeface="Arial" pitchFamily="34" charset="0"/>
-                <a:ea typeface="Arial" pitchFamily="34" charset="-122"/>
-                <a:cs typeface="Arial" pitchFamily="34" charset="-120"/>
+                <a:latin typeface="Times New Roman" pitchFamily="34" charset="0"/>
+                <a:ea typeface="Times New Roman" pitchFamily="34" charset="-122"/>
+                <a:cs typeface="Times New Roman" pitchFamily="34" charset="-120"/>
               </a:rPr>
               <a:t>*1</a:t>
             </a:r>
@@ -5874,9 +5874,9 @@
                 <a:solidFill>
                   <a:srgbClr val="000000"/>
                 </a:solidFill>
-                <a:latin typeface="Arial" pitchFamily="34" charset="0"/>
-                <a:ea typeface="Arial" pitchFamily="34" charset="-122"/>
-                <a:cs typeface="Arial" pitchFamily="34" charset="-120"/>
+                <a:latin typeface="Times New Roman" pitchFamily="34" charset="0"/>
+                <a:ea typeface="Times New Roman" pitchFamily="34" charset="-122"/>
+                <a:cs typeface="Times New Roman" pitchFamily="34" charset="-120"/>
               </a:rPr>
               <a:t> Source: assets/Diagrams/research-slides-diagram-kit.drawio — export with the research-slides skill: scripts/drawio-export.sh</a:t>
             </a:r>
@@ -5940,9 +5940,9 @@
                 <a:solidFill>
                   <a:srgbClr val="000000"/>
                 </a:solidFill>
-                <a:latin typeface="Arial"/>
-                <a:ea typeface="Arial"/>
-                <a:cs typeface="Arial"/>
+                <a:latin typeface="Times New Roman"/>
+                <a:ea typeface="Times New Roman"/>
+                <a:cs typeface="Times New Roman"/>
               </a:defRPr>
             </a:lvl1pPr>
           </a:lstStyle>
@@ -6088,9 +6088,9 @@
                 <a:solidFill>
                   <a:srgbClr val="000000"/>
                 </a:solidFill>
-                <a:latin typeface="Arial" pitchFamily="34" charset="0"/>
-                <a:ea typeface="Arial" pitchFamily="34" charset="-122"/>
-                <a:cs typeface="Arial" pitchFamily="34" charset="-120"/>
+                <a:latin typeface="Times New Roman" pitchFamily="34" charset="0"/>
+                <a:ea typeface="Times New Roman" pitchFamily="34" charset="-122"/>
+                <a:cs typeface="Times New Roman" pitchFamily="34" charset="-120"/>
               </a:rPr>
               <a:t>*1</a:t>
             </a:r>
@@ -6102,9 +6102,9 @@
                 <a:solidFill>
                   <a:srgbClr val="000000"/>
                 </a:solidFill>
-                <a:latin typeface="Arial" pitchFamily="34" charset="0"/>
-                <a:ea typeface="Arial" pitchFamily="34" charset="-122"/>
-                <a:cs typeface="Arial" pitchFamily="34" charset="-120"/>
+                <a:latin typeface="Times New Roman" pitchFamily="34" charset="0"/>
+                <a:ea typeface="Times New Roman" pitchFamily="34" charset="-122"/>
+                <a:cs typeface="Times New Roman" pitchFamily="34" charset="-120"/>
               </a:rPr>
               <a:t> 2-92 is last week's reference; 4-00 is this week's run, 4-03 the best of the category C setups.</a:t>
             </a:r>
@@ -6157,16 +6157,16 @@
                           <a:solidFill>
                             <a:srgbClr val="000000"/>
                           </a:solidFill>
-                          <a:latin typeface="Arial" pitchFamily="34" charset="0"/>
-                          <a:ea typeface="Arial" pitchFamily="34" charset="-122"/>
-                          <a:cs typeface="Arial" pitchFamily="34" charset="-120"/>
+                          <a:latin typeface="Times New Roman" pitchFamily="34" charset="0"/>
+                          <a:ea typeface="Times New Roman" pitchFamily="34" charset="-122"/>
+                          <a:cs typeface="Times New Roman" pitchFamily="34" charset="-120"/>
                         </a:rPr>
                         <a:t>Name</a:t>
                       </a:r>
                       <a:endParaRPr lang="en-US" sz="900" dirty="0">
-                        <a:latin typeface="Arial" charset="0"/>
-                        <a:ea typeface="Arial" charset="0"/>
-                        <a:cs typeface="Arial" charset="0"/>
+                        <a:latin typeface="Times New Roman" charset="0"/>
+                        <a:ea typeface="Times New Roman" charset="0"/>
+                        <a:cs typeface="Times New Roman" charset="0"/>
                       </a:endParaRPr>
                     </a:p>
                   </a:txBody>
@@ -6225,16 +6225,16 @@
                           <a:solidFill>
                             <a:srgbClr val="000000"/>
                           </a:solidFill>
-                          <a:latin typeface="Arial" pitchFamily="34" charset="0"/>
-                          <a:ea typeface="Arial" pitchFamily="34" charset="-122"/>
-                          <a:cs typeface="Arial" pitchFamily="34" charset="-120"/>
+                          <a:latin typeface="Times New Roman" pitchFamily="34" charset="0"/>
+                          <a:ea typeface="Times New Roman" pitchFamily="34" charset="-122"/>
+                          <a:cs typeface="Times New Roman" pitchFamily="34" charset="-120"/>
                         </a:rPr>
                         <a:t>Acc@0.25</a:t>
                       </a:r>
                       <a:endParaRPr lang="en-US" sz="900" dirty="0">
-                        <a:latin typeface="Arial" charset="0"/>
-                        <a:ea typeface="Arial" charset="0"/>
-                        <a:cs typeface="Arial" charset="0"/>
+                        <a:latin typeface="Times New Roman" charset="0"/>
+                        <a:ea typeface="Times New Roman" charset="0"/>
+                        <a:cs typeface="Times New Roman" charset="0"/>
                       </a:endParaRPr>
                     </a:p>
                   </a:txBody>
@@ -6293,16 +6293,16 @@
                           <a:solidFill>
                             <a:srgbClr val="000000"/>
                           </a:solidFill>
-                          <a:latin typeface="Arial" pitchFamily="34" charset="0"/>
-                          <a:ea typeface="Arial" pitchFamily="34" charset="-122"/>
-                          <a:cs typeface="Arial" pitchFamily="34" charset="-120"/>
+                          <a:latin typeface="Times New Roman" pitchFamily="34" charset="0"/>
+                          <a:ea typeface="Times New Roman" pitchFamily="34" charset="-122"/>
+                          <a:cs typeface="Times New Roman" pitchFamily="34" charset="-120"/>
                         </a:rPr>
                         <a:t>Acc@0.50</a:t>
                       </a:r>
                       <a:endParaRPr lang="en-US" sz="900" dirty="0">
-                        <a:latin typeface="Arial" charset="0"/>
-                        <a:ea typeface="Arial" charset="0"/>
-                        <a:cs typeface="Arial" charset="0"/>
+                        <a:latin typeface="Times New Roman" charset="0"/>
+                        <a:ea typeface="Times New Roman" charset="0"/>
+                        <a:cs typeface="Times New Roman" charset="0"/>
                       </a:endParaRPr>
                     </a:p>
                   </a:txBody>
@@ -6361,16 +6361,16 @@
                           <a:solidFill>
                             <a:srgbClr val="000000"/>
                           </a:solidFill>
-                          <a:latin typeface="Arial" pitchFamily="34" charset="0"/>
-                          <a:ea typeface="Arial" pitchFamily="34" charset="-122"/>
-                          <a:cs typeface="Arial" pitchFamily="34" charset="-120"/>
+                          <a:latin typeface="Times New Roman" pitchFamily="34" charset="0"/>
+                          <a:ea typeface="Times New Roman" pitchFamily="34" charset="-122"/>
+                          <a:cs typeface="Times New Roman" pitchFamily="34" charset="-120"/>
                         </a:rPr>
                         <a:t>Multiple Acc@0.25</a:t>
                       </a:r>
                       <a:endParaRPr lang="en-US" sz="900" dirty="0">
-                        <a:latin typeface="Arial" charset="0"/>
-                        <a:ea typeface="Arial" charset="0"/>
-                        <a:cs typeface="Arial" charset="0"/>
+                        <a:latin typeface="Times New Roman" charset="0"/>
+                        <a:ea typeface="Times New Roman" charset="0"/>
+                        <a:cs typeface="Times New Roman" charset="0"/>
                       </a:endParaRPr>
                     </a:p>
                   </a:txBody>
@@ -6429,16 +6429,16 @@
                           <a:solidFill>
                             <a:srgbClr val="000000"/>
                           </a:solidFill>
-                          <a:latin typeface="Arial" pitchFamily="34" charset="0"/>
-                          <a:ea typeface="Arial" pitchFamily="34" charset="-122"/>
-                          <a:cs typeface="Arial" pitchFamily="34" charset="-120"/>
+                          <a:latin typeface="Times New Roman" pitchFamily="34" charset="0"/>
+                          <a:ea typeface="Times New Roman" pitchFamily="34" charset="-122"/>
+                          <a:cs typeface="Times New Roman" pitchFamily="34" charset="-120"/>
                         </a:rPr>
                         <a:t>Multiple Acc@0.50</a:t>
                       </a:r>
                       <a:endParaRPr lang="en-US" sz="900" dirty="0">
-                        <a:latin typeface="Arial" charset="0"/>
-                        <a:ea typeface="Arial" charset="0"/>
-                        <a:cs typeface="Arial" charset="0"/>
+                        <a:latin typeface="Times New Roman" charset="0"/>
+                        <a:ea typeface="Times New Roman" charset="0"/>
+                        <a:cs typeface="Times New Roman" charset="0"/>
                       </a:endParaRPr>
                     </a:p>
                   </a:txBody>
@@ -6497,16 +6497,16 @@
                           <a:solidFill>
                             <a:srgbClr val="000000"/>
                           </a:solidFill>
-                          <a:latin typeface="Arial" pitchFamily="34" charset="0"/>
-                          <a:ea typeface="Arial" pitchFamily="34" charset="-122"/>
-                          <a:cs typeface="Arial" pitchFamily="34" charset="-120"/>
+                          <a:latin typeface="Times New Roman" pitchFamily="34" charset="0"/>
+                          <a:ea typeface="Times New Roman" pitchFamily="34" charset="-122"/>
+                          <a:cs typeface="Times New Roman" pitchFamily="34" charset="-120"/>
                         </a:rPr>
                         <a:t>Unique Acc@0.25</a:t>
                       </a:r>
                       <a:endParaRPr lang="en-US" sz="900" dirty="0">
-                        <a:latin typeface="Arial" charset="0"/>
-                        <a:ea typeface="Arial" charset="0"/>
-                        <a:cs typeface="Arial" charset="0"/>
+                        <a:latin typeface="Times New Roman" charset="0"/>
+                        <a:ea typeface="Times New Roman" charset="0"/>
+                        <a:cs typeface="Times New Roman" charset="0"/>
                       </a:endParaRPr>
                     </a:p>
                   </a:txBody>
@@ -6565,16 +6565,16 @@
                           <a:solidFill>
                             <a:srgbClr val="000000"/>
                           </a:solidFill>
-                          <a:latin typeface="Arial" pitchFamily="34" charset="0"/>
-                          <a:ea typeface="Arial" pitchFamily="34" charset="-122"/>
-                          <a:cs typeface="Arial" pitchFamily="34" charset="-120"/>
+                          <a:latin typeface="Times New Roman" pitchFamily="34" charset="0"/>
+                          <a:ea typeface="Times New Roman" pitchFamily="34" charset="-122"/>
+                          <a:cs typeface="Times New Roman" pitchFamily="34" charset="-120"/>
                         </a:rPr>
                         <a:t>Unique Acc@0.50</a:t>
                       </a:r>
                       <a:endParaRPr lang="en-US" sz="900" dirty="0">
-                        <a:latin typeface="Arial" charset="0"/>
-                        <a:ea typeface="Arial" charset="0"/>
-                        <a:cs typeface="Arial" charset="0"/>
+                        <a:latin typeface="Times New Roman" charset="0"/>
+                        <a:ea typeface="Times New Roman" charset="0"/>
+                        <a:cs typeface="Times New Roman" charset="0"/>
                       </a:endParaRPr>
                     </a:p>
                   </a:txBody>
@@ -6635,16 +6635,16 @@
                           <a:solidFill>
                             <a:srgbClr val="000000"/>
                           </a:solidFill>
-                          <a:latin typeface="Arial" pitchFamily="34" charset="0"/>
-                          <a:ea typeface="Arial" pitchFamily="34" charset="-122"/>
-                          <a:cs typeface="Arial" pitchFamily="34" charset="-120"/>
+                          <a:latin typeface="Times New Roman" pitchFamily="34" charset="0"/>
+                          <a:ea typeface="Times New Roman" pitchFamily="34" charset="-122"/>
+                          <a:cs typeface="Times New Roman" pitchFamily="34" charset="-120"/>
                         </a:rPr>
                         <a:t>2-92</a:t>
                       </a:r>
                       <a:endParaRPr lang="en-US" sz="900" dirty="0">
-                        <a:latin typeface="Arial" charset="0"/>
-                        <a:ea typeface="Arial" charset="0"/>
-                        <a:cs typeface="Arial" charset="0"/>
+                        <a:latin typeface="Times New Roman" charset="0"/>
+                        <a:ea typeface="Times New Roman" charset="0"/>
+                        <a:cs typeface="Times New Roman" charset="0"/>
                       </a:endParaRPr>
                     </a:p>
                   </a:txBody>
@@ -6703,16 +6703,16 @@
                           <a:solidFill>
                             <a:srgbClr val="000000"/>
                           </a:solidFill>
-                          <a:latin typeface="Arial" pitchFamily="34" charset="0"/>
-                          <a:ea typeface="Arial" pitchFamily="34" charset="-122"/>
-                          <a:cs typeface="Arial" pitchFamily="34" charset="-120"/>
+                          <a:latin typeface="Times New Roman" pitchFamily="34" charset="0"/>
+                          <a:ea typeface="Times New Roman" pitchFamily="34" charset="-122"/>
+                          <a:cs typeface="Times New Roman" pitchFamily="34" charset="-120"/>
                         </a:rPr>
                         <a:t>0.5505</a:t>
                       </a:r>
                       <a:endParaRPr lang="en-US" sz="900" dirty="0">
-                        <a:latin typeface="Arial" charset="0"/>
-                        <a:ea typeface="Arial" charset="0"/>
-                        <a:cs typeface="Arial" charset="0"/>
+                        <a:latin typeface="Times New Roman" charset="0"/>
+                        <a:ea typeface="Times New Roman" charset="0"/>
+                        <a:cs typeface="Times New Roman" charset="0"/>
                       </a:endParaRPr>
                     </a:p>
                   </a:txBody>
@@ -6771,16 +6771,16 @@
                           <a:solidFill>
                             <a:srgbClr val="000000"/>
                           </a:solidFill>
-                          <a:latin typeface="Arial" pitchFamily="34" charset="0"/>
-                          <a:ea typeface="Arial" pitchFamily="34" charset="-122"/>
-                          <a:cs typeface="Arial" pitchFamily="34" charset="-120"/>
+                          <a:latin typeface="Times New Roman" pitchFamily="34" charset="0"/>
+                          <a:ea typeface="Times New Roman" pitchFamily="34" charset="-122"/>
+                          <a:cs typeface="Times New Roman" pitchFamily="34" charset="-120"/>
                         </a:rPr>
                         <a:t>0.4969</a:t>
                       </a:r>
                       <a:endParaRPr lang="en-US" sz="900" dirty="0">
-                        <a:latin typeface="Arial" charset="0"/>
-                        <a:ea typeface="Arial" charset="0"/>
-                        <a:cs typeface="Arial" charset="0"/>
+                        <a:latin typeface="Times New Roman" charset="0"/>
+                        <a:ea typeface="Times New Roman" charset="0"/>
+                        <a:cs typeface="Times New Roman" charset="0"/>
                       </a:endParaRPr>
                     </a:p>
                   </a:txBody>
@@ -6839,16 +6839,16 @@
                           <a:solidFill>
                             <a:srgbClr val="000000"/>
                           </a:solidFill>
-                          <a:latin typeface="Arial" pitchFamily="34" charset="0"/>
-                          <a:ea typeface="Arial" pitchFamily="34" charset="-122"/>
-                          <a:cs typeface="Arial" pitchFamily="34" charset="-120"/>
+                          <a:latin typeface="Times New Roman" pitchFamily="34" charset="0"/>
+                          <a:ea typeface="Times New Roman" pitchFamily="34" charset="-122"/>
+                          <a:cs typeface="Times New Roman" pitchFamily="34" charset="-120"/>
                         </a:rPr>
                         <a:t>0.4685</a:t>
                       </a:r>
                       <a:endParaRPr lang="en-US" sz="900" dirty="0">
-                        <a:latin typeface="Arial" charset="0"/>
-                        <a:ea typeface="Arial" charset="0"/>
-                        <a:cs typeface="Arial" charset="0"/>
+                        <a:latin typeface="Times New Roman" charset="0"/>
+                        <a:ea typeface="Times New Roman" charset="0"/>
+                        <a:cs typeface="Times New Roman" charset="0"/>
                       </a:endParaRPr>
                     </a:p>
                   </a:txBody>
@@ -6907,16 +6907,16 @@
                           <a:solidFill>
                             <a:srgbClr val="000000"/>
                           </a:solidFill>
-                          <a:latin typeface="Arial" pitchFamily="34" charset="0"/>
-                          <a:ea typeface="Arial" pitchFamily="34" charset="-122"/>
-                          <a:cs typeface="Arial" pitchFamily="34" charset="-120"/>
+                          <a:latin typeface="Times New Roman" pitchFamily="34" charset="0"/>
+                          <a:ea typeface="Times New Roman" pitchFamily="34" charset="-122"/>
+                          <a:cs typeface="Times New Roman" pitchFamily="34" charset="-120"/>
                         </a:rPr>
                         <a:t>0.4215</a:t>
                       </a:r>
                       <a:endParaRPr lang="en-US" sz="900" dirty="0">
-                        <a:latin typeface="Arial" charset="0"/>
-                        <a:ea typeface="Arial" charset="0"/>
-                        <a:cs typeface="Arial" charset="0"/>
+                        <a:latin typeface="Times New Roman" charset="0"/>
+                        <a:ea typeface="Times New Roman" charset="0"/>
+                        <a:cs typeface="Times New Roman" charset="0"/>
                       </a:endParaRPr>
                     </a:p>
                   </a:txBody>
@@ -6975,16 +6975,16 @@
                           <a:solidFill>
                             <a:srgbClr val="000000"/>
                           </a:solidFill>
-                          <a:latin typeface="Arial" pitchFamily="34" charset="0"/>
-                          <a:ea typeface="Arial" pitchFamily="34" charset="-122"/>
-                          <a:cs typeface="Arial" pitchFamily="34" charset="-120"/>
+                          <a:latin typeface="Times New Roman" pitchFamily="34" charset="0"/>
+                          <a:ea typeface="Times New Roman" pitchFamily="34" charset="-122"/>
+                          <a:cs typeface="Times New Roman" pitchFamily="34" charset="-120"/>
                         </a:rPr>
                         <a:t>0.8911</a:t>
                       </a:r>
                       <a:endParaRPr lang="en-US" sz="900" dirty="0">
-                        <a:latin typeface="Arial" charset="0"/>
-                        <a:ea typeface="Arial" charset="0"/>
-                        <a:cs typeface="Arial" charset="0"/>
+                        <a:latin typeface="Times New Roman" charset="0"/>
+                        <a:ea typeface="Times New Roman" charset="0"/>
+                        <a:cs typeface="Times New Roman" charset="0"/>
                       </a:endParaRPr>
                     </a:p>
                   </a:txBody>
@@ -7043,16 +7043,16 @@
                           <a:solidFill>
                             <a:srgbClr val="000000"/>
                           </a:solidFill>
-                          <a:latin typeface="Arial" pitchFamily="34" charset="0"/>
-                          <a:ea typeface="Arial" pitchFamily="34" charset="-122"/>
-                          <a:cs typeface="Arial" pitchFamily="34" charset="-120"/>
+                          <a:latin typeface="Times New Roman" pitchFamily="34" charset="0"/>
+                          <a:ea typeface="Times New Roman" pitchFamily="34" charset="-122"/>
+                          <a:cs typeface="Times New Roman" pitchFamily="34" charset="-120"/>
                         </a:rPr>
                         <a:t>0.8103</a:t>
                       </a:r>
                       <a:endParaRPr lang="en-US" sz="900" dirty="0">
-                        <a:latin typeface="Arial" charset="0"/>
-                        <a:ea typeface="Arial" charset="0"/>
-                        <a:cs typeface="Arial" charset="0"/>
+                        <a:latin typeface="Times New Roman" charset="0"/>
+                        <a:ea typeface="Times New Roman" charset="0"/>
+                        <a:cs typeface="Times New Roman" charset="0"/>
                       </a:endParaRPr>
                     </a:p>
                   </a:txBody>
@@ -7113,16 +7113,16 @@
                           <a:solidFill>
                             <a:srgbClr val="000000"/>
                           </a:solidFill>
-                          <a:latin typeface="Arial" pitchFamily="34" charset="0"/>
-                          <a:ea typeface="Arial" pitchFamily="34" charset="-122"/>
-                          <a:cs typeface="Arial" pitchFamily="34" charset="-120"/>
+                          <a:latin typeface="Times New Roman" pitchFamily="34" charset="0"/>
+                          <a:ea typeface="Times New Roman" pitchFamily="34" charset="-122"/>
+                          <a:cs typeface="Times New Roman" pitchFamily="34" charset="-120"/>
                         </a:rPr>
                         <a:t>4-00</a:t>
                       </a:r>
                       <a:endParaRPr lang="en-US" sz="900" dirty="0">
-                        <a:latin typeface="Arial" charset="0"/>
-                        <a:ea typeface="Arial" charset="0"/>
-                        <a:cs typeface="Arial" charset="0"/>
+                        <a:latin typeface="Times New Roman" charset="0"/>
+                        <a:ea typeface="Times New Roman" charset="0"/>
+                        <a:cs typeface="Times New Roman" charset="0"/>
                       </a:endParaRPr>
                     </a:p>
                   </a:txBody>
@@ -7181,16 +7181,16 @@
                           <a:solidFill>
                             <a:srgbClr val="000000"/>
                           </a:solidFill>
-                          <a:latin typeface="Arial" pitchFamily="34" charset="0"/>
-                          <a:ea typeface="Arial" pitchFamily="34" charset="-122"/>
-                          <a:cs typeface="Arial" pitchFamily="34" charset="-120"/>
+                          <a:latin typeface="Times New Roman" pitchFamily="34" charset="0"/>
+                          <a:ea typeface="Times New Roman" pitchFamily="34" charset="-122"/>
+                          <a:cs typeface="Times New Roman" pitchFamily="34" charset="-120"/>
                         </a:rPr>
                         <a:t>0.5186</a:t>
                       </a:r>
                       <a:endParaRPr lang="en-US" sz="900" dirty="0">
-                        <a:latin typeface="Arial" charset="0"/>
-                        <a:ea typeface="Arial" charset="0"/>
-                        <a:cs typeface="Arial" charset="0"/>
+                        <a:latin typeface="Times New Roman" charset="0"/>
+                        <a:ea typeface="Times New Roman" charset="0"/>
+                        <a:cs typeface="Times New Roman" charset="0"/>
                       </a:endParaRPr>
                     </a:p>
                   </a:txBody>
@@ -7249,16 +7249,16 @@
                           <a:solidFill>
                             <a:srgbClr val="000000"/>
                           </a:solidFill>
-                          <a:latin typeface="Arial" pitchFamily="34" charset="0"/>
-                          <a:ea typeface="Arial" pitchFamily="34" charset="-122"/>
-                          <a:cs typeface="Arial" pitchFamily="34" charset="-120"/>
+                          <a:latin typeface="Times New Roman" pitchFamily="34" charset="0"/>
+                          <a:ea typeface="Times New Roman" pitchFamily="34" charset="-122"/>
+                          <a:cs typeface="Times New Roman" pitchFamily="34" charset="-120"/>
                         </a:rPr>
                         <a:t>0.4708</a:t>
                       </a:r>
                       <a:endParaRPr lang="en-US" sz="900" dirty="0">
-                        <a:latin typeface="Arial" charset="0"/>
-                        <a:ea typeface="Arial" charset="0"/>
-                        <a:cs typeface="Arial" charset="0"/>
+                        <a:latin typeface="Times New Roman" charset="0"/>
+                        <a:ea typeface="Times New Roman" charset="0"/>
+                        <a:cs typeface="Times New Roman" charset="0"/>
                       </a:endParaRPr>
                     </a:p>
                   </a:txBody>
@@ -7317,16 +7317,16 @@
                           <a:solidFill>
                             <a:srgbClr val="000000"/>
                           </a:solidFill>
-                          <a:latin typeface="Arial" pitchFamily="34" charset="0"/>
-                          <a:ea typeface="Arial" pitchFamily="34" charset="-122"/>
-                          <a:cs typeface="Arial" pitchFamily="34" charset="-120"/>
+                          <a:latin typeface="Times New Roman" pitchFamily="34" charset="0"/>
+                          <a:ea typeface="Times New Roman" pitchFamily="34" charset="-122"/>
+                          <a:cs typeface="Times New Roman" pitchFamily="34" charset="-120"/>
                         </a:rPr>
                         <a:t>0.4319</a:t>
                       </a:r>
                       <a:endParaRPr lang="en-US" sz="900" dirty="0">
-                        <a:latin typeface="Arial" charset="0"/>
-                        <a:ea typeface="Arial" charset="0"/>
-                        <a:cs typeface="Arial" charset="0"/>
+                        <a:latin typeface="Times New Roman" charset="0"/>
+                        <a:ea typeface="Times New Roman" charset="0"/>
+                        <a:cs typeface="Times New Roman" charset="0"/>
                       </a:endParaRPr>
                     </a:p>
                   </a:txBody>
@@ -7385,16 +7385,16 @@
                           <a:solidFill>
                             <a:srgbClr val="000000"/>
                           </a:solidFill>
-                          <a:latin typeface="Arial" pitchFamily="34" charset="0"/>
-                          <a:ea typeface="Arial" pitchFamily="34" charset="-122"/>
-                          <a:cs typeface="Arial" pitchFamily="34" charset="-120"/>
+                          <a:latin typeface="Times New Roman" pitchFamily="34" charset="0"/>
+                          <a:ea typeface="Times New Roman" pitchFamily="34" charset="-122"/>
+                          <a:cs typeface="Times New Roman" pitchFamily="34" charset="-120"/>
                         </a:rPr>
                         <a:t>0.3925</a:t>
                       </a:r>
                       <a:endParaRPr lang="en-US" sz="900" dirty="0">
-                        <a:latin typeface="Arial" charset="0"/>
-                        <a:ea typeface="Arial" charset="0"/>
-                        <a:cs typeface="Arial" charset="0"/>
+                        <a:latin typeface="Times New Roman" charset="0"/>
+                        <a:ea typeface="Times New Roman" charset="0"/>
+                        <a:cs typeface="Times New Roman" charset="0"/>
                       </a:endParaRPr>
                     </a:p>
                   </a:txBody>
@@ -7453,16 +7453,16 @@
                           <a:solidFill>
                             <a:srgbClr val="000000"/>
                           </a:solidFill>
-                          <a:latin typeface="Arial" pitchFamily="34" charset="0"/>
-                          <a:ea typeface="Arial" pitchFamily="34" charset="-122"/>
-                          <a:cs typeface="Arial" pitchFamily="34" charset="-120"/>
+                          <a:latin typeface="Times New Roman" pitchFamily="34" charset="0"/>
+                          <a:ea typeface="Times New Roman" pitchFamily="34" charset="-122"/>
+                          <a:cs typeface="Times New Roman" pitchFamily="34" charset="-120"/>
                         </a:rPr>
                         <a:t>0.8786</a:t>
                       </a:r>
                       <a:endParaRPr lang="en-US" sz="900" dirty="0">
-                        <a:latin typeface="Arial" charset="0"/>
-                        <a:ea typeface="Arial" charset="0"/>
-                        <a:cs typeface="Arial" charset="0"/>
+                        <a:latin typeface="Times New Roman" charset="0"/>
+                        <a:ea typeface="Times New Roman" charset="0"/>
+                        <a:cs typeface="Times New Roman" charset="0"/>
                       </a:endParaRPr>
                     </a:p>
                   </a:txBody>
@@ -7521,16 +7521,16 @@
                           <a:solidFill>
                             <a:srgbClr val="000000"/>
                           </a:solidFill>
-                          <a:latin typeface="Arial" pitchFamily="34" charset="0"/>
-                          <a:ea typeface="Arial" pitchFamily="34" charset="-122"/>
-                          <a:cs typeface="Arial" pitchFamily="34" charset="-120"/>
+                          <a:latin typeface="Times New Roman" pitchFamily="34" charset="0"/>
+                          <a:ea typeface="Times New Roman" pitchFamily="34" charset="-122"/>
+                          <a:cs typeface="Times New Roman" pitchFamily="34" charset="-120"/>
                         </a:rPr>
                         <a:t>0.7957</a:t>
                       </a:r>
                       <a:endParaRPr lang="en-US" sz="900" dirty="0">
-                        <a:latin typeface="Arial" charset="0"/>
-                        <a:ea typeface="Arial" charset="0"/>
-                        <a:cs typeface="Arial" charset="0"/>
+                        <a:latin typeface="Times New Roman" charset="0"/>
+                        <a:ea typeface="Times New Roman" charset="0"/>
+                        <a:cs typeface="Times New Roman" charset="0"/>
                       </a:endParaRPr>
                     </a:p>
                   </a:txBody>
@@ -7591,16 +7591,16 @@
                           <a:solidFill>
                             <a:srgbClr val="000000"/>
                           </a:solidFill>
-                          <a:latin typeface="Arial" pitchFamily="34" charset="0"/>
-                          <a:ea typeface="Arial" pitchFamily="34" charset="-122"/>
-                          <a:cs typeface="Arial" pitchFamily="34" charset="-120"/>
+                          <a:latin typeface="Times New Roman" pitchFamily="34" charset="0"/>
+                          <a:ea typeface="Times New Roman" pitchFamily="34" charset="-122"/>
+                          <a:cs typeface="Times New Roman" pitchFamily="34" charset="-120"/>
                         </a:rPr>
                         <a:t>4-02</a:t>
                       </a:r>
                       <a:endParaRPr lang="en-US" sz="900" dirty="0">
-                        <a:latin typeface="Arial" charset="0"/>
-                        <a:ea typeface="Arial" charset="0"/>
-                        <a:cs typeface="Arial" charset="0"/>
+                        <a:latin typeface="Times New Roman" charset="0"/>
+                        <a:ea typeface="Times New Roman" charset="0"/>
+                        <a:cs typeface="Times New Roman" charset="0"/>
                       </a:endParaRPr>
                     </a:p>
                   </a:txBody>
@@ -7656,16 +7656,16 @@
                           <a:solidFill>
                             <a:srgbClr val="000000"/>
                           </a:solidFill>
-                          <a:latin typeface="Arial" pitchFamily="34" charset="0"/>
-                          <a:ea typeface="Arial" pitchFamily="34" charset="-122"/>
-                          <a:cs typeface="Arial" pitchFamily="34" charset="-120"/>
+                          <a:latin typeface="Times New Roman" pitchFamily="34" charset="0"/>
+                          <a:ea typeface="Times New Roman" pitchFamily="34" charset="-122"/>
+                          <a:cs typeface="Times New Roman" pitchFamily="34" charset="-120"/>
                         </a:rPr>
                         <a:t>0.4562</a:t>
                       </a:r>
                       <a:endParaRPr lang="en-US" sz="900" dirty="0">
-                        <a:latin typeface="Arial" charset="0"/>
-                        <a:ea typeface="Arial" charset="0"/>
-                        <a:cs typeface="Arial" charset="0"/>
+                        <a:latin typeface="Times New Roman" charset="0"/>
+                        <a:ea typeface="Times New Roman" charset="0"/>
+                        <a:cs typeface="Times New Roman" charset="0"/>
                       </a:endParaRPr>
                     </a:p>
                   </a:txBody>
@@ -7721,16 +7721,16 @@
                           <a:solidFill>
                             <a:srgbClr val="000000"/>
                           </a:solidFill>
-                          <a:latin typeface="Arial" pitchFamily="34" charset="0"/>
-                          <a:ea typeface="Arial" pitchFamily="34" charset="-122"/>
-                          <a:cs typeface="Arial" pitchFamily="34" charset="-120"/>
+                          <a:latin typeface="Times New Roman" pitchFamily="34" charset="0"/>
+                          <a:ea typeface="Times New Roman" pitchFamily="34" charset="-122"/>
+                          <a:cs typeface="Times New Roman" pitchFamily="34" charset="-120"/>
                         </a:rPr>
                         <a:t>0.3170</a:t>
                       </a:r>
                       <a:endParaRPr lang="en-US" sz="900" dirty="0">
-                        <a:latin typeface="Arial" charset="0"/>
-                        <a:ea typeface="Arial" charset="0"/>
-                        <a:cs typeface="Arial" charset="0"/>
+                        <a:latin typeface="Times New Roman" charset="0"/>
+                        <a:ea typeface="Times New Roman" charset="0"/>
+                        <a:cs typeface="Times New Roman" charset="0"/>
                       </a:endParaRPr>
                     </a:p>
                   </a:txBody>
@@ -7786,16 +7786,16 @@
                           <a:solidFill>
                             <a:srgbClr val="000000"/>
                           </a:solidFill>
-                          <a:latin typeface="Arial" pitchFamily="34" charset="0"/>
-                          <a:ea typeface="Arial" pitchFamily="34" charset="-122"/>
-                          <a:cs typeface="Arial" pitchFamily="34" charset="-120"/>
+                          <a:latin typeface="Times New Roman" pitchFamily="34" charset="0"/>
+                          <a:ea typeface="Times New Roman" pitchFamily="34" charset="-122"/>
+                          <a:cs typeface="Times New Roman" pitchFamily="34" charset="-120"/>
                         </a:rPr>
                         <a:t>0.3745</a:t>
                       </a:r>
                       <a:endParaRPr lang="en-US" sz="900" dirty="0">
-                        <a:latin typeface="Arial" charset="0"/>
-                        <a:ea typeface="Arial" charset="0"/>
-                        <a:cs typeface="Arial" charset="0"/>
+                        <a:latin typeface="Times New Roman" charset="0"/>
+                        <a:ea typeface="Times New Roman" charset="0"/>
+                        <a:cs typeface="Times New Roman" charset="0"/>
                       </a:endParaRPr>
                     </a:p>
                   </a:txBody>
@@ -7851,16 +7851,16 @@
                           <a:solidFill>
                             <a:srgbClr val="000000"/>
                           </a:solidFill>
-                          <a:latin typeface="Arial" pitchFamily="34" charset="0"/>
-                          <a:ea typeface="Arial" pitchFamily="34" charset="-122"/>
-                          <a:cs typeface="Arial" pitchFamily="34" charset="-120"/>
+                          <a:latin typeface="Times New Roman" pitchFamily="34" charset="0"/>
+                          <a:ea typeface="Times New Roman" pitchFamily="34" charset="-122"/>
+                          <a:cs typeface="Times New Roman" pitchFamily="34" charset="-120"/>
                         </a:rPr>
                         <a:t>0.2354</a:t>
                       </a:r>
                       <a:endParaRPr lang="en-US" sz="900" dirty="0">
-                        <a:latin typeface="Arial" charset="0"/>
-                        <a:ea typeface="Arial" charset="0"/>
-                        <a:cs typeface="Arial" charset="0"/>
+                        <a:latin typeface="Times New Roman" charset="0"/>
+                        <a:ea typeface="Times New Roman" charset="0"/>
+                        <a:cs typeface="Times New Roman" charset="0"/>
                       </a:endParaRPr>
                     </a:p>
                   </a:txBody>
@@ -7916,16 +7916,16 @@
                           <a:solidFill>
                             <a:srgbClr val="000000"/>
                           </a:solidFill>
-                          <a:latin typeface="Arial" pitchFamily="34" charset="0"/>
-                          <a:ea typeface="Arial" pitchFamily="34" charset="-122"/>
-                          <a:cs typeface="Arial" pitchFamily="34" charset="-120"/>
+                          <a:latin typeface="Times New Roman" pitchFamily="34" charset="0"/>
+                          <a:ea typeface="Times New Roman" pitchFamily="34" charset="-122"/>
+                          <a:cs typeface="Times New Roman" pitchFamily="34" charset="-120"/>
                         </a:rPr>
                         <a:t>0.7957</a:t>
                       </a:r>
                       <a:endParaRPr lang="en-US" sz="900" dirty="0">
-                        <a:latin typeface="Arial" charset="0"/>
-                        <a:ea typeface="Arial" charset="0"/>
-                        <a:cs typeface="Arial" charset="0"/>
+                        <a:latin typeface="Times New Roman" charset="0"/>
+                        <a:ea typeface="Times New Roman" charset="0"/>
+                        <a:cs typeface="Times New Roman" charset="0"/>
                       </a:endParaRPr>
                     </a:p>
                   </a:txBody>
@@ -7981,16 +7981,16 @@
                           <a:solidFill>
                             <a:srgbClr val="000000"/>
                           </a:solidFill>
-                          <a:latin typeface="Arial" pitchFamily="34" charset="0"/>
-                          <a:ea typeface="Arial" pitchFamily="34" charset="-122"/>
-                          <a:cs typeface="Arial" pitchFamily="34" charset="-120"/>
+                          <a:latin typeface="Times New Roman" pitchFamily="34" charset="0"/>
+                          <a:ea typeface="Times New Roman" pitchFamily="34" charset="-122"/>
+                          <a:cs typeface="Times New Roman" pitchFamily="34" charset="-120"/>
                         </a:rPr>
                         <a:t>0.6558</a:t>
                       </a:r>
                       <a:endParaRPr lang="en-US" sz="900" dirty="0">
-                        <a:latin typeface="Arial" charset="0"/>
-                        <a:ea typeface="Arial" charset="0"/>
-                        <a:cs typeface="Arial" charset="0"/>
+                        <a:latin typeface="Times New Roman" charset="0"/>
+                        <a:ea typeface="Times New Roman" charset="0"/>
+                        <a:cs typeface="Times New Roman" charset="0"/>
                       </a:endParaRPr>
                     </a:p>
                   </a:txBody>
@@ -8048,16 +8048,16 @@
                           <a:solidFill>
                             <a:srgbClr val="000000"/>
                           </a:solidFill>
-                          <a:latin typeface="Arial" pitchFamily="34" charset="0"/>
-                          <a:ea typeface="Arial" pitchFamily="34" charset="-122"/>
-                          <a:cs typeface="Arial" pitchFamily="34" charset="-120"/>
+                          <a:latin typeface="Times New Roman" pitchFamily="34" charset="0"/>
+                          <a:ea typeface="Times New Roman" pitchFamily="34" charset="-122"/>
+                          <a:cs typeface="Times New Roman" pitchFamily="34" charset="-120"/>
                         </a:rPr>
                         <a:t>4-03</a:t>
                       </a:r>
                       <a:endParaRPr lang="en-US" sz="900" dirty="0">
-                        <a:latin typeface="Arial" charset="0"/>
-                        <a:ea typeface="Arial" charset="0"/>
-                        <a:cs typeface="Arial" charset="0"/>
+                        <a:latin typeface="Times New Roman" charset="0"/>
+                        <a:ea typeface="Times New Roman" charset="0"/>
+                        <a:cs typeface="Times New Roman" charset="0"/>
                       </a:endParaRPr>
                     </a:p>
                   </a:txBody>
@@ -8116,16 +8116,16 @@
                           <a:solidFill>
                             <a:srgbClr val="000000"/>
                           </a:solidFill>
-                          <a:latin typeface="Arial" pitchFamily="34" charset="0"/>
-                          <a:ea typeface="Arial" pitchFamily="34" charset="-122"/>
-                          <a:cs typeface="Arial" pitchFamily="34" charset="-120"/>
+                          <a:latin typeface="Times New Roman" pitchFamily="34" charset="0"/>
+                          <a:ea typeface="Times New Roman" pitchFamily="34" charset="-122"/>
+                          <a:cs typeface="Times New Roman" pitchFamily="34" charset="-120"/>
                         </a:rPr>
                         <a:t>0.4915</a:t>
                       </a:r>
                       <a:endParaRPr lang="en-US" sz="900" dirty="0">
-                        <a:latin typeface="Arial" charset="0"/>
-                        <a:ea typeface="Arial" charset="0"/>
-                        <a:cs typeface="Arial" charset="0"/>
+                        <a:latin typeface="Times New Roman" charset="0"/>
+                        <a:ea typeface="Times New Roman" charset="0"/>
+                        <a:cs typeface="Times New Roman" charset="0"/>
                       </a:endParaRPr>
                     </a:p>
                   </a:txBody>
@@ -8184,16 +8184,16 @@
                           <a:solidFill>
                             <a:srgbClr val="000000"/>
                           </a:solidFill>
-                          <a:latin typeface="Arial" pitchFamily="34" charset="0"/>
-                          <a:ea typeface="Arial" pitchFamily="34" charset="-122"/>
-                          <a:cs typeface="Arial" pitchFamily="34" charset="-120"/>
+                          <a:latin typeface="Times New Roman" pitchFamily="34" charset="0"/>
+                          <a:ea typeface="Times New Roman" pitchFamily="34" charset="-122"/>
+                          <a:cs typeface="Times New Roman" pitchFamily="34" charset="-120"/>
                         </a:rPr>
                         <a:t>0.3482</a:t>
                       </a:r>
                       <a:endParaRPr lang="en-US" sz="900" dirty="0">
-                        <a:latin typeface="Arial" charset="0"/>
-                        <a:ea typeface="Arial" charset="0"/>
-                        <a:cs typeface="Arial" charset="0"/>
+                        <a:latin typeface="Times New Roman" charset="0"/>
+                        <a:ea typeface="Times New Roman" charset="0"/>
+                        <a:cs typeface="Times New Roman" charset="0"/>
                       </a:endParaRPr>
                     </a:p>
                   </a:txBody>
@@ -8252,16 +8252,16 @@
                           <a:solidFill>
                             <a:srgbClr val="000000"/>
                           </a:solidFill>
-                          <a:latin typeface="Arial" pitchFamily="34" charset="0"/>
-                          <a:ea typeface="Arial" pitchFamily="34" charset="-122"/>
-                          <a:cs typeface="Arial" pitchFamily="34" charset="-120"/>
+                          <a:latin typeface="Times New Roman" pitchFamily="34" charset="0"/>
+                          <a:ea typeface="Times New Roman" pitchFamily="34" charset="-122"/>
+                          <a:cs typeface="Times New Roman" pitchFamily="34" charset="-120"/>
                         </a:rPr>
                         <a:t>0.4139</a:t>
                       </a:r>
                       <a:endParaRPr lang="en-US" sz="900" dirty="0">
-                        <a:latin typeface="Arial" charset="0"/>
-                        <a:ea typeface="Arial" charset="0"/>
-                        <a:cs typeface="Arial" charset="0"/>
+                        <a:latin typeface="Times New Roman" charset="0"/>
+                        <a:ea typeface="Times New Roman" charset="0"/>
+                        <a:cs typeface="Times New Roman" charset="0"/>
                       </a:endParaRPr>
                     </a:p>
                   </a:txBody>
@@ -8320,16 +8320,16 @@
                           <a:solidFill>
                             <a:srgbClr val="000000"/>
                           </a:solidFill>
-                          <a:latin typeface="Arial" pitchFamily="34" charset="0"/>
-                          <a:ea typeface="Arial" pitchFamily="34" charset="-122"/>
-                          <a:cs typeface="Arial" pitchFamily="34" charset="-120"/>
+                          <a:latin typeface="Times New Roman" pitchFamily="34" charset="0"/>
+                          <a:ea typeface="Times New Roman" pitchFamily="34" charset="-122"/>
+                          <a:cs typeface="Times New Roman" pitchFamily="34" charset="-120"/>
                         </a:rPr>
                         <a:t>0.2684</a:t>
                       </a:r>
                       <a:endParaRPr lang="en-US" sz="900" dirty="0">
-                        <a:latin typeface="Arial" charset="0"/>
-                        <a:ea typeface="Arial" charset="0"/>
-                        <a:cs typeface="Arial" charset="0"/>
+                        <a:latin typeface="Times New Roman" charset="0"/>
+                        <a:ea typeface="Times New Roman" charset="0"/>
+                        <a:cs typeface="Times New Roman" charset="0"/>
                       </a:endParaRPr>
                     </a:p>
                   </a:txBody>
@@ -8388,16 +8388,16 @@
                           <a:solidFill>
                             <a:srgbClr val="000000"/>
                           </a:solidFill>
-                          <a:latin typeface="Arial" pitchFamily="34" charset="0"/>
-                          <a:ea typeface="Arial" pitchFamily="34" charset="-122"/>
-                          <a:cs typeface="Arial" pitchFamily="34" charset="-120"/>
+                          <a:latin typeface="Times New Roman" pitchFamily="34" charset="0"/>
+                          <a:ea typeface="Times New Roman" pitchFamily="34" charset="-122"/>
+                          <a:cs typeface="Times New Roman" pitchFamily="34" charset="-120"/>
                         </a:rPr>
                         <a:t>0.8136</a:t>
                       </a:r>
                       <a:endParaRPr lang="en-US" sz="900" dirty="0">
-                        <a:latin typeface="Arial" charset="0"/>
-                        <a:ea typeface="Arial" charset="0"/>
-                        <a:cs typeface="Arial" charset="0"/>
+                        <a:latin typeface="Times New Roman" charset="0"/>
+                        <a:ea typeface="Times New Roman" charset="0"/>
+                        <a:cs typeface="Times New Roman" charset="0"/>
                       </a:endParaRPr>
                     </a:p>
                   </a:txBody>
@@ -8456,16 +8456,16 @@
                           <a:solidFill>
                             <a:srgbClr val="000000"/>
                           </a:solidFill>
-                          <a:latin typeface="Arial" pitchFamily="34" charset="0"/>
-                          <a:ea typeface="Arial" pitchFamily="34" charset="-122"/>
-                          <a:cs typeface="Arial" pitchFamily="34" charset="-120"/>
+                          <a:latin typeface="Times New Roman" pitchFamily="34" charset="0"/>
+                          <a:ea typeface="Times New Roman" pitchFamily="34" charset="-122"/>
+                          <a:cs typeface="Times New Roman" pitchFamily="34" charset="-120"/>
                         </a:rPr>
                         <a:t>0.6797</a:t>
                       </a:r>
                       <a:endParaRPr lang="en-US" sz="900" dirty="0">
-                        <a:latin typeface="Arial" charset="0"/>
-                        <a:ea typeface="Arial" charset="0"/>
-                        <a:cs typeface="Arial" charset="0"/>
+                        <a:latin typeface="Times New Roman" charset="0"/>
+                        <a:ea typeface="Times New Roman" charset="0"/>
+                        <a:cs typeface="Times New Roman" charset="0"/>
                       </a:endParaRPr>
                     </a:p>
                   </a:txBody>
@@ -8526,16 +8526,16 @@
                           <a:solidFill>
                             <a:srgbClr val="000000"/>
                           </a:solidFill>
-                          <a:latin typeface="Arial" pitchFamily="34" charset="0"/>
-                          <a:ea typeface="Arial" pitchFamily="34" charset="-122"/>
-                          <a:cs typeface="Arial" pitchFamily="34" charset="-120"/>
+                          <a:latin typeface="Times New Roman" pitchFamily="34" charset="0"/>
+                          <a:ea typeface="Times New Roman" pitchFamily="34" charset="-122"/>
+                          <a:cs typeface="Times New Roman" pitchFamily="34" charset="-120"/>
                         </a:rPr>
                         <a:t>4-04</a:t>
                       </a:r>
                       <a:endParaRPr lang="en-US" sz="900" dirty="0">
-                        <a:latin typeface="Arial" charset="0"/>
-                        <a:ea typeface="Arial" charset="0"/>
-                        <a:cs typeface="Arial" charset="0"/>
+                        <a:latin typeface="Times New Roman" charset="0"/>
+                        <a:ea typeface="Times New Roman" charset="0"/>
+                        <a:cs typeface="Times New Roman" charset="0"/>
                       </a:endParaRPr>
                     </a:p>
                   </a:txBody>
@@ -8591,16 +8591,16 @@
                           <a:solidFill>
                             <a:srgbClr val="000000"/>
                           </a:solidFill>
-                          <a:latin typeface="Arial" pitchFamily="34" charset="0"/>
-                          <a:ea typeface="Arial" pitchFamily="34" charset="-122"/>
-                          <a:cs typeface="Arial" pitchFamily="34" charset="-120"/>
+                          <a:latin typeface="Times New Roman" pitchFamily="34" charset="0"/>
+                          <a:ea typeface="Times New Roman" pitchFamily="34" charset="-122"/>
+                          <a:cs typeface="Times New Roman" pitchFamily="34" charset="-120"/>
                         </a:rPr>
                         <a:t>0.4686</a:t>
                       </a:r>
                       <a:endParaRPr lang="en-US" sz="900" dirty="0">
-                        <a:latin typeface="Arial" charset="0"/>
-                        <a:ea typeface="Arial" charset="0"/>
-                        <a:cs typeface="Arial" charset="0"/>
+                        <a:latin typeface="Times New Roman" charset="0"/>
+                        <a:ea typeface="Times New Roman" charset="0"/>
+                        <a:cs typeface="Times New Roman" charset="0"/>
                       </a:endParaRPr>
                     </a:p>
                   </a:txBody>
@@ -8656,16 +8656,16 @@
                           <a:solidFill>
                             <a:srgbClr val="000000"/>
                           </a:solidFill>
-                          <a:latin typeface="Arial" pitchFamily="34" charset="0"/>
-                          <a:ea typeface="Arial" pitchFamily="34" charset="-122"/>
-                          <a:cs typeface="Arial" pitchFamily="34" charset="-120"/>
+                          <a:latin typeface="Times New Roman" pitchFamily="34" charset="0"/>
+                          <a:ea typeface="Times New Roman" pitchFamily="34" charset="-122"/>
+                          <a:cs typeface="Times New Roman" pitchFamily="34" charset="-120"/>
                         </a:rPr>
                         <a:t>0.3295</a:t>
                       </a:r>
                       <a:endParaRPr lang="en-US" sz="900" dirty="0">
-                        <a:latin typeface="Arial" charset="0"/>
-                        <a:ea typeface="Arial" charset="0"/>
-                        <a:cs typeface="Arial" charset="0"/>
+                        <a:latin typeface="Times New Roman" charset="0"/>
+                        <a:ea typeface="Times New Roman" charset="0"/>
+                        <a:cs typeface="Times New Roman" charset="0"/>
                       </a:endParaRPr>
                     </a:p>
                   </a:txBody>
@@ -8721,16 +8721,16 @@
                           <a:solidFill>
                             <a:srgbClr val="000000"/>
                           </a:solidFill>
-                          <a:latin typeface="Arial" pitchFamily="34" charset="0"/>
-                          <a:ea typeface="Arial" pitchFamily="34" charset="-122"/>
-                          <a:cs typeface="Arial" pitchFamily="34" charset="-120"/>
+                          <a:latin typeface="Times New Roman" pitchFamily="34" charset="0"/>
+                          <a:ea typeface="Times New Roman" pitchFamily="34" charset="-122"/>
+                          <a:cs typeface="Times New Roman" pitchFamily="34" charset="-120"/>
                         </a:rPr>
                         <a:t>0.3869</a:t>
                       </a:r>
                       <a:endParaRPr lang="en-US" sz="900" dirty="0">
-                        <a:latin typeface="Arial" charset="0"/>
-                        <a:ea typeface="Arial" charset="0"/>
-                        <a:cs typeface="Arial" charset="0"/>
+                        <a:latin typeface="Times New Roman" charset="0"/>
+                        <a:ea typeface="Times New Roman" charset="0"/>
+                        <a:cs typeface="Times New Roman" charset="0"/>
                       </a:endParaRPr>
                     </a:p>
                   </a:txBody>
@@ -8786,16 +8786,16 @@
                           <a:solidFill>
                             <a:srgbClr val="000000"/>
                           </a:solidFill>
-                          <a:latin typeface="Arial" pitchFamily="34" charset="0"/>
-                          <a:ea typeface="Arial" pitchFamily="34" charset="-122"/>
-                          <a:cs typeface="Arial" pitchFamily="34" charset="-120"/>
+                          <a:latin typeface="Times New Roman" pitchFamily="34" charset="0"/>
+                          <a:ea typeface="Times New Roman" pitchFamily="34" charset="-122"/>
+                          <a:cs typeface="Times New Roman" pitchFamily="34" charset="-120"/>
                         </a:rPr>
                         <a:t>0.2449</a:t>
                       </a:r>
                       <a:endParaRPr lang="en-US" sz="900" dirty="0">
-                        <a:latin typeface="Arial" charset="0"/>
-                        <a:ea typeface="Arial" charset="0"/>
-                        <a:cs typeface="Arial" charset="0"/>
+                        <a:latin typeface="Times New Roman" charset="0"/>
+                        <a:ea typeface="Times New Roman" charset="0"/>
+                        <a:cs typeface="Times New Roman" charset="0"/>
                       </a:endParaRPr>
                     </a:p>
                   </a:txBody>
@@ -8851,16 +8851,16 @@
                           <a:solidFill>
                             <a:srgbClr val="000000"/>
                           </a:solidFill>
-                          <a:latin typeface="Arial" pitchFamily="34" charset="0"/>
-                          <a:ea typeface="Arial" pitchFamily="34" charset="-122"/>
-                          <a:cs typeface="Arial" pitchFamily="34" charset="-120"/>
+                          <a:latin typeface="Times New Roman" pitchFamily="34" charset="0"/>
+                          <a:ea typeface="Times New Roman" pitchFamily="34" charset="-122"/>
+                          <a:cs typeface="Times New Roman" pitchFamily="34" charset="-120"/>
                         </a:rPr>
                         <a:t>0.8076</a:t>
                       </a:r>
                       <a:endParaRPr lang="en-US" sz="900" dirty="0">
-                        <a:latin typeface="Arial" charset="0"/>
-                        <a:ea typeface="Arial" charset="0"/>
-                        <a:cs typeface="Arial" charset="0"/>
+                        <a:latin typeface="Times New Roman" charset="0"/>
+                        <a:ea typeface="Times New Roman" charset="0"/>
+                        <a:cs typeface="Times New Roman" charset="0"/>
                       </a:endParaRPr>
                     </a:p>
                   </a:txBody>
@@ -8916,16 +8916,16 @@
                           <a:solidFill>
                             <a:srgbClr val="000000"/>
                           </a:solidFill>
-                          <a:latin typeface="Arial" pitchFamily="34" charset="0"/>
-                          <a:ea typeface="Arial" pitchFamily="34" charset="-122"/>
-                          <a:cs typeface="Arial" pitchFamily="34" charset="-120"/>
+                          <a:latin typeface="Times New Roman" pitchFamily="34" charset="0"/>
+                          <a:ea typeface="Times New Roman" pitchFamily="34" charset="-122"/>
+                          <a:cs typeface="Times New Roman" pitchFamily="34" charset="-120"/>
                         </a:rPr>
                         <a:t>0.6808</a:t>
                       </a:r>
                       <a:endParaRPr lang="en-US" sz="900" dirty="0">
-                        <a:latin typeface="Arial" charset="0"/>
-                        <a:ea typeface="Arial" charset="0"/>
-                        <a:cs typeface="Arial" charset="0"/>
+                        <a:latin typeface="Times New Roman" charset="0"/>
+                        <a:ea typeface="Times New Roman" charset="0"/>
+                        <a:cs typeface="Times New Roman" charset="0"/>
                       </a:endParaRPr>
                     </a:p>
                   </a:txBody>
@@ -8983,16 +8983,16 @@
                           <a:solidFill>
                             <a:srgbClr val="000000"/>
                           </a:solidFill>
-                          <a:latin typeface="Arial" pitchFamily="34" charset="0"/>
-                          <a:ea typeface="Arial" pitchFamily="34" charset="-122"/>
-                          <a:cs typeface="Arial" pitchFamily="34" charset="-120"/>
+                          <a:latin typeface="Times New Roman" pitchFamily="34" charset="0"/>
+                          <a:ea typeface="Times New Roman" pitchFamily="34" charset="-122"/>
+                          <a:cs typeface="Times New Roman" pitchFamily="34" charset="-120"/>
                         </a:rPr>
                         <a:t>4-05</a:t>
                       </a:r>
                       <a:endParaRPr lang="en-US" sz="900" dirty="0">
-                        <a:latin typeface="Arial" charset="0"/>
-                        <a:ea typeface="Arial" charset="0"/>
-                        <a:cs typeface="Arial" charset="0"/>
+                        <a:latin typeface="Times New Roman" charset="0"/>
+                        <a:ea typeface="Times New Roman" charset="0"/>
+                        <a:cs typeface="Times New Roman" charset="0"/>
                       </a:endParaRPr>
                     </a:p>
                   </a:txBody>
@@ -9048,16 +9048,16 @@
                           <a:solidFill>
                             <a:srgbClr val="000000"/>
                           </a:solidFill>
-                          <a:latin typeface="Arial" pitchFamily="34" charset="0"/>
-                          <a:ea typeface="Arial" pitchFamily="34" charset="-122"/>
-                          <a:cs typeface="Arial" pitchFamily="34" charset="-120"/>
+                          <a:latin typeface="Times New Roman" pitchFamily="34" charset="0"/>
+                          <a:ea typeface="Times New Roman" pitchFamily="34" charset="-122"/>
+                          <a:cs typeface="Times New Roman" pitchFamily="34" charset="-120"/>
                         </a:rPr>
                         <a:t>0.4300</a:t>
                       </a:r>
                       <a:endParaRPr lang="en-US" sz="900" dirty="0">
-                        <a:latin typeface="Arial" charset="0"/>
-                        <a:ea typeface="Arial" charset="0"/>
-                        <a:cs typeface="Arial" charset="0"/>
+                        <a:latin typeface="Times New Roman" charset="0"/>
+                        <a:ea typeface="Times New Roman" charset="0"/>
+                        <a:cs typeface="Times New Roman" charset="0"/>
                       </a:endParaRPr>
                     </a:p>
                   </a:txBody>
@@ -9113,16 +9113,16 @@
                           <a:solidFill>
                             <a:srgbClr val="000000"/>
                           </a:solidFill>
-                          <a:latin typeface="Arial" pitchFamily="34" charset="0"/>
-                          <a:ea typeface="Arial" pitchFamily="34" charset="-122"/>
-                          <a:cs typeface="Arial" pitchFamily="34" charset="-120"/>
+                          <a:latin typeface="Times New Roman" pitchFamily="34" charset="0"/>
+                          <a:ea typeface="Times New Roman" pitchFamily="34" charset="-122"/>
+                          <a:cs typeface="Times New Roman" pitchFamily="34" charset="-120"/>
                         </a:rPr>
                         <a:t>0.3014</a:t>
                       </a:r>
                       <a:endParaRPr lang="en-US" sz="900" dirty="0">
-                        <a:latin typeface="Arial" charset="0"/>
-                        <a:ea typeface="Arial" charset="0"/>
-                        <a:cs typeface="Arial" charset="0"/>
+                        <a:latin typeface="Times New Roman" charset="0"/>
+                        <a:ea typeface="Times New Roman" charset="0"/>
+                        <a:cs typeface="Times New Roman" charset="0"/>
                       </a:endParaRPr>
                     </a:p>
                   </a:txBody>
@@ -9178,16 +9178,16 @@
                           <a:solidFill>
                             <a:srgbClr val="000000"/>
                           </a:solidFill>
-                          <a:latin typeface="Arial" pitchFamily="34" charset="0"/>
-                          <a:ea typeface="Arial" pitchFamily="34" charset="-122"/>
-                          <a:cs typeface="Arial" pitchFamily="34" charset="-120"/>
+                          <a:latin typeface="Times New Roman" pitchFamily="34" charset="0"/>
+                          <a:ea typeface="Times New Roman" pitchFamily="34" charset="-122"/>
+                          <a:cs typeface="Times New Roman" pitchFamily="34" charset="-120"/>
                         </a:rPr>
                         <a:t>0.3433</a:t>
                       </a:r>
                       <a:endParaRPr lang="en-US" sz="900" dirty="0">
-                        <a:latin typeface="Arial" charset="0"/>
-                        <a:ea typeface="Arial" charset="0"/>
-                        <a:cs typeface="Arial" charset="0"/>
+                        <a:latin typeface="Times New Roman" charset="0"/>
+                        <a:ea typeface="Times New Roman" charset="0"/>
+                        <a:cs typeface="Times New Roman" charset="0"/>
                       </a:endParaRPr>
                     </a:p>
                   </a:txBody>
@@ -9243,16 +9243,16 @@
                           <a:solidFill>
                             <a:srgbClr val="000000"/>
                           </a:solidFill>
-                          <a:latin typeface="Arial" pitchFamily="34" charset="0"/>
-                          <a:ea typeface="Arial" pitchFamily="34" charset="-122"/>
-                          <a:cs typeface="Arial" pitchFamily="34" charset="-120"/>
+                          <a:latin typeface="Times New Roman" pitchFamily="34" charset="0"/>
+                          <a:ea typeface="Times New Roman" pitchFamily="34" charset="-122"/>
+                          <a:cs typeface="Times New Roman" pitchFamily="34" charset="-120"/>
                         </a:rPr>
                         <a:t>0.2188</a:t>
                       </a:r>
                       <a:endParaRPr lang="en-US" sz="900" dirty="0">
-                        <a:latin typeface="Arial" charset="0"/>
-                        <a:ea typeface="Arial" charset="0"/>
-                        <a:cs typeface="Arial" charset="0"/>
+                        <a:latin typeface="Times New Roman" charset="0"/>
+                        <a:ea typeface="Times New Roman" charset="0"/>
+                        <a:cs typeface="Times New Roman" charset="0"/>
                       </a:endParaRPr>
                     </a:p>
                   </a:txBody>
@@ -9308,16 +9308,16 @@
                           <a:solidFill>
                             <a:srgbClr val="000000"/>
                           </a:solidFill>
-                          <a:latin typeface="Arial" pitchFamily="34" charset="0"/>
-                          <a:ea typeface="Arial" pitchFamily="34" charset="-122"/>
-                          <a:cs typeface="Arial" pitchFamily="34" charset="-120"/>
+                          <a:latin typeface="Times New Roman" pitchFamily="34" charset="0"/>
+                          <a:ea typeface="Times New Roman" pitchFamily="34" charset="-122"/>
+                          <a:cs typeface="Times New Roman" pitchFamily="34" charset="-120"/>
                         </a:rPr>
                         <a:t>0.7897</a:t>
                       </a:r>
                       <a:endParaRPr lang="en-US" sz="900" dirty="0">
-                        <a:latin typeface="Arial" charset="0"/>
-                        <a:ea typeface="Arial" charset="0"/>
-                        <a:cs typeface="Arial" charset="0"/>
+                        <a:latin typeface="Times New Roman" charset="0"/>
+                        <a:ea typeface="Times New Roman" charset="0"/>
+                        <a:cs typeface="Times New Roman" charset="0"/>
                       </a:endParaRPr>
                     </a:p>
                   </a:txBody>
@@ -9373,16 +9373,16 @@
                           <a:solidFill>
                             <a:srgbClr val="000000"/>
                           </a:solidFill>
-                          <a:latin typeface="Arial" pitchFamily="34" charset="0"/>
-                          <a:ea typeface="Arial" pitchFamily="34" charset="-122"/>
-                          <a:cs typeface="Arial" pitchFamily="34" charset="-120"/>
+                          <a:latin typeface="Times New Roman" pitchFamily="34" charset="0"/>
+                          <a:ea typeface="Times New Roman" pitchFamily="34" charset="-122"/>
+                          <a:cs typeface="Times New Roman" pitchFamily="34" charset="-120"/>
                         </a:rPr>
                         <a:t>0.6444</a:t>
                       </a:r>
                       <a:endParaRPr lang="en-US" sz="900" dirty="0">
-                        <a:latin typeface="Arial" charset="0"/>
-                        <a:ea typeface="Arial" charset="0"/>
-                        <a:cs typeface="Arial" charset="0"/>
+                        <a:latin typeface="Times New Roman" charset="0"/>
+                        <a:ea typeface="Times New Roman" charset="0"/>
+                        <a:cs typeface="Times New Roman" charset="0"/>
                       </a:endParaRPr>
                     </a:p>
                   </a:txBody>
@@ -9440,16 +9440,16 @@
                           <a:solidFill>
                             <a:srgbClr val="000000"/>
                           </a:solidFill>
-                          <a:latin typeface="Arial" pitchFamily="34" charset="0"/>
-                          <a:ea typeface="Arial" pitchFamily="34" charset="-122"/>
-                          <a:cs typeface="Arial" pitchFamily="34" charset="-120"/>
+                          <a:latin typeface="Times New Roman" pitchFamily="34" charset="0"/>
+                          <a:ea typeface="Times New Roman" pitchFamily="34" charset="-122"/>
+                          <a:cs typeface="Times New Roman" pitchFamily="34" charset="-120"/>
                         </a:rPr>
                         <a:t>4-06</a:t>
                       </a:r>
                       <a:endParaRPr lang="en-US" sz="900" dirty="0">
-                        <a:latin typeface="Arial" charset="0"/>
-                        <a:ea typeface="Arial" charset="0"/>
-                        <a:cs typeface="Arial" charset="0"/>
+                        <a:latin typeface="Times New Roman" charset="0"/>
+                        <a:ea typeface="Times New Roman" charset="0"/>
+                        <a:cs typeface="Times New Roman" charset="0"/>
                       </a:endParaRPr>
                     </a:p>
                   </a:txBody>
@@ -9505,16 +9505,16 @@
                           <a:solidFill>
                             <a:srgbClr val="000000"/>
                           </a:solidFill>
-                          <a:latin typeface="Arial" pitchFamily="34" charset="0"/>
-                          <a:ea typeface="Arial" pitchFamily="34" charset="-122"/>
-                          <a:cs typeface="Arial" pitchFamily="34" charset="-120"/>
+                          <a:latin typeface="Times New Roman" pitchFamily="34" charset="0"/>
+                          <a:ea typeface="Times New Roman" pitchFamily="34" charset="-122"/>
+                          <a:cs typeface="Times New Roman" pitchFamily="34" charset="-120"/>
                         </a:rPr>
                         <a:t>0.4676</a:t>
                       </a:r>
                       <a:endParaRPr lang="en-US" sz="900" dirty="0">
-                        <a:latin typeface="Arial" charset="0"/>
-                        <a:ea typeface="Arial" charset="0"/>
-                        <a:cs typeface="Arial" charset="0"/>
+                        <a:latin typeface="Times New Roman" charset="0"/>
+                        <a:ea typeface="Times New Roman" charset="0"/>
+                        <a:cs typeface="Times New Roman" charset="0"/>
                       </a:endParaRPr>
                     </a:p>
                   </a:txBody>
@@ -9570,16 +9570,16 @@
                           <a:solidFill>
                             <a:srgbClr val="000000"/>
                           </a:solidFill>
-                          <a:latin typeface="Arial" pitchFamily="34" charset="0"/>
-                          <a:ea typeface="Arial" pitchFamily="34" charset="-122"/>
-                          <a:cs typeface="Arial" pitchFamily="34" charset="-120"/>
+                          <a:latin typeface="Times New Roman" pitchFamily="34" charset="0"/>
+                          <a:ea typeface="Times New Roman" pitchFamily="34" charset="-122"/>
+                          <a:cs typeface="Times New Roman" pitchFamily="34" charset="-120"/>
                         </a:rPr>
                         <a:t>0.3295</a:t>
                       </a:r>
                       <a:endParaRPr lang="en-US" sz="900" dirty="0">
-                        <a:latin typeface="Arial" charset="0"/>
-                        <a:ea typeface="Arial" charset="0"/>
-                        <a:cs typeface="Arial" charset="0"/>
+                        <a:latin typeface="Times New Roman" charset="0"/>
+                        <a:ea typeface="Times New Roman" charset="0"/>
+                        <a:cs typeface="Times New Roman" charset="0"/>
                       </a:endParaRPr>
                     </a:p>
                   </a:txBody>
@@ -9635,16 +9635,16 @@
                           <a:solidFill>
                             <a:srgbClr val="000000"/>
                           </a:solidFill>
-                          <a:latin typeface="Arial" pitchFamily="34" charset="0"/>
-                          <a:ea typeface="Arial" pitchFamily="34" charset="-122"/>
-                          <a:cs typeface="Arial" pitchFamily="34" charset="-120"/>
+                          <a:latin typeface="Times New Roman" pitchFamily="34" charset="0"/>
+                          <a:ea typeface="Times New Roman" pitchFamily="34" charset="-122"/>
+                          <a:cs typeface="Times New Roman" pitchFamily="34" charset="-120"/>
                         </a:rPr>
                         <a:t>0.3882</a:t>
                       </a:r>
                       <a:endParaRPr lang="en-US" sz="900" dirty="0">
-                        <a:latin typeface="Arial" charset="0"/>
-                        <a:ea typeface="Arial" charset="0"/>
-                        <a:cs typeface="Arial" charset="0"/>
+                        <a:latin typeface="Times New Roman" charset="0"/>
+                        <a:ea typeface="Times New Roman" charset="0"/>
+                        <a:cs typeface="Times New Roman" charset="0"/>
                       </a:endParaRPr>
                     </a:p>
                   </a:txBody>
@@ -9700,16 +9700,16 @@
                           <a:solidFill>
                             <a:srgbClr val="000000"/>
                           </a:solidFill>
-                          <a:latin typeface="Arial" pitchFamily="34" charset="0"/>
-                          <a:ea typeface="Arial" pitchFamily="34" charset="-122"/>
-                          <a:cs typeface="Arial" pitchFamily="34" charset="-120"/>
+                          <a:latin typeface="Times New Roman" pitchFamily="34" charset="0"/>
+                          <a:ea typeface="Times New Roman" pitchFamily="34" charset="-122"/>
+                          <a:cs typeface="Times New Roman" pitchFamily="34" charset="-120"/>
                         </a:rPr>
                         <a:t>0.2506</a:t>
                       </a:r>
                       <a:endParaRPr lang="en-US" sz="900" dirty="0">
-                        <a:latin typeface="Arial" charset="0"/>
-                        <a:ea typeface="Arial" charset="0"/>
-                        <a:cs typeface="Arial" charset="0"/>
+                        <a:latin typeface="Times New Roman" charset="0"/>
+                        <a:ea typeface="Times New Roman" charset="0"/>
+                        <a:cs typeface="Times New Roman" charset="0"/>
                       </a:endParaRPr>
                     </a:p>
                   </a:txBody>
@@ -9765,16 +9765,16 @@
                           <a:solidFill>
                             <a:srgbClr val="000000"/>
                           </a:solidFill>
-                          <a:latin typeface="Arial" pitchFamily="34" charset="0"/>
-                          <a:ea typeface="Arial" pitchFamily="34" charset="-122"/>
-                          <a:cs typeface="Arial" pitchFamily="34" charset="-120"/>
+                          <a:latin typeface="Times New Roman" pitchFamily="34" charset="0"/>
+                          <a:ea typeface="Times New Roman" pitchFamily="34" charset="-122"/>
+                          <a:cs typeface="Times New Roman" pitchFamily="34" charset="-120"/>
                         </a:rPr>
                         <a:t>0.7973</a:t>
                       </a:r>
                       <a:endParaRPr lang="en-US" sz="900" dirty="0">
-                        <a:latin typeface="Arial" charset="0"/>
-                        <a:ea typeface="Arial" charset="0"/>
-                        <a:cs typeface="Arial" charset="0"/>
+                        <a:latin typeface="Times New Roman" charset="0"/>
+                        <a:ea typeface="Times New Roman" charset="0"/>
+                        <a:cs typeface="Times New Roman" charset="0"/>
                       </a:endParaRPr>
                     </a:p>
                   </a:txBody>
@@ -9830,16 +9830,16 @@
                           <a:solidFill>
                             <a:srgbClr val="000000"/>
                           </a:solidFill>
-                          <a:latin typeface="Arial" pitchFamily="34" charset="0"/>
-                          <a:ea typeface="Arial" pitchFamily="34" charset="-122"/>
-                          <a:cs typeface="Arial" pitchFamily="34" charset="-120"/>
+                          <a:latin typeface="Times New Roman" pitchFamily="34" charset="0"/>
+                          <a:ea typeface="Times New Roman" pitchFamily="34" charset="-122"/>
+                          <a:cs typeface="Times New Roman" pitchFamily="34" charset="-120"/>
                         </a:rPr>
                         <a:t>0.6575</a:t>
                       </a:r>
                       <a:endParaRPr lang="en-US" sz="900" dirty="0">
-                        <a:latin typeface="Arial" charset="0"/>
-                        <a:ea typeface="Arial" charset="0"/>
-                        <a:cs typeface="Arial" charset="0"/>
+                        <a:latin typeface="Times New Roman" charset="0"/>
+                        <a:ea typeface="Times New Roman" charset="0"/>
+                        <a:cs typeface="Times New Roman" charset="0"/>
                       </a:endParaRPr>
                     </a:p>
                   </a:txBody>
@@ -9897,16 +9897,16 @@
                           <a:solidFill>
                             <a:srgbClr val="000000"/>
                           </a:solidFill>
-                          <a:latin typeface="Arial" pitchFamily="34" charset="0"/>
-                          <a:ea typeface="Arial" pitchFamily="34" charset="-122"/>
-                          <a:cs typeface="Arial" pitchFamily="34" charset="-120"/>
+                          <a:latin typeface="Times New Roman" pitchFamily="34" charset="0"/>
+                          <a:ea typeface="Times New Roman" pitchFamily="34" charset="-122"/>
+                          <a:cs typeface="Times New Roman" pitchFamily="34" charset="-120"/>
                         </a:rPr>
                         <a:t>4-07</a:t>
                       </a:r>
                       <a:endParaRPr lang="en-US" sz="900" dirty="0">
-                        <a:latin typeface="Arial" charset="0"/>
-                        <a:ea typeface="Arial" charset="0"/>
-                        <a:cs typeface="Arial" charset="0"/>
+                        <a:latin typeface="Times New Roman" charset="0"/>
+                        <a:ea typeface="Times New Roman" charset="0"/>
+                        <a:cs typeface="Times New Roman" charset="0"/>
                       </a:endParaRPr>
                     </a:p>
                   </a:txBody>
@@ -9962,16 +9962,16 @@
                           <a:solidFill>
                             <a:srgbClr val="000000"/>
                           </a:solidFill>
-                          <a:latin typeface="Arial" pitchFamily="34" charset="0"/>
-                          <a:ea typeface="Arial" pitchFamily="34" charset="-122"/>
-                          <a:cs typeface="Arial" pitchFamily="34" charset="-120"/>
+                          <a:latin typeface="Times New Roman" pitchFamily="34" charset="0"/>
+                          <a:ea typeface="Times New Roman" pitchFamily="34" charset="-122"/>
+                          <a:cs typeface="Times New Roman" pitchFamily="34" charset="-120"/>
                         </a:rPr>
                         <a:t>0.4322</a:t>
                       </a:r>
                       <a:endParaRPr lang="en-US" sz="900" dirty="0">
-                        <a:latin typeface="Arial" charset="0"/>
-                        <a:ea typeface="Arial" charset="0"/>
-                        <a:cs typeface="Arial" charset="0"/>
+                        <a:latin typeface="Times New Roman" charset="0"/>
+                        <a:ea typeface="Times New Roman" charset="0"/>
+                        <a:cs typeface="Times New Roman" charset="0"/>
                       </a:endParaRPr>
                     </a:p>
                   </a:txBody>
@@ -10027,16 +10027,16 @@
                           <a:solidFill>
                             <a:srgbClr val="000000"/>
                           </a:solidFill>
-                          <a:latin typeface="Arial" pitchFamily="34" charset="0"/>
-                          <a:ea typeface="Arial" pitchFamily="34" charset="-122"/>
-                          <a:cs typeface="Arial" pitchFamily="34" charset="-120"/>
+                          <a:latin typeface="Times New Roman" pitchFamily="34" charset="0"/>
+                          <a:ea typeface="Times New Roman" pitchFamily="34" charset="-122"/>
+                          <a:cs typeface="Times New Roman" pitchFamily="34" charset="-120"/>
                         </a:rPr>
                         <a:t>0.2974</a:t>
                       </a:r>
                       <a:endParaRPr lang="en-US" sz="900" dirty="0">
-                        <a:latin typeface="Arial" charset="0"/>
-                        <a:ea typeface="Arial" charset="0"/>
-                        <a:cs typeface="Arial" charset="0"/>
+                        <a:latin typeface="Times New Roman" charset="0"/>
+                        <a:ea typeface="Times New Roman" charset="0"/>
+                        <a:cs typeface="Times New Roman" charset="0"/>
                       </a:endParaRPr>
                     </a:p>
                   </a:txBody>
@@ -10092,16 +10092,16 @@
                           <a:solidFill>
                             <a:srgbClr val="000000"/>
                           </a:solidFill>
-                          <a:latin typeface="Arial" pitchFamily="34" charset="0"/>
-                          <a:ea typeface="Arial" pitchFamily="34" charset="-122"/>
-                          <a:cs typeface="Arial" pitchFamily="34" charset="-120"/>
+                          <a:latin typeface="Times New Roman" pitchFamily="34" charset="0"/>
+                          <a:ea typeface="Times New Roman" pitchFamily="34" charset="-122"/>
+                          <a:cs typeface="Times New Roman" pitchFamily="34" charset="-120"/>
                         </a:rPr>
                         <a:t>0.3473</a:t>
                       </a:r>
                       <a:endParaRPr lang="en-US" sz="900" dirty="0">
-                        <a:latin typeface="Arial" charset="0"/>
-                        <a:ea typeface="Arial" charset="0"/>
-                        <a:cs typeface="Arial" charset="0"/>
+                        <a:latin typeface="Times New Roman" charset="0"/>
+                        <a:ea typeface="Times New Roman" charset="0"/>
+                        <a:cs typeface="Times New Roman" charset="0"/>
                       </a:endParaRPr>
                     </a:p>
                   </a:txBody>
@@ -10157,16 +10157,16 @@
                           <a:solidFill>
                             <a:srgbClr val="000000"/>
                           </a:solidFill>
-                          <a:latin typeface="Arial" pitchFamily="34" charset="0"/>
-                          <a:ea typeface="Arial" pitchFamily="34" charset="-122"/>
-                          <a:cs typeface="Arial" pitchFamily="34" charset="-120"/>
+                          <a:latin typeface="Times New Roman" pitchFamily="34" charset="0"/>
+                          <a:ea typeface="Times New Roman" pitchFamily="34" charset="-122"/>
+                          <a:cs typeface="Times New Roman" pitchFamily="34" charset="-120"/>
                         </a:rPr>
                         <a:t>0.2141</a:t>
                       </a:r>
                       <a:endParaRPr lang="en-US" sz="900" dirty="0">
-                        <a:latin typeface="Arial" charset="0"/>
-                        <a:ea typeface="Arial" charset="0"/>
-                        <a:cs typeface="Arial" charset="0"/>
+                        <a:latin typeface="Times New Roman" charset="0"/>
+                        <a:ea typeface="Times New Roman" charset="0"/>
+                        <a:cs typeface="Times New Roman" charset="0"/>
                       </a:endParaRPr>
                     </a:p>
                   </a:txBody>
@@ -10222,16 +10222,16 @@
                           <a:solidFill>
                             <a:srgbClr val="000000"/>
                           </a:solidFill>
-                          <a:latin typeface="Arial" pitchFamily="34" charset="0"/>
-                          <a:ea typeface="Arial" pitchFamily="34" charset="-122"/>
-                          <a:cs typeface="Arial" pitchFamily="34" charset="-120"/>
+                          <a:latin typeface="Times New Roman" pitchFamily="34" charset="0"/>
+                          <a:ea typeface="Times New Roman" pitchFamily="34" charset="-122"/>
+                          <a:cs typeface="Times New Roman" pitchFamily="34" charset="-120"/>
                         </a:rPr>
                         <a:t>0.7848</a:t>
                       </a:r>
                       <a:endParaRPr lang="en-US" sz="900" dirty="0">
-                        <a:latin typeface="Arial" charset="0"/>
-                        <a:ea typeface="Arial" charset="0"/>
-                        <a:cs typeface="Arial" charset="0"/>
+                        <a:latin typeface="Times New Roman" charset="0"/>
+                        <a:ea typeface="Times New Roman" charset="0"/>
+                        <a:cs typeface="Times New Roman" charset="0"/>
                       </a:endParaRPr>
                     </a:p>
                   </a:txBody>
@@ -10287,16 +10287,16 @@
                           <a:solidFill>
                             <a:srgbClr val="000000"/>
                           </a:solidFill>
-                          <a:latin typeface="Arial" pitchFamily="34" charset="0"/>
-                          <a:ea typeface="Arial" pitchFamily="34" charset="-122"/>
-                          <a:cs typeface="Arial" pitchFamily="34" charset="-120"/>
+                          <a:latin typeface="Times New Roman" pitchFamily="34" charset="0"/>
+                          <a:ea typeface="Times New Roman" pitchFamily="34" charset="-122"/>
+                          <a:cs typeface="Times New Roman" pitchFamily="34" charset="-120"/>
                         </a:rPr>
                         <a:t>0.6434</a:t>
                       </a:r>
                       <a:endParaRPr lang="en-US" sz="900" dirty="0">
-                        <a:latin typeface="Arial" charset="0"/>
-                        <a:ea typeface="Arial" charset="0"/>
-                        <a:cs typeface="Arial" charset="0"/>
+                        <a:latin typeface="Times New Roman" charset="0"/>
+                        <a:ea typeface="Times New Roman" charset="0"/>
+                        <a:cs typeface="Times New Roman" charset="0"/>
                       </a:endParaRPr>
                     </a:p>
                   </a:txBody>
@@ -10354,16 +10354,16 @@
                           <a:solidFill>
                             <a:srgbClr val="000000"/>
                           </a:solidFill>
-                          <a:latin typeface="Arial" pitchFamily="34" charset="0"/>
-                          <a:ea typeface="Arial" pitchFamily="34" charset="-122"/>
-                          <a:cs typeface="Arial" pitchFamily="34" charset="-120"/>
+                          <a:latin typeface="Times New Roman" pitchFamily="34" charset="0"/>
+                          <a:ea typeface="Times New Roman" pitchFamily="34" charset="-122"/>
+                          <a:cs typeface="Times New Roman" pitchFamily="34" charset="-120"/>
                         </a:rPr>
                         <a:t>4-08</a:t>
                       </a:r>
                       <a:endParaRPr lang="en-US" sz="900" dirty="0">
-                        <a:latin typeface="Arial" charset="0"/>
-                        <a:ea typeface="Arial" charset="0"/>
-                        <a:cs typeface="Arial" charset="0"/>
+                        <a:latin typeface="Times New Roman" charset="0"/>
+                        <a:ea typeface="Times New Roman" charset="0"/>
+                        <a:cs typeface="Times New Roman" charset="0"/>
                       </a:endParaRPr>
                     </a:p>
                   </a:txBody>
@@ -10419,16 +10419,16 @@
                           <a:solidFill>
                             <a:srgbClr val="000000"/>
                           </a:solidFill>
-                          <a:latin typeface="Arial" pitchFamily="34" charset="0"/>
-                          <a:ea typeface="Arial" pitchFamily="34" charset="-122"/>
-                          <a:cs typeface="Arial" pitchFamily="34" charset="-120"/>
+                          <a:latin typeface="Times New Roman" pitchFamily="34" charset="0"/>
+                          <a:ea typeface="Times New Roman" pitchFamily="34" charset="-122"/>
+                          <a:cs typeface="Times New Roman" pitchFamily="34" charset="-120"/>
                         </a:rPr>
                         <a:t>0.4713</a:t>
                       </a:r>
                       <a:endParaRPr lang="en-US" sz="900" dirty="0">
-                        <a:latin typeface="Arial" charset="0"/>
-                        <a:ea typeface="Arial" charset="0"/>
-                        <a:cs typeface="Arial" charset="0"/>
+                        <a:latin typeface="Times New Roman" charset="0"/>
+                        <a:ea typeface="Times New Roman" charset="0"/>
+                        <a:cs typeface="Times New Roman" charset="0"/>
                       </a:endParaRPr>
                     </a:p>
                   </a:txBody>
@@ -10484,16 +10484,16 @@
                           <a:solidFill>
                             <a:srgbClr val="000000"/>
                           </a:solidFill>
-                          <a:latin typeface="Arial" pitchFamily="34" charset="0"/>
-                          <a:ea typeface="Arial" pitchFamily="34" charset="-122"/>
-                          <a:cs typeface="Arial" pitchFamily="34" charset="-120"/>
+                          <a:latin typeface="Times New Roman" pitchFamily="34" charset="0"/>
+                          <a:ea typeface="Times New Roman" pitchFamily="34" charset="-122"/>
+                          <a:cs typeface="Times New Roman" pitchFamily="34" charset="-120"/>
                         </a:rPr>
                         <a:t>0.3345</a:t>
                       </a:r>
                       <a:endParaRPr lang="en-US" sz="900" dirty="0">
-                        <a:latin typeface="Arial" charset="0"/>
-                        <a:ea typeface="Arial" charset="0"/>
-                        <a:cs typeface="Arial" charset="0"/>
+                        <a:latin typeface="Times New Roman" charset="0"/>
+                        <a:ea typeface="Times New Roman" charset="0"/>
+                        <a:cs typeface="Times New Roman" charset="0"/>
                       </a:endParaRPr>
                     </a:p>
                   </a:txBody>
@@ -10549,16 +10549,16 @@
                           <a:solidFill>
                             <a:srgbClr val="000000"/>
                           </a:solidFill>
-                          <a:latin typeface="Arial" pitchFamily="34" charset="0"/>
-                          <a:ea typeface="Arial" pitchFamily="34" charset="-122"/>
-                          <a:cs typeface="Arial" pitchFamily="34" charset="-120"/>
+                          <a:latin typeface="Times New Roman" pitchFamily="34" charset="0"/>
+                          <a:ea typeface="Times New Roman" pitchFamily="34" charset="-122"/>
+                          <a:cs typeface="Times New Roman" pitchFamily="34" charset="-120"/>
                         </a:rPr>
                         <a:t>0.3903</a:t>
                       </a:r>
                       <a:endParaRPr lang="en-US" sz="900" dirty="0">
-                        <a:latin typeface="Arial" charset="0"/>
-                        <a:ea typeface="Arial" charset="0"/>
-                        <a:cs typeface="Arial" charset="0"/>
+                        <a:latin typeface="Times New Roman" charset="0"/>
+                        <a:ea typeface="Times New Roman" charset="0"/>
+                        <a:cs typeface="Times New Roman" charset="0"/>
                       </a:endParaRPr>
                     </a:p>
                   </a:txBody>
@@ -10614,16 +10614,16 @@
                           <a:solidFill>
                             <a:srgbClr val="000000"/>
                           </a:solidFill>
-                          <a:latin typeface="Arial" pitchFamily="34" charset="0"/>
-                          <a:ea typeface="Arial" pitchFamily="34" charset="-122"/>
-                          <a:cs typeface="Arial" pitchFamily="34" charset="-120"/>
+                          <a:latin typeface="Times New Roman" pitchFamily="34" charset="0"/>
+                          <a:ea typeface="Times New Roman" pitchFamily="34" charset="-122"/>
+                          <a:cs typeface="Times New Roman" pitchFamily="34" charset="-120"/>
                         </a:rPr>
                         <a:t>0.2500</a:t>
                       </a:r>
                       <a:endParaRPr lang="en-US" sz="900" dirty="0">
-                        <a:latin typeface="Arial" charset="0"/>
-                        <a:ea typeface="Arial" charset="0"/>
-                        <a:cs typeface="Arial" charset="0"/>
+                        <a:latin typeface="Times New Roman" charset="0"/>
+                        <a:ea typeface="Times New Roman" charset="0"/>
+                        <a:cs typeface="Times New Roman" charset="0"/>
                       </a:endParaRPr>
                     </a:p>
                   </a:txBody>
@@ -10679,16 +10679,16 @@
                           <a:solidFill>
                             <a:srgbClr val="000000"/>
                           </a:solidFill>
-                          <a:latin typeface="Arial" pitchFamily="34" charset="0"/>
-                          <a:ea typeface="Arial" pitchFamily="34" charset="-122"/>
-                          <a:cs typeface="Arial" pitchFamily="34" charset="-120"/>
+                          <a:latin typeface="Times New Roman" pitchFamily="34" charset="0"/>
+                          <a:ea typeface="Times New Roman" pitchFamily="34" charset="-122"/>
+                          <a:cs typeface="Times New Roman" pitchFamily="34" charset="-120"/>
                         </a:rPr>
                         <a:t>0.8076</a:t>
                       </a:r>
                       <a:endParaRPr lang="en-US" sz="900" dirty="0">
-                        <a:latin typeface="Arial" charset="0"/>
-                        <a:ea typeface="Arial" charset="0"/>
-                        <a:cs typeface="Arial" charset="0"/>
+                        <a:latin typeface="Times New Roman" charset="0"/>
+                        <a:ea typeface="Times New Roman" charset="0"/>
+                        <a:cs typeface="Times New Roman" charset="0"/>
                       </a:endParaRPr>
                     </a:p>
                   </a:txBody>
@@ -10744,16 +10744,16 @@
                           <a:solidFill>
                             <a:srgbClr val="000000"/>
                           </a:solidFill>
-                          <a:latin typeface="Arial" pitchFamily="34" charset="0"/>
-                          <a:ea typeface="Arial" pitchFamily="34" charset="-122"/>
-                          <a:cs typeface="Arial" pitchFamily="34" charset="-120"/>
+                          <a:latin typeface="Times New Roman" pitchFamily="34" charset="0"/>
+                          <a:ea typeface="Times New Roman" pitchFamily="34" charset="-122"/>
+                          <a:cs typeface="Times New Roman" pitchFamily="34" charset="-120"/>
                         </a:rPr>
                         <a:t>0.6851</a:t>
                       </a:r>
                       <a:endParaRPr lang="en-US" sz="900" dirty="0">
-                        <a:latin typeface="Arial" charset="0"/>
-                        <a:ea typeface="Arial" charset="0"/>
-                        <a:cs typeface="Arial" charset="0"/>
+                        <a:latin typeface="Times New Roman" charset="0"/>
+                        <a:ea typeface="Times New Roman" charset="0"/>
+                        <a:cs typeface="Times New Roman" charset="0"/>
                       </a:endParaRPr>
                     </a:p>
                   </a:txBody>
@@ -10811,16 +10811,16 @@
                           <a:solidFill>
                             <a:srgbClr val="000000"/>
                           </a:solidFill>
-                          <a:latin typeface="Arial" pitchFamily="34" charset="0"/>
-                          <a:ea typeface="Arial" pitchFamily="34" charset="-122"/>
-                          <a:cs typeface="Arial" pitchFamily="34" charset="-120"/>
+                          <a:latin typeface="Times New Roman" pitchFamily="34" charset="0"/>
+                          <a:ea typeface="Times New Roman" pitchFamily="34" charset="-122"/>
+                          <a:cs typeface="Times New Roman" pitchFamily="34" charset="-120"/>
                         </a:rPr>
                         <a:t>4-09</a:t>
                       </a:r>
                       <a:endParaRPr lang="en-US" sz="900" dirty="0">
-                        <a:latin typeface="Arial" charset="0"/>
-                        <a:ea typeface="Arial" charset="0"/>
-                        <a:cs typeface="Arial" charset="0"/>
+                        <a:latin typeface="Times New Roman" charset="0"/>
+                        <a:ea typeface="Times New Roman" charset="0"/>
+                        <a:cs typeface="Times New Roman" charset="0"/>
                       </a:endParaRPr>
                     </a:p>
                   </a:txBody>
@@ -10876,16 +10876,16 @@
                           <a:solidFill>
                             <a:srgbClr val="000000"/>
                           </a:solidFill>
-                          <a:latin typeface="Arial" pitchFamily="34" charset="0"/>
-                          <a:ea typeface="Arial" pitchFamily="34" charset="-122"/>
-                          <a:cs typeface="Arial" pitchFamily="34" charset="-120"/>
+                          <a:latin typeface="Times New Roman" pitchFamily="34" charset="0"/>
+                          <a:ea typeface="Times New Roman" pitchFamily="34" charset="-122"/>
+                          <a:cs typeface="Times New Roman" pitchFamily="34" charset="-120"/>
                         </a:rPr>
                         <a:t>0.4164</a:t>
                       </a:r>
                       <a:endParaRPr lang="en-US" sz="900" dirty="0">
-                        <a:latin typeface="Arial" charset="0"/>
-                        <a:ea typeface="Arial" charset="0"/>
-                        <a:cs typeface="Arial" charset="0"/>
+                        <a:latin typeface="Times New Roman" charset="0"/>
+                        <a:ea typeface="Times New Roman" charset="0"/>
+                        <a:cs typeface="Times New Roman" charset="0"/>
                       </a:endParaRPr>
                     </a:p>
                   </a:txBody>
@@ -10941,16 +10941,16 @@
                           <a:solidFill>
                             <a:srgbClr val="000000"/>
                           </a:solidFill>
-                          <a:latin typeface="Arial" pitchFamily="34" charset="0"/>
-                          <a:ea typeface="Arial" pitchFamily="34" charset="-122"/>
-                          <a:cs typeface="Arial" pitchFamily="34" charset="-120"/>
+                          <a:latin typeface="Times New Roman" pitchFamily="34" charset="0"/>
+                          <a:ea typeface="Times New Roman" pitchFamily="34" charset="-122"/>
+                          <a:cs typeface="Times New Roman" pitchFamily="34" charset="-120"/>
                         </a:rPr>
                         <a:t>0.2803</a:t>
                       </a:r>
                       <a:endParaRPr lang="en-US" sz="900" dirty="0">
-                        <a:latin typeface="Arial" charset="0"/>
-                        <a:ea typeface="Arial" charset="0"/>
-                        <a:cs typeface="Arial" charset="0"/>
+                        <a:latin typeface="Times New Roman" charset="0"/>
+                        <a:ea typeface="Times New Roman" charset="0"/>
+                        <a:cs typeface="Times New Roman" charset="0"/>
                       </a:endParaRPr>
                     </a:p>
                   </a:txBody>
@@ -11006,16 +11006,16 @@
                           <a:solidFill>
                             <a:srgbClr val="000000"/>
                           </a:solidFill>
-                          <a:latin typeface="Arial" pitchFamily="34" charset="0"/>
-                          <a:ea typeface="Arial" pitchFamily="34" charset="-122"/>
-                          <a:cs typeface="Arial" pitchFamily="34" charset="-120"/>
+                          <a:latin typeface="Times New Roman" pitchFamily="34" charset="0"/>
+                          <a:ea typeface="Times New Roman" pitchFamily="34" charset="-122"/>
+                          <a:cs typeface="Times New Roman" pitchFamily="34" charset="-120"/>
                         </a:rPr>
                         <a:t>0.3330</a:t>
                       </a:r>
                       <a:endParaRPr lang="en-US" sz="900" dirty="0">
-                        <a:latin typeface="Arial" charset="0"/>
-                        <a:ea typeface="Arial" charset="0"/>
-                        <a:cs typeface="Arial" charset="0"/>
+                        <a:latin typeface="Times New Roman" charset="0"/>
+                        <a:ea typeface="Times New Roman" charset="0"/>
+                        <a:cs typeface="Times New Roman" charset="0"/>
                       </a:endParaRPr>
                     </a:p>
                   </a:txBody>
@@ -11071,16 +11071,16 @@
                           <a:solidFill>
                             <a:srgbClr val="000000"/>
                           </a:solidFill>
-                          <a:latin typeface="Arial" pitchFamily="34" charset="0"/>
-                          <a:ea typeface="Arial" pitchFamily="34" charset="-122"/>
-                          <a:cs typeface="Arial" pitchFamily="34" charset="-120"/>
+                          <a:latin typeface="Times New Roman" pitchFamily="34" charset="0"/>
+                          <a:ea typeface="Times New Roman" pitchFamily="34" charset="-122"/>
+                          <a:cs typeface="Times New Roman" pitchFamily="34" charset="-120"/>
                         </a:rPr>
                         <a:t>0.1978</a:t>
                       </a:r>
                       <a:endParaRPr lang="en-US" sz="900" dirty="0">
-                        <a:latin typeface="Arial" charset="0"/>
-                        <a:ea typeface="Arial" charset="0"/>
-                        <a:cs typeface="Arial" charset="0"/>
+                        <a:latin typeface="Times New Roman" charset="0"/>
+                        <a:ea typeface="Times New Roman" charset="0"/>
+                        <a:cs typeface="Times New Roman" charset="0"/>
                       </a:endParaRPr>
                     </a:p>
                   </a:txBody>
@@ -11136,16 +11136,16 @@
                           <a:solidFill>
                             <a:srgbClr val="000000"/>
                           </a:solidFill>
-                          <a:latin typeface="Arial" pitchFamily="34" charset="0"/>
-                          <a:ea typeface="Arial" pitchFamily="34" charset="-122"/>
-                          <a:cs typeface="Arial" pitchFamily="34" charset="-120"/>
+                          <a:latin typeface="Times New Roman" pitchFamily="34" charset="0"/>
+                          <a:ea typeface="Times New Roman" pitchFamily="34" charset="-122"/>
+                          <a:cs typeface="Times New Roman" pitchFamily="34" charset="-120"/>
                         </a:rPr>
                         <a:t>0.7626</a:t>
                       </a:r>
                       <a:endParaRPr lang="en-US" sz="900" dirty="0">
-                        <a:latin typeface="Arial" charset="0"/>
-                        <a:ea typeface="Arial" charset="0"/>
-                        <a:cs typeface="Arial" charset="0"/>
+                        <a:latin typeface="Times New Roman" charset="0"/>
+                        <a:ea typeface="Times New Roman" charset="0"/>
+                        <a:cs typeface="Times New Roman" charset="0"/>
                       </a:endParaRPr>
                     </a:p>
                   </a:txBody>
@@ -11201,16 +11201,16 @@
                           <a:solidFill>
                             <a:srgbClr val="000000"/>
                           </a:solidFill>
-                          <a:latin typeface="Arial" pitchFamily="34" charset="0"/>
-                          <a:ea typeface="Arial" pitchFamily="34" charset="-122"/>
-                          <a:cs typeface="Arial" pitchFamily="34" charset="-120"/>
+                          <a:latin typeface="Times New Roman" pitchFamily="34" charset="0"/>
+                          <a:ea typeface="Times New Roman" pitchFamily="34" charset="-122"/>
+                          <a:cs typeface="Times New Roman" pitchFamily="34" charset="-120"/>
                         </a:rPr>
                         <a:t>0.6228</a:t>
                       </a:r>
                       <a:endParaRPr lang="en-US" sz="900" dirty="0">
-                        <a:latin typeface="Arial" charset="0"/>
-                        <a:ea typeface="Arial" charset="0"/>
-                        <a:cs typeface="Arial" charset="0"/>
+                        <a:latin typeface="Times New Roman" charset="0"/>
+                        <a:ea typeface="Times New Roman" charset="0"/>
+                        <a:cs typeface="Times New Roman" charset="0"/>
                       </a:endParaRPr>
                     </a:p>
                   </a:txBody>
@@ -11268,16 +11268,16 @@
                           <a:solidFill>
                             <a:srgbClr val="000000"/>
                           </a:solidFill>
-                          <a:latin typeface="Arial" pitchFamily="34" charset="0"/>
-                          <a:ea typeface="Arial" pitchFamily="34" charset="-122"/>
-                          <a:cs typeface="Arial" pitchFamily="34" charset="-120"/>
+                          <a:latin typeface="Times New Roman" pitchFamily="34" charset="0"/>
+                          <a:ea typeface="Times New Roman" pitchFamily="34" charset="-122"/>
+                          <a:cs typeface="Times New Roman" pitchFamily="34" charset="-120"/>
                         </a:rPr>
                         <a:t>4-10</a:t>
                       </a:r>
                       <a:endParaRPr lang="en-US" sz="900" dirty="0">
-                        <a:latin typeface="Arial" charset="0"/>
-                        <a:ea typeface="Arial" charset="0"/>
-                        <a:cs typeface="Arial" charset="0"/>
+                        <a:latin typeface="Times New Roman" charset="0"/>
+                        <a:ea typeface="Times New Roman" charset="0"/>
+                        <a:cs typeface="Times New Roman" charset="0"/>
                       </a:endParaRPr>
                     </a:p>
                   </a:txBody>
@@ -11333,16 +11333,16 @@
                           <a:solidFill>
                             <a:srgbClr val="000000"/>
                           </a:solidFill>
-                          <a:latin typeface="Arial" pitchFamily="34" charset="0"/>
-                          <a:ea typeface="Arial" pitchFamily="34" charset="-122"/>
-                          <a:cs typeface="Arial" pitchFamily="34" charset="-120"/>
+                          <a:latin typeface="Times New Roman" pitchFamily="34" charset="0"/>
+                          <a:ea typeface="Times New Roman" pitchFamily="34" charset="-122"/>
+                          <a:cs typeface="Times New Roman" pitchFamily="34" charset="-120"/>
                         </a:rPr>
                         <a:t>0.4247</a:t>
                       </a:r>
                       <a:endParaRPr lang="en-US" sz="900" dirty="0">
-                        <a:latin typeface="Arial" charset="0"/>
-                        <a:ea typeface="Arial" charset="0"/>
-                        <a:cs typeface="Arial" charset="0"/>
+                        <a:latin typeface="Times New Roman" charset="0"/>
+                        <a:ea typeface="Times New Roman" charset="0"/>
+                        <a:cs typeface="Times New Roman" charset="0"/>
                       </a:endParaRPr>
                     </a:p>
                   </a:txBody>
@@ -11398,16 +11398,16 @@
                           <a:solidFill>
                             <a:srgbClr val="000000"/>
                           </a:solidFill>
-                          <a:latin typeface="Arial" pitchFamily="34" charset="0"/>
-                          <a:ea typeface="Arial" pitchFamily="34" charset="-122"/>
-                          <a:cs typeface="Arial" pitchFamily="34" charset="-120"/>
+                          <a:latin typeface="Times New Roman" pitchFamily="34" charset="0"/>
+                          <a:ea typeface="Times New Roman" pitchFamily="34" charset="-122"/>
+                          <a:cs typeface="Times New Roman" pitchFamily="34" charset="-120"/>
                         </a:rPr>
                         <a:t>0.2939</a:t>
                       </a:r>
                       <a:endParaRPr lang="en-US" sz="900" dirty="0">
-                        <a:latin typeface="Arial" charset="0"/>
-                        <a:ea typeface="Arial" charset="0"/>
-                        <a:cs typeface="Arial" charset="0"/>
+                        <a:latin typeface="Times New Roman" charset="0"/>
+                        <a:ea typeface="Times New Roman" charset="0"/>
+                        <a:cs typeface="Times New Roman" charset="0"/>
                       </a:endParaRPr>
                     </a:p>
                   </a:txBody>
@@ -11463,16 +11463,16 @@
                           <a:solidFill>
                             <a:srgbClr val="000000"/>
                           </a:solidFill>
-                          <a:latin typeface="Arial" pitchFamily="34" charset="0"/>
-                          <a:ea typeface="Arial" pitchFamily="34" charset="-122"/>
-                          <a:cs typeface="Arial" pitchFamily="34" charset="-120"/>
+                          <a:latin typeface="Times New Roman" pitchFamily="34" charset="0"/>
+                          <a:ea typeface="Times New Roman" pitchFamily="34" charset="-122"/>
+                          <a:cs typeface="Times New Roman" pitchFamily="34" charset="-120"/>
                         </a:rPr>
                         <a:t>0.3407</a:t>
                       </a:r>
                       <a:endParaRPr lang="en-US" sz="900" dirty="0">
-                        <a:latin typeface="Arial" charset="0"/>
-                        <a:ea typeface="Arial" charset="0"/>
-                        <a:cs typeface="Arial" charset="0"/>
+                        <a:latin typeface="Times New Roman" charset="0"/>
+                        <a:ea typeface="Times New Roman" charset="0"/>
+                        <a:cs typeface="Times New Roman" charset="0"/>
                       </a:endParaRPr>
                     </a:p>
                   </a:txBody>
@@ -11528,16 +11528,16 @@
                           <a:solidFill>
                             <a:srgbClr val="000000"/>
                           </a:solidFill>
-                          <a:latin typeface="Arial" pitchFamily="34" charset="0"/>
-                          <a:ea typeface="Arial" pitchFamily="34" charset="-122"/>
-                          <a:cs typeface="Arial" pitchFamily="34" charset="-120"/>
+                          <a:latin typeface="Times New Roman" pitchFamily="34" charset="0"/>
+                          <a:ea typeface="Times New Roman" pitchFamily="34" charset="-122"/>
+                          <a:cs typeface="Times New Roman" pitchFamily="34" charset="-120"/>
                         </a:rPr>
                         <a:t>0.2118</a:t>
                       </a:r>
                       <a:endParaRPr lang="en-US" sz="900" dirty="0">
-                        <a:latin typeface="Arial" charset="0"/>
-                        <a:ea typeface="Arial" charset="0"/>
-                        <a:cs typeface="Arial" charset="0"/>
+                        <a:latin typeface="Times New Roman" charset="0"/>
+                        <a:ea typeface="Times New Roman" charset="0"/>
+                        <a:cs typeface="Times New Roman" charset="0"/>
                       </a:endParaRPr>
                     </a:p>
                   </a:txBody>
@@ -11593,16 +11593,16 @@
                           <a:solidFill>
                             <a:srgbClr val="000000"/>
                           </a:solidFill>
-                          <a:latin typeface="Arial" pitchFamily="34" charset="0"/>
-                          <a:ea typeface="Arial" pitchFamily="34" charset="-122"/>
-                          <a:cs typeface="Arial" pitchFamily="34" charset="-120"/>
+                          <a:latin typeface="Times New Roman" pitchFamily="34" charset="0"/>
+                          <a:ea typeface="Times New Roman" pitchFamily="34" charset="-122"/>
+                          <a:cs typeface="Times New Roman" pitchFamily="34" charset="-120"/>
                         </a:rPr>
                         <a:t>0.7734</a:t>
                       </a:r>
                       <a:endParaRPr lang="en-US" sz="900" dirty="0">
-                        <a:latin typeface="Arial" charset="0"/>
-                        <a:ea typeface="Arial" charset="0"/>
-                        <a:cs typeface="Arial" charset="0"/>
+                        <a:latin typeface="Times New Roman" charset="0"/>
+                        <a:ea typeface="Times New Roman" charset="0"/>
+                        <a:cs typeface="Times New Roman" charset="0"/>
                       </a:endParaRPr>
                     </a:p>
                   </a:txBody>
@@ -11658,16 +11658,16 @@
                           <a:solidFill>
                             <a:srgbClr val="000000"/>
                           </a:solidFill>
-                          <a:latin typeface="Arial" pitchFamily="34" charset="0"/>
-                          <a:ea typeface="Arial" pitchFamily="34" charset="-122"/>
-                          <a:cs typeface="Arial" pitchFamily="34" charset="-120"/>
+                          <a:latin typeface="Times New Roman" pitchFamily="34" charset="0"/>
+                          <a:ea typeface="Times New Roman" pitchFamily="34" charset="-122"/>
+                          <a:cs typeface="Times New Roman" pitchFamily="34" charset="-120"/>
                         </a:rPr>
                         <a:t>0.6347</a:t>
                       </a:r>
                       <a:endParaRPr lang="en-US" sz="900" dirty="0">
-                        <a:latin typeface="Arial" charset="0"/>
-                        <a:ea typeface="Arial" charset="0"/>
-                        <a:cs typeface="Arial" charset="0"/>
+                        <a:latin typeface="Times New Roman" charset="0"/>
+                        <a:ea typeface="Times New Roman" charset="0"/>
+                        <a:cs typeface="Times New Roman" charset="0"/>
                       </a:endParaRPr>
                     </a:p>
                   </a:txBody>
@@ -11725,16 +11725,16 @@
                           <a:solidFill>
                             <a:srgbClr val="000000"/>
                           </a:solidFill>
-                          <a:latin typeface="Arial" pitchFamily="34" charset="0"/>
-                          <a:ea typeface="Arial" pitchFamily="34" charset="-122"/>
-                          <a:cs typeface="Arial" pitchFamily="34" charset="-120"/>
+                          <a:latin typeface="Times New Roman" pitchFamily="34" charset="0"/>
+                          <a:ea typeface="Times New Roman" pitchFamily="34" charset="-122"/>
+                          <a:cs typeface="Times New Roman" pitchFamily="34" charset="-120"/>
                         </a:rPr>
                         <a:t>4-11</a:t>
                       </a:r>
                       <a:endParaRPr lang="en-US" sz="900" dirty="0">
-                        <a:latin typeface="Arial" charset="0"/>
-                        <a:ea typeface="Arial" charset="0"/>
-                        <a:cs typeface="Arial" charset="0"/>
+                        <a:latin typeface="Times New Roman" charset="0"/>
+                        <a:ea typeface="Times New Roman" charset="0"/>
+                        <a:cs typeface="Times New Roman" charset="0"/>
                       </a:endParaRPr>
                     </a:p>
                   </a:txBody>
@@ -11790,16 +11790,16 @@
                           <a:solidFill>
                             <a:srgbClr val="000000"/>
                           </a:solidFill>
-                          <a:latin typeface="Arial" pitchFamily="34" charset="0"/>
-                          <a:ea typeface="Arial" pitchFamily="34" charset="-122"/>
-                          <a:cs typeface="Arial" pitchFamily="34" charset="-120"/>
+                          <a:latin typeface="Times New Roman" pitchFamily="34" charset="0"/>
+                          <a:ea typeface="Times New Roman" pitchFamily="34" charset="-122"/>
+                          <a:cs typeface="Times New Roman" pitchFamily="34" charset="-120"/>
                         </a:rPr>
                         <a:t>0.4553</a:t>
                       </a:r>
                       <a:endParaRPr lang="en-US" sz="900" dirty="0">
-                        <a:latin typeface="Arial" charset="0"/>
-                        <a:ea typeface="Arial" charset="0"/>
-                        <a:cs typeface="Arial" charset="0"/>
+                        <a:latin typeface="Times New Roman" charset="0"/>
+                        <a:ea typeface="Times New Roman" charset="0"/>
+                        <a:cs typeface="Times New Roman" charset="0"/>
                       </a:endParaRPr>
                     </a:p>
                   </a:txBody>
@@ -11855,16 +11855,16 @@
                           <a:solidFill>
                             <a:srgbClr val="000000"/>
                           </a:solidFill>
-                          <a:latin typeface="Arial" pitchFamily="34" charset="0"/>
-                          <a:ea typeface="Arial" pitchFamily="34" charset="-122"/>
-                          <a:cs typeface="Arial" pitchFamily="34" charset="-120"/>
+                          <a:latin typeface="Times New Roman" pitchFamily="34" charset="0"/>
+                          <a:ea typeface="Times New Roman" pitchFamily="34" charset="-122"/>
+                          <a:cs typeface="Times New Roman" pitchFamily="34" charset="-120"/>
                         </a:rPr>
                         <a:t>0.3254</a:t>
                       </a:r>
                       <a:endParaRPr lang="en-US" sz="900" dirty="0">
-                        <a:latin typeface="Arial" charset="0"/>
-                        <a:ea typeface="Arial" charset="0"/>
-                        <a:cs typeface="Arial" charset="0"/>
+                        <a:latin typeface="Times New Roman" charset="0"/>
+                        <a:ea typeface="Times New Roman" charset="0"/>
+                        <a:cs typeface="Times New Roman" charset="0"/>
                       </a:endParaRPr>
                     </a:p>
                   </a:txBody>
@@ -11920,16 +11920,16 @@
                           <a:solidFill>
                             <a:srgbClr val="000000"/>
                           </a:solidFill>
-                          <a:latin typeface="Arial" pitchFamily="34" charset="0"/>
-                          <a:ea typeface="Arial" pitchFamily="34" charset="-122"/>
-                          <a:cs typeface="Arial" pitchFamily="34" charset="-120"/>
+                          <a:latin typeface="Times New Roman" pitchFamily="34" charset="0"/>
+                          <a:ea typeface="Times New Roman" pitchFamily="34" charset="-122"/>
+                          <a:cs typeface="Times New Roman" pitchFamily="34" charset="-120"/>
                         </a:rPr>
                         <a:t>0.3711</a:t>
                       </a:r>
                       <a:endParaRPr lang="en-US" sz="900" dirty="0">
-                        <a:latin typeface="Arial" charset="0"/>
-                        <a:ea typeface="Arial" charset="0"/>
-                        <a:cs typeface="Arial" charset="0"/>
+                        <a:latin typeface="Times New Roman" charset="0"/>
+                        <a:ea typeface="Times New Roman" charset="0"/>
+                        <a:cs typeface="Times New Roman" charset="0"/>
                       </a:endParaRPr>
                     </a:p>
                   </a:txBody>
@@ -11985,16 +11985,16 @@
                           <a:solidFill>
                             <a:srgbClr val="000000"/>
                           </a:solidFill>
-                          <a:latin typeface="Arial" pitchFamily="34" charset="0"/>
-                          <a:ea typeface="Arial" pitchFamily="34" charset="-122"/>
-                          <a:cs typeface="Arial" pitchFamily="34" charset="-120"/>
+                          <a:latin typeface="Times New Roman" pitchFamily="34" charset="0"/>
+                          <a:ea typeface="Times New Roman" pitchFamily="34" charset="-122"/>
+                          <a:cs typeface="Times New Roman" pitchFamily="34" charset="-120"/>
                         </a:rPr>
                         <a:t>0.2430</a:t>
                       </a:r>
                       <a:endParaRPr lang="en-US" sz="900" dirty="0">
-                        <a:latin typeface="Arial" charset="0"/>
-                        <a:ea typeface="Arial" charset="0"/>
-                        <a:cs typeface="Arial" charset="0"/>
+                        <a:latin typeface="Times New Roman" charset="0"/>
+                        <a:ea typeface="Times New Roman" charset="0"/>
+                        <a:cs typeface="Times New Roman" charset="0"/>
                       </a:endParaRPr>
                     </a:p>
                   </a:txBody>
@@ -12050,16 +12050,16 @@
                           <a:solidFill>
                             <a:srgbClr val="000000"/>
                           </a:solidFill>
-                          <a:latin typeface="Arial" pitchFamily="34" charset="0"/>
-                          <a:ea typeface="Arial" pitchFamily="34" charset="-122"/>
-                          <a:cs typeface="Arial" pitchFamily="34" charset="-120"/>
+                          <a:latin typeface="Times New Roman" pitchFamily="34" charset="0"/>
+                          <a:ea typeface="Times New Roman" pitchFamily="34" charset="-122"/>
+                          <a:cs typeface="Times New Roman" pitchFamily="34" charset="-120"/>
                         </a:rPr>
                         <a:t>0.8049</a:t>
                       </a:r>
                       <a:endParaRPr lang="en-US" sz="900" dirty="0">
-                        <a:latin typeface="Arial" charset="0"/>
-                        <a:ea typeface="Arial" charset="0"/>
-                        <a:cs typeface="Arial" charset="0"/>
+                        <a:latin typeface="Times New Roman" charset="0"/>
+                        <a:ea typeface="Times New Roman" charset="0"/>
+                        <a:cs typeface="Times New Roman" charset="0"/>
                       </a:endParaRPr>
                     </a:p>
                   </a:txBody>
@@ -12115,16 +12115,16 @@
                           <a:solidFill>
                             <a:srgbClr val="000000"/>
                           </a:solidFill>
-                          <a:latin typeface="Arial" pitchFamily="34" charset="0"/>
-                          <a:ea typeface="Arial" pitchFamily="34" charset="-122"/>
-                          <a:cs typeface="Arial" pitchFamily="34" charset="-120"/>
+                          <a:latin typeface="Times New Roman" pitchFamily="34" charset="0"/>
+                          <a:ea typeface="Times New Roman" pitchFamily="34" charset="-122"/>
+                          <a:cs typeface="Times New Roman" pitchFamily="34" charset="-120"/>
                         </a:rPr>
                         <a:t>0.6678</a:t>
                       </a:r>
                       <a:endParaRPr lang="en-US" sz="900" dirty="0">
-                        <a:latin typeface="Arial" charset="0"/>
-                        <a:ea typeface="Arial" charset="0"/>
-                        <a:cs typeface="Arial" charset="0"/>
+                        <a:latin typeface="Times New Roman" charset="0"/>
+                        <a:ea typeface="Times New Roman" charset="0"/>
+                        <a:cs typeface="Times New Roman" charset="0"/>
                       </a:endParaRPr>
                     </a:p>
                   </a:txBody>
@@ -12182,16 +12182,16 @@
                           <a:solidFill>
                             <a:srgbClr val="000000"/>
                           </a:solidFill>
-                          <a:latin typeface="Arial" pitchFamily="34" charset="0"/>
-                          <a:ea typeface="Arial" pitchFamily="34" charset="-122"/>
-                          <a:cs typeface="Arial" pitchFamily="34" charset="-120"/>
+                          <a:latin typeface="Times New Roman" pitchFamily="34" charset="0"/>
+                          <a:ea typeface="Times New Roman" pitchFamily="34" charset="-122"/>
+                          <a:cs typeface="Times New Roman" pitchFamily="34" charset="-120"/>
                         </a:rPr>
                         <a:t>4-12</a:t>
                       </a:r>
                       <a:endParaRPr lang="en-US" sz="900" dirty="0">
-                        <a:latin typeface="Arial" charset="0"/>
-                        <a:ea typeface="Arial" charset="0"/>
-                        <a:cs typeface="Arial" charset="0"/>
+                        <a:latin typeface="Times New Roman" charset="0"/>
+                        <a:ea typeface="Times New Roman" charset="0"/>
+                        <a:cs typeface="Times New Roman" charset="0"/>
                       </a:endParaRPr>
                     </a:p>
                   </a:txBody>
@@ -12247,16 +12247,16 @@
                           <a:solidFill>
                             <a:srgbClr val="000000"/>
                           </a:solidFill>
-                          <a:latin typeface="Arial" pitchFamily="34" charset="0"/>
-                          <a:ea typeface="Arial" pitchFamily="34" charset="-122"/>
-                          <a:cs typeface="Arial" pitchFamily="34" charset="-120"/>
+                          <a:latin typeface="Times New Roman" pitchFamily="34" charset="0"/>
+                          <a:ea typeface="Times New Roman" pitchFamily="34" charset="-122"/>
+                          <a:cs typeface="Times New Roman" pitchFamily="34" charset="-120"/>
                         </a:rPr>
                         <a:t>0.4633</a:t>
                       </a:r>
                       <a:endParaRPr lang="en-US" sz="900" dirty="0">
-                        <a:latin typeface="Arial" charset="0"/>
-                        <a:ea typeface="Arial" charset="0"/>
-                        <a:cs typeface="Arial" charset="0"/>
+                        <a:latin typeface="Times New Roman" charset="0"/>
+                        <a:ea typeface="Times New Roman" charset="0"/>
+                        <a:cs typeface="Times New Roman" charset="0"/>
                       </a:endParaRPr>
                     </a:p>
                   </a:txBody>
@@ -12312,16 +12312,16 @@
                           <a:solidFill>
                             <a:srgbClr val="000000"/>
                           </a:solidFill>
-                          <a:latin typeface="Arial" pitchFamily="34" charset="0"/>
-                          <a:ea typeface="Arial" pitchFamily="34" charset="-122"/>
-                          <a:cs typeface="Arial" pitchFamily="34" charset="-120"/>
+                          <a:latin typeface="Times New Roman" pitchFamily="34" charset="0"/>
+                          <a:ea typeface="Times New Roman" pitchFamily="34" charset="-122"/>
+                          <a:cs typeface="Times New Roman" pitchFamily="34" charset="-120"/>
                         </a:rPr>
                         <a:t>0.3318</a:t>
                       </a:r>
                       <a:endParaRPr lang="en-US" sz="900" dirty="0">
-                        <a:latin typeface="Arial" charset="0"/>
-                        <a:ea typeface="Arial" charset="0"/>
-                        <a:cs typeface="Arial" charset="0"/>
+                        <a:latin typeface="Times New Roman" charset="0"/>
+                        <a:ea typeface="Times New Roman" charset="0"/>
+                        <a:cs typeface="Times New Roman" charset="0"/>
                       </a:endParaRPr>
                     </a:p>
                   </a:txBody>
@@ -12377,16 +12377,16 @@
                           <a:solidFill>
                             <a:srgbClr val="000000"/>
                           </a:solidFill>
-                          <a:latin typeface="Arial" pitchFamily="34" charset="0"/>
-                          <a:ea typeface="Arial" pitchFamily="34" charset="-122"/>
-                          <a:cs typeface="Arial" pitchFamily="34" charset="-120"/>
+                          <a:latin typeface="Times New Roman" pitchFamily="34" charset="0"/>
+                          <a:ea typeface="Times New Roman" pitchFamily="34" charset="-122"/>
+                          <a:cs typeface="Times New Roman" pitchFamily="34" charset="-120"/>
                         </a:rPr>
                         <a:t>0.3775</a:t>
                       </a:r>
                       <a:endParaRPr lang="en-US" sz="900" dirty="0">
-                        <a:latin typeface="Arial" charset="0"/>
-                        <a:ea typeface="Arial" charset="0"/>
-                        <a:cs typeface="Arial" charset="0"/>
+                        <a:latin typeface="Times New Roman" charset="0"/>
+                        <a:ea typeface="Times New Roman" charset="0"/>
+                        <a:cs typeface="Times New Roman" charset="0"/>
                       </a:endParaRPr>
                     </a:p>
                   </a:txBody>
@@ -12442,16 +12442,16 @@
                           <a:solidFill>
                             <a:srgbClr val="000000"/>
                           </a:solidFill>
-                          <a:latin typeface="Arial" pitchFamily="34" charset="0"/>
-                          <a:ea typeface="Arial" pitchFamily="34" charset="-122"/>
-                          <a:cs typeface="Arial" pitchFamily="34" charset="-120"/>
+                          <a:latin typeface="Times New Roman" pitchFamily="34" charset="0"/>
+                          <a:ea typeface="Times New Roman" pitchFamily="34" charset="-122"/>
+                          <a:cs typeface="Times New Roman" pitchFamily="34" charset="-120"/>
                         </a:rPr>
                         <a:t>0.2481</a:t>
                       </a:r>
                       <a:endParaRPr lang="en-US" sz="900" dirty="0">
-                        <a:latin typeface="Arial" charset="0"/>
-                        <a:ea typeface="Arial" charset="0"/>
-                        <a:cs typeface="Arial" charset="0"/>
+                        <a:latin typeface="Times New Roman" charset="0"/>
+                        <a:ea typeface="Times New Roman" charset="0"/>
+                        <a:cs typeface="Times New Roman" charset="0"/>
                       </a:endParaRPr>
                     </a:p>
                   </a:txBody>
@@ -12507,16 +12507,16 @@
                           <a:solidFill>
                             <a:srgbClr val="000000"/>
                           </a:solidFill>
-                          <a:latin typeface="Arial" pitchFamily="34" charset="0"/>
-                          <a:ea typeface="Arial" pitchFamily="34" charset="-122"/>
-                          <a:cs typeface="Arial" pitchFamily="34" charset="-120"/>
+                          <a:latin typeface="Times New Roman" pitchFamily="34" charset="0"/>
+                          <a:ea typeface="Times New Roman" pitchFamily="34" charset="-122"/>
+                          <a:cs typeface="Times New Roman" pitchFamily="34" charset="-120"/>
                         </a:rPr>
                         <a:t>0.8195</a:t>
                       </a:r>
                       <a:endParaRPr lang="en-US" sz="900" dirty="0">
-                        <a:latin typeface="Arial" charset="0"/>
-                        <a:ea typeface="Arial" charset="0"/>
-                        <a:cs typeface="Arial" charset="0"/>
+                        <a:latin typeface="Times New Roman" charset="0"/>
+                        <a:ea typeface="Times New Roman" charset="0"/>
+                        <a:cs typeface="Times New Roman" charset="0"/>
                       </a:endParaRPr>
                     </a:p>
                   </a:txBody>
@@ -12572,16 +12572,16 @@
                           <a:solidFill>
                             <a:srgbClr val="000000"/>
                           </a:solidFill>
-                          <a:latin typeface="Arial" pitchFamily="34" charset="0"/>
-                          <a:ea typeface="Arial" pitchFamily="34" charset="-122"/>
-                          <a:cs typeface="Arial" pitchFamily="34" charset="-120"/>
+                          <a:latin typeface="Times New Roman" pitchFamily="34" charset="0"/>
+                          <a:ea typeface="Times New Roman" pitchFamily="34" charset="-122"/>
+                          <a:cs typeface="Times New Roman" pitchFamily="34" charset="-120"/>
                         </a:rPr>
                         <a:t>0.6797</a:t>
                       </a:r>
                       <a:endParaRPr lang="en-US" sz="900" dirty="0">
-                        <a:latin typeface="Arial" charset="0"/>
-                        <a:ea typeface="Arial" charset="0"/>
-                        <a:cs typeface="Arial" charset="0"/>
+                        <a:latin typeface="Times New Roman" charset="0"/>
+                        <a:ea typeface="Times New Roman" charset="0"/>
+                        <a:cs typeface="Times New Roman" charset="0"/>
                       </a:endParaRPr>
                     </a:p>
                   </a:txBody>
@@ -12661,9 +12661,9 @@
                 <a:solidFill>
                   <a:srgbClr val="000000"/>
                 </a:solidFill>
-                <a:latin typeface="Arial"/>
-                <a:ea typeface="Arial"/>
-                <a:cs typeface="Arial"/>
+                <a:latin typeface="Times New Roman"/>
+                <a:ea typeface="Times New Roman"/>
+                <a:cs typeface="Times New Roman"/>
               </a:defRPr>
             </a:lvl1pPr>
           </a:lstStyle>
@@ -12809,9 +12809,9 @@
                 <a:solidFill>
                   <a:srgbClr val="000000"/>
                 </a:solidFill>
-                <a:latin typeface="Arial" pitchFamily="34" charset="0"/>
-                <a:ea typeface="Arial" pitchFamily="34" charset="-122"/>
-                <a:cs typeface="Arial" pitchFamily="34" charset="-120"/>
+                <a:latin typeface="Times New Roman" pitchFamily="34" charset="0"/>
+                <a:ea typeface="Times New Roman" pitchFamily="34" charset="-122"/>
+                <a:cs typeface="Times New Roman" pitchFamily="34" charset="-120"/>
               </a:rPr>
               <a:t>*1</a:t>
             </a:r>
@@ -12823,9 +12823,9 @@
                 <a:solidFill>
                   <a:srgbClr val="000000"/>
                 </a:solidFill>
-                <a:latin typeface="Arial" pitchFamily="34" charset="0"/>
-                <a:ea typeface="Arial" pitchFamily="34" charset="-122"/>
-                <a:cs typeface="Arial" pitchFamily="34" charset="-120"/>
+                <a:latin typeface="Times New Roman" pitchFamily="34" charset="0"/>
+                <a:ea typeface="Times New Roman" pitchFamily="34" charset="-122"/>
+                <a:cs typeface="Times New Roman" pitchFamily="34" charset="-120"/>
               </a:rPr>
               <a:t> </a:t>
             </a:r>
@@ -12837,9 +12837,9 @@
                 <a:solidFill>
                   <a:srgbClr val="0000EE"/>
                 </a:solidFill>
-                <a:latin typeface="Arial" pitchFamily="34" charset="0"/>
-                <a:ea typeface="Arial" pitchFamily="34" charset="-122"/>
-                <a:cs typeface="Arial" pitchFamily="34" charset="-120"/>
+                <a:latin typeface="Times New Roman" pitchFamily="34" charset="0"/>
+                <a:ea typeface="Times New Roman" pitchFamily="34" charset="-122"/>
+                <a:cs typeface="Times New Roman" pitchFamily="34" charset="-120"/>
                 <a:hlinkClick r:id="rId1" invalidUrl="" action="" tgtFrame="" tooltip="" history="1" highlightClick="0" endSnd="0">
                   <a:extLst>
                     <a:ext uri="{A12FA001-AC4F-418D-AE19-62706E023703}">
@@ -12897,16 +12897,16 @@
                           <a:solidFill>
                             <a:srgbClr val="000000"/>
                           </a:solidFill>
-                          <a:latin typeface="Arial" pitchFamily="34" charset="0"/>
-                          <a:ea typeface="Arial" pitchFamily="34" charset="-122"/>
-                          <a:cs typeface="Arial" pitchFamily="34" charset="-120"/>
+                          <a:latin typeface="Times New Roman" pitchFamily="34" charset="0"/>
+                          <a:ea typeface="Times New Roman" pitchFamily="34" charset="-122"/>
+                          <a:cs typeface="Times New Roman" pitchFamily="34" charset="-120"/>
                         </a:rPr>
                         <a:t>representation</a:t>
                       </a:r>
                       <a:endParaRPr lang="en-US" sz="800" dirty="0">
-                        <a:latin typeface="Arial" charset="0"/>
-                        <a:ea typeface="Arial" charset="0"/>
-                        <a:cs typeface="Arial" charset="0"/>
+                        <a:latin typeface="Times New Roman" charset="0"/>
+                        <a:ea typeface="Times New Roman" charset="0"/>
+                        <a:cs typeface="Times New Roman" charset="0"/>
                       </a:endParaRPr>
                     </a:p>
                   </a:txBody>
@@ -12965,16 +12965,16 @@
                           <a:solidFill>
                             <a:srgbClr val="000000"/>
                           </a:solidFill>
-                          <a:latin typeface="Arial" pitchFamily="34" charset="0"/>
-                          <a:ea typeface="Arial" pitchFamily="34" charset="-122"/>
-                          <a:cs typeface="Arial" pitchFamily="34" charset="-120"/>
+                          <a:latin typeface="Times New Roman" pitchFamily="34" charset="0"/>
+                          <a:ea typeface="Times New Roman" pitchFamily="34" charset="-122"/>
+                          <a:cs typeface="Times New Roman" pitchFamily="34" charset="-120"/>
                         </a:rPr>
                         <a:t>space</a:t>
                       </a:r>
                       <a:endParaRPr lang="en-US" sz="800" dirty="0">
-                        <a:latin typeface="Arial" charset="0"/>
-                        <a:ea typeface="Arial" charset="0"/>
-                        <a:cs typeface="Arial" charset="0"/>
+                        <a:latin typeface="Times New Roman" charset="0"/>
+                        <a:ea typeface="Times New Roman" charset="0"/>
+                        <a:cs typeface="Times New Roman" charset="0"/>
                       </a:endParaRPr>
                     </a:p>
                   </a:txBody>
@@ -13033,16 +13033,16 @@
                           <a:solidFill>
                             <a:srgbClr val="000000"/>
                           </a:solidFill>
-                          <a:latin typeface="Arial" pitchFamily="34" charset="0"/>
-                          <a:ea typeface="Arial" pitchFamily="34" charset="-122"/>
-                          <a:cs typeface="Arial" pitchFamily="34" charset="-120"/>
+                          <a:latin typeface="Times New Roman" pitchFamily="34" charset="0"/>
+                          <a:ea typeface="Times New Roman" pitchFamily="34" charset="-122"/>
+                          <a:cs typeface="Times New Roman" pitchFamily="34" charset="-120"/>
                         </a:rPr>
                         <a:t>samplable</a:t>
                       </a:r>
                       <a:endParaRPr lang="en-US" sz="800" dirty="0">
-                        <a:latin typeface="Arial" charset="0"/>
-                        <a:ea typeface="Arial" charset="0"/>
-                        <a:cs typeface="Arial" charset="0"/>
+                        <a:latin typeface="Times New Roman" charset="0"/>
+                        <a:ea typeface="Times New Roman" charset="0"/>
+                        <a:cs typeface="Times New Roman" charset="0"/>
                       </a:endParaRPr>
                     </a:p>
                   </a:txBody>
@@ -13101,16 +13101,16 @@
                           <a:solidFill>
                             <a:srgbClr val="000000"/>
                           </a:solidFill>
-                          <a:latin typeface="Arial" pitchFamily="34" charset="0"/>
-                          <a:ea typeface="Arial" pitchFamily="34" charset="-122"/>
-                          <a:cs typeface="Arial" pitchFamily="34" charset="-120"/>
+                          <a:latin typeface="Times New Roman" pitchFamily="34" charset="0"/>
+                          <a:ea typeface="Times New Roman" pitchFamily="34" charset="-122"/>
+                          <a:cs typeface="Times New Roman" pitchFamily="34" charset="-120"/>
                         </a:rPr>
                         <a:t>interpretable</a:t>
                       </a:r>
                       <a:endParaRPr lang="en-US" sz="800" dirty="0">
-                        <a:latin typeface="Arial" charset="0"/>
-                        <a:ea typeface="Arial" charset="0"/>
-                        <a:cs typeface="Arial" charset="0"/>
+                        <a:latin typeface="Times New Roman" charset="0"/>
+                        <a:ea typeface="Times New Roman" charset="0"/>
+                        <a:cs typeface="Times New Roman" charset="0"/>
                       </a:endParaRPr>
                     </a:p>
                   </a:txBody>
@@ -13169,16 +13169,16 @@
                           <a:solidFill>
                             <a:srgbClr val="000000"/>
                           </a:solidFill>
-                          <a:latin typeface="Arial" pitchFamily="34" charset="0"/>
-                          <a:ea typeface="Arial" pitchFamily="34" charset="-122"/>
-                          <a:cs typeface="Arial" pitchFamily="34" charset="-120"/>
+                          <a:latin typeface="Times New Roman" pitchFamily="34" charset="0"/>
+                          <a:ea typeface="Times New Roman" pitchFamily="34" charset="-122"/>
+                          <a:cs typeface="Times New Roman" pitchFamily="34" charset="-120"/>
                         </a:rPr>
                         <a:t>examples</a:t>
                       </a:r>
                       <a:endParaRPr lang="en-US" sz="800" dirty="0">
-                        <a:latin typeface="Arial" charset="0"/>
-                        <a:ea typeface="Arial" charset="0"/>
-                        <a:cs typeface="Arial" charset="0"/>
+                        <a:latin typeface="Times New Roman" charset="0"/>
+                        <a:ea typeface="Times New Roman" charset="0"/>
+                        <a:cs typeface="Times New Roman" charset="0"/>
                       </a:endParaRPr>
                     </a:p>
                   </a:txBody>
@@ -13239,16 +13239,16 @@
                           <a:solidFill>
                             <a:srgbClr val="000000"/>
                           </a:solidFill>
-                          <a:latin typeface="Arial" pitchFamily="34" charset="0"/>
-                          <a:ea typeface="Arial" pitchFamily="34" charset="-122"/>
-                          <a:cs typeface="Arial" pitchFamily="34" charset="-120"/>
+                          <a:latin typeface="Times New Roman" pitchFamily="34" charset="0"/>
+                          <a:ea typeface="Times New Roman" pitchFamily="34" charset="-122"/>
+                          <a:cs typeface="Times New Roman" pitchFamily="34" charset="-120"/>
                         </a:rPr>
                         <a:t>Discrete language</a:t>
                       </a:r>
                       <a:endParaRPr lang="en-US" sz="800" dirty="0">
-                        <a:latin typeface="Arial" charset="0"/>
-                        <a:ea typeface="Arial" charset="0"/>
-                        <a:cs typeface="Arial" charset="0"/>
+                        <a:latin typeface="Times New Roman" charset="0"/>
+                        <a:ea typeface="Times New Roman" charset="0"/>
+                        <a:cs typeface="Times New Roman" charset="0"/>
                       </a:endParaRPr>
                     </a:p>
                   </a:txBody>
@@ -13304,16 +13304,16 @@
                           <a:solidFill>
                             <a:srgbClr val="000000"/>
                           </a:solidFill>
-                          <a:latin typeface="Arial" pitchFamily="34" charset="0"/>
-                          <a:ea typeface="Arial" pitchFamily="34" charset="-122"/>
-                          <a:cs typeface="Arial" pitchFamily="34" charset="-120"/>
+                          <a:latin typeface="Times New Roman" pitchFamily="34" charset="0"/>
+                          <a:ea typeface="Times New Roman" pitchFamily="34" charset="-122"/>
+                          <a:cs typeface="Times New Roman" pitchFamily="34" charset="-120"/>
                         </a:rPr>
                         <a:t>Native vocab</a:t>
                       </a:r>
                       <a:endParaRPr lang="en-US" sz="800" dirty="0">
-                        <a:latin typeface="Arial" charset="0"/>
-                        <a:ea typeface="Arial" charset="0"/>
-                        <a:cs typeface="Arial" charset="0"/>
+                        <a:latin typeface="Times New Roman" charset="0"/>
+                        <a:ea typeface="Times New Roman" charset="0"/>
+                        <a:cs typeface="Times New Roman" charset="0"/>
                       </a:endParaRPr>
                     </a:p>
                   </a:txBody>
@@ -13369,16 +13369,16 @@
                           <a:solidFill>
                             <a:srgbClr val="000000"/>
                           </a:solidFill>
-                          <a:latin typeface="Arial" pitchFamily="34" charset="0"/>
-                          <a:ea typeface="Arial" pitchFamily="34" charset="-122"/>
-                          <a:cs typeface="Arial" pitchFamily="34" charset="-120"/>
+                          <a:latin typeface="Times New Roman" pitchFamily="34" charset="0"/>
+                          <a:ea typeface="Times New Roman" pitchFamily="34" charset="-122"/>
+                          <a:cs typeface="Times New Roman" pitchFamily="34" charset="-120"/>
                         </a:rPr>
                         <a:t>v</a:t>
                       </a:r>
                       <a:endParaRPr lang="en-US" sz="800" dirty="0">
-                        <a:latin typeface="Arial" charset="0"/>
-                        <a:ea typeface="Arial" charset="0"/>
-                        <a:cs typeface="Arial" charset="0"/>
+                        <a:latin typeface="Times New Roman" charset="0"/>
+                        <a:ea typeface="Times New Roman" charset="0"/>
+                        <a:cs typeface="Times New Roman" charset="0"/>
                       </a:endParaRPr>
                     </a:p>
                   </a:txBody>
@@ -13434,16 +13434,16 @@
                           <a:solidFill>
                             <a:srgbClr val="000000"/>
                           </a:solidFill>
-                          <a:latin typeface="Arial" pitchFamily="34" charset="0"/>
-                          <a:ea typeface="Arial" pitchFamily="34" charset="-122"/>
-                          <a:cs typeface="Arial" pitchFamily="34" charset="-120"/>
+                          <a:latin typeface="Times New Roman" pitchFamily="34" charset="0"/>
+                          <a:ea typeface="Times New Roman" pitchFamily="34" charset="-122"/>
+                          <a:cs typeface="Times New Roman" pitchFamily="34" charset="-120"/>
                         </a:rPr>
                         <a:t>v</a:t>
                       </a:r>
                       <a:endParaRPr lang="en-US" sz="800" dirty="0">
-                        <a:latin typeface="Arial" charset="0"/>
-                        <a:ea typeface="Arial" charset="0"/>
-                        <a:cs typeface="Arial" charset="0"/>
+                        <a:latin typeface="Times New Roman" charset="0"/>
+                        <a:ea typeface="Times New Roman" charset="0"/>
+                        <a:cs typeface="Times New Roman" charset="0"/>
                       </a:endParaRPr>
                     </a:p>
                   </a:txBody>
@@ -13499,16 +13499,16 @@
                           <a:solidFill>
                             <a:srgbClr val="000000"/>
                           </a:solidFill>
-                          <a:latin typeface="Arial" pitchFamily="34" charset="0"/>
-                          <a:ea typeface="Arial" pitchFamily="34" charset="-122"/>
-                          <a:cs typeface="Arial" pitchFamily="34" charset="-120"/>
+                          <a:latin typeface="Times New Roman" pitchFamily="34" charset="0"/>
+                          <a:ea typeface="Times New Roman" pitchFamily="34" charset="-122"/>
+                          <a:cs typeface="Times New Roman" pitchFamily="34" charset="-120"/>
                         </a:rPr>
                         <a:t>C3oT, CoT-Valve, Markovian Transformers</a:t>
                       </a:r>
                       <a:endParaRPr lang="en-US" sz="800" dirty="0">
-                        <a:latin typeface="Arial" charset="0"/>
-                        <a:ea typeface="Arial" charset="0"/>
-                        <a:cs typeface="Arial" charset="0"/>
+                        <a:latin typeface="Times New Roman" charset="0"/>
+                        <a:ea typeface="Times New Roman" charset="0"/>
+                        <a:cs typeface="Times New Roman" charset="0"/>
                       </a:endParaRPr>
                     </a:p>
                   </a:txBody>
@@ -13566,16 +13566,16 @@
                           <a:solidFill>
                             <a:srgbClr val="000000"/>
                           </a:solidFill>
-                          <a:latin typeface="Arial" pitchFamily="34" charset="0"/>
-                          <a:ea typeface="Arial" pitchFamily="34" charset="-122"/>
-                          <a:cs typeface="Arial" pitchFamily="34" charset="-120"/>
+                          <a:latin typeface="Times New Roman" pitchFamily="34" charset="0"/>
+                          <a:ea typeface="Times New Roman" pitchFamily="34" charset="-122"/>
+                          <a:cs typeface="Times New Roman" pitchFamily="34" charset="-120"/>
                         </a:rPr>
                         <a:t>Continuous hidden state</a:t>
                       </a:r>
                       <a:endParaRPr lang="en-US" sz="800" dirty="0">
-                        <a:latin typeface="Arial" charset="0"/>
-                        <a:ea typeface="Arial" charset="0"/>
-                        <a:cs typeface="Arial" charset="0"/>
+                        <a:latin typeface="Times New Roman" charset="0"/>
+                        <a:ea typeface="Times New Roman" charset="0"/>
+                        <a:cs typeface="Times New Roman" charset="0"/>
                       </a:endParaRPr>
                     </a:p>
                   </a:txBody>
@@ -13631,16 +13631,16 @@
                           <a:solidFill>
                             <a:srgbClr val="000000"/>
                           </a:solidFill>
-                          <a:latin typeface="Arial" pitchFamily="34" charset="0"/>
-                          <a:ea typeface="Arial" pitchFamily="34" charset="-122"/>
-                          <a:cs typeface="Arial" pitchFamily="34" charset="-120"/>
+                          <a:latin typeface="Times New Roman" pitchFamily="34" charset="0"/>
+                          <a:ea typeface="Times New Roman" pitchFamily="34" charset="-122"/>
+                          <a:cs typeface="Times New Roman" pitchFamily="34" charset="-120"/>
                         </a:rPr>
                         <a:t>Model residual stream</a:t>
                       </a:r>
                       <a:endParaRPr lang="en-US" sz="800" dirty="0">
-                        <a:latin typeface="Arial" charset="0"/>
-                        <a:ea typeface="Arial" charset="0"/>
-                        <a:cs typeface="Arial" charset="0"/>
+                        <a:latin typeface="Times New Roman" charset="0"/>
+                        <a:ea typeface="Times New Roman" charset="0"/>
+                        <a:cs typeface="Times New Roman" charset="0"/>
                       </a:endParaRPr>
                     </a:p>
                   </a:txBody>
@@ -13696,16 +13696,16 @@
                           <a:solidFill>
                             <a:srgbClr val="000000"/>
                           </a:solidFill>
-                          <a:latin typeface="Arial" pitchFamily="34" charset="0"/>
-                          <a:ea typeface="Arial" pitchFamily="34" charset="-122"/>
-                          <a:cs typeface="Arial" pitchFamily="34" charset="-120"/>
+                          <a:latin typeface="Times New Roman" pitchFamily="34" charset="0"/>
+                          <a:ea typeface="Times New Roman" pitchFamily="34" charset="-122"/>
+                          <a:cs typeface="Times New Roman" pitchFamily="34" charset="-120"/>
                         </a:rPr>
                         <a:t>–</a:t>
                       </a:r>
                       <a:endParaRPr lang="en-US" sz="800" dirty="0">
-                        <a:latin typeface="Arial" charset="0"/>
-                        <a:ea typeface="Arial" charset="0"/>
-                        <a:cs typeface="Arial" charset="0"/>
+                        <a:latin typeface="Times New Roman" charset="0"/>
+                        <a:ea typeface="Times New Roman" charset="0"/>
+                        <a:cs typeface="Times New Roman" charset="0"/>
                       </a:endParaRPr>
                     </a:p>
                   </a:txBody>
@@ -13761,16 +13761,16 @@
                           <a:solidFill>
                             <a:srgbClr val="000000"/>
                           </a:solidFill>
-                          <a:latin typeface="Arial" pitchFamily="34" charset="0"/>
-                          <a:ea typeface="Arial" pitchFamily="34" charset="-122"/>
-                          <a:cs typeface="Arial" pitchFamily="34" charset="-120"/>
+                          <a:latin typeface="Times New Roman" pitchFamily="34" charset="0"/>
+                          <a:ea typeface="Times New Roman" pitchFamily="34" charset="-122"/>
+                          <a:cs typeface="Times New Roman" pitchFamily="34" charset="-120"/>
                         </a:rPr>
                         <a:t>v 1</a:t>
                       </a:r>
                       <a:endParaRPr lang="en-US" sz="800" dirty="0">
-                        <a:latin typeface="Arial" charset="0"/>
-                        <a:ea typeface="Arial" charset="0"/>
-                        <a:cs typeface="Arial" charset="0"/>
+                        <a:latin typeface="Times New Roman" charset="0"/>
+                        <a:ea typeface="Times New Roman" charset="0"/>
+                        <a:cs typeface="Times New Roman" charset="0"/>
                       </a:endParaRPr>
                     </a:p>
                   </a:txBody>
@@ -13826,16 +13826,16 @@
                           <a:solidFill>
                             <a:srgbClr val="000000"/>
                           </a:solidFill>
-                          <a:latin typeface="Arial" pitchFamily="34" charset="0"/>
-                          <a:ea typeface="Arial" pitchFamily="34" charset="-122"/>
-                          <a:cs typeface="Arial" pitchFamily="34" charset="-120"/>
+                          <a:latin typeface="Times New Roman" pitchFamily="34" charset="0"/>
+                          <a:ea typeface="Times New Roman" pitchFamily="34" charset="-122"/>
+                          <a:cs typeface="Times New Roman" pitchFamily="34" charset="-120"/>
                         </a:rPr>
                         <a:t>Coconut, CODI, LOTUS</a:t>
                       </a:r>
                       <a:endParaRPr lang="en-US" sz="800" dirty="0">
-                        <a:latin typeface="Arial" charset="0"/>
-                        <a:ea typeface="Arial" charset="0"/>
-                        <a:cs typeface="Arial" charset="0"/>
+                        <a:latin typeface="Times New Roman" charset="0"/>
+                        <a:ea typeface="Times New Roman" charset="0"/>
+                        <a:cs typeface="Times New Roman" charset="0"/>
                       </a:endParaRPr>
                     </a:p>
                   </a:txBody>
@@ -13893,16 +13893,16 @@
                           <a:solidFill>
                             <a:srgbClr val="000000"/>
                           </a:solidFill>
-                          <a:latin typeface="Arial" pitchFamily="34" charset="0"/>
-                          <a:ea typeface="Arial" pitchFamily="34" charset="-122"/>
-                          <a:cs typeface="Arial" pitchFamily="34" charset="-120"/>
+                          <a:latin typeface="Times New Roman" pitchFamily="34" charset="0"/>
+                          <a:ea typeface="Times New Roman" pitchFamily="34" charset="-122"/>
+                          <a:cs typeface="Times New Roman" pitchFamily="34" charset="-120"/>
                         </a:rPr>
                         <a:t>Learned latent tokens</a:t>
                       </a:r>
                       <a:endParaRPr lang="en-US" sz="800" dirty="0">
-                        <a:latin typeface="Arial" charset="0"/>
-                        <a:ea typeface="Arial" charset="0"/>
-                        <a:cs typeface="Arial" charset="0"/>
+                        <a:latin typeface="Times New Roman" charset="0"/>
+                        <a:ea typeface="Times New Roman" charset="0"/>
+                        <a:cs typeface="Times New Roman" charset="0"/>
                       </a:endParaRPr>
                     </a:p>
                   </a:txBody>
@@ -13958,16 +13958,16 @@
                           <a:solidFill>
                             <a:srgbClr val="000000"/>
                           </a:solidFill>
-                          <a:latin typeface="Arial" pitchFamily="34" charset="0"/>
-                          <a:ea typeface="Arial" pitchFamily="34" charset="-122"/>
-                          <a:cs typeface="Arial" pitchFamily="34" charset="-120"/>
+                          <a:latin typeface="Times New Roman" pitchFamily="34" charset="0"/>
+                          <a:ea typeface="Times New Roman" pitchFamily="34" charset="-122"/>
+                          <a:cs typeface="Times New Roman" pitchFamily="34" charset="-120"/>
                         </a:rPr>
                         <a:t>Auxiliary codebook</a:t>
                       </a:r>
                       <a:endParaRPr lang="en-US" sz="800" dirty="0">
-                        <a:latin typeface="Arial" charset="0"/>
-                        <a:ea typeface="Arial" charset="0"/>
-                        <a:cs typeface="Arial" charset="0"/>
+                        <a:latin typeface="Times New Roman" charset="0"/>
+                        <a:ea typeface="Times New Roman" charset="0"/>
+                        <a:cs typeface="Times New Roman" charset="0"/>
                       </a:endParaRPr>
                     </a:p>
                   </a:txBody>
@@ -14023,16 +14023,16 @@
                           <a:solidFill>
                             <a:srgbClr val="000000"/>
                           </a:solidFill>
-                          <a:latin typeface="Arial" pitchFamily="34" charset="0"/>
-                          <a:ea typeface="Arial" pitchFamily="34" charset="-122"/>
-                          <a:cs typeface="Arial" pitchFamily="34" charset="-120"/>
+                          <a:latin typeface="Times New Roman" pitchFamily="34" charset="0"/>
+                          <a:ea typeface="Times New Roman" pitchFamily="34" charset="-122"/>
+                          <a:cs typeface="Times New Roman" pitchFamily="34" charset="-120"/>
                         </a:rPr>
                         <a:t>v 2</a:t>
                       </a:r>
                       <a:endParaRPr lang="en-US" sz="800" dirty="0">
-                        <a:latin typeface="Arial" charset="0"/>
-                        <a:ea typeface="Arial" charset="0"/>
-                        <a:cs typeface="Arial" charset="0"/>
+                        <a:latin typeface="Times New Roman" charset="0"/>
+                        <a:ea typeface="Times New Roman" charset="0"/>
+                        <a:cs typeface="Times New Roman" charset="0"/>
                       </a:endParaRPr>
                     </a:p>
                   </a:txBody>
@@ -14088,16 +14088,16 @@
                           <a:solidFill>
                             <a:srgbClr val="000000"/>
                           </a:solidFill>
-                          <a:latin typeface="Arial" pitchFamily="34" charset="0"/>
-                          <a:ea typeface="Arial" pitchFamily="34" charset="-122"/>
-                          <a:cs typeface="Arial" pitchFamily="34" charset="-120"/>
+                          <a:latin typeface="Times New Roman" pitchFamily="34" charset="0"/>
+                          <a:ea typeface="Times New Roman" pitchFamily="34" charset="-122"/>
+                          <a:cs typeface="Times New Roman" pitchFamily="34" charset="-120"/>
                         </a:rPr>
                         <a:t>v 3</a:t>
                       </a:r>
                       <a:endParaRPr lang="en-US" sz="800" dirty="0">
-                        <a:latin typeface="Arial" charset="0"/>
-                        <a:ea typeface="Arial" charset="0"/>
-                        <a:cs typeface="Arial" charset="0"/>
+                        <a:latin typeface="Times New Roman" charset="0"/>
+                        <a:ea typeface="Times New Roman" charset="0"/>
+                        <a:cs typeface="Times New Roman" charset="0"/>
                       </a:endParaRPr>
                     </a:p>
                   </a:txBody>
@@ -14153,16 +14153,16 @@
                           <a:solidFill>
                             <a:srgbClr val="000000"/>
                           </a:solidFill>
-                          <a:latin typeface="Arial" pitchFamily="34" charset="0"/>
-                          <a:ea typeface="Arial" pitchFamily="34" charset="-122"/>
-                          <a:cs typeface="Arial" pitchFamily="34" charset="-120"/>
+                          <a:latin typeface="Times New Roman" pitchFamily="34" charset="0"/>
+                          <a:ea typeface="Times New Roman" pitchFamily="34" charset="-122"/>
+                          <a:cs typeface="Times New Roman" pitchFamily="34" charset="-120"/>
                         </a:rPr>
                         <a:t>Heima, CoLaR 4</a:t>
                       </a:r>
                       <a:endParaRPr lang="en-US" sz="800" dirty="0">
-                        <a:latin typeface="Arial" charset="0"/>
-                        <a:ea typeface="Arial" charset="0"/>
-                        <a:cs typeface="Arial" charset="0"/>
+                        <a:latin typeface="Times New Roman" charset="0"/>
+                        <a:ea typeface="Times New Roman" charset="0"/>
+                        <a:cs typeface="Times New Roman" charset="0"/>
                       </a:endParaRPr>
                     </a:p>
                   </a:txBody>
@@ -14220,16 +14220,16 @@
                           <a:solidFill>
                             <a:srgbClr val="000000"/>
                           </a:solidFill>
-                          <a:latin typeface="Arial" pitchFamily="34" charset="0"/>
-                          <a:ea typeface="Arial" pitchFamily="34" charset="-122"/>
-                          <a:cs typeface="Arial" pitchFamily="34" charset="-120"/>
+                          <a:latin typeface="Times New Roman" pitchFamily="34" charset="0"/>
+                          <a:ea typeface="Times New Roman" pitchFamily="34" charset="-122"/>
+                          <a:cs typeface="Times New Roman" pitchFamily="34" charset="-120"/>
                         </a:rPr>
                         <a:t>Flow / diffusion latents</a:t>
                       </a:r>
                       <a:endParaRPr lang="en-US" sz="800" dirty="0">
-                        <a:latin typeface="Arial" charset="0"/>
-                        <a:ea typeface="Arial" charset="0"/>
-                        <a:cs typeface="Arial" charset="0"/>
+                        <a:latin typeface="Times New Roman" charset="0"/>
+                        <a:ea typeface="Times New Roman" charset="0"/>
+                        <a:cs typeface="Times New Roman" charset="0"/>
                       </a:endParaRPr>
                     </a:p>
                   </a:txBody>
@@ -14285,16 +14285,16 @@
                           <a:solidFill>
                             <a:srgbClr val="000000"/>
                           </a:solidFill>
-                          <a:latin typeface="Arial" pitchFamily="34" charset="0"/>
-                          <a:ea typeface="Arial" pitchFamily="34" charset="-122"/>
-                          <a:cs typeface="Arial" pitchFamily="34" charset="-120"/>
+                          <a:latin typeface="Times New Roman" pitchFamily="34" charset="0"/>
+                          <a:ea typeface="Times New Roman" pitchFamily="34" charset="-122"/>
+                          <a:cs typeface="Times New Roman" pitchFamily="34" charset="-120"/>
                         </a:rPr>
                         <a:t>VAE latent space</a:t>
                       </a:r>
                       <a:endParaRPr lang="en-US" sz="800" dirty="0">
-                        <a:latin typeface="Arial" charset="0"/>
-                        <a:ea typeface="Arial" charset="0"/>
-                        <a:cs typeface="Arial" charset="0"/>
+                        <a:latin typeface="Times New Roman" charset="0"/>
+                        <a:ea typeface="Times New Roman" charset="0"/>
+                        <a:cs typeface="Times New Roman" charset="0"/>
                       </a:endParaRPr>
                     </a:p>
                   </a:txBody>
@@ -14350,16 +14350,16 @@
                           <a:solidFill>
                             <a:srgbClr val="000000"/>
                           </a:solidFill>
-                          <a:latin typeface="Arial" pitchFamily="34" charset="0"/>
-                          <a:ea typeface="Arial" pitchFamily="34" charset="-122"/>
-                          <a:cs typeface="Arial" pitchFamily="34" charset="-120"/>
+                          <a:latin typeface="Times New Roman" pitchFamily="34" charset="0"/>
+                          <a:ea typeface="Times New Roman" pitchFamily="34" charset="-122"/>
+                          <a:cs typeface="Times New Roman" pitchFamily="34" charset="-120"/>
                         </a:rPr>
                         <a:t>v</a:t>
                       </a:r>
                       <a:endParaRPr lang="en-US" sz="800" dirty="0">
-                        <a:latin typeface="Arial" charset="0"/>
-                        <a:ea typeface="Arial" charset="0"/>
-                        <a:cs typeface="Arial" charset="0"/>
+                        <a:latin typeface="Times New Roman" charset="0"/>
+                        <a:ea typeface="Times New Roman" charset="0"/>
+                        <a:cs typeface="Times New Roman" charset="0"/>
                       </a:endParaRPr>
                     </a:p>
                   </a:txBody>
@@ -14415,16 +14415,16 @@
                           <a:solidFill>
                             <a:srgbClr val="000000"/>
                           </a:solidFill>
-                          <a:latin typeface="Arial" pitchFamily="34" charset="0"/>
-                          <a:ea typeface="Arial" pitchFamily="34" charset="-122"/>
-                          <a:cs typeface="Arial" pitchFamily="34" charset="-120"/>
+                          <a:latin typeface="Times New Roman" pitchFamily="34" charset="0"/>
+                          <a:ea typeface="Times New Roman" pitchFamily="34" charset="-122"/>
+                          <a:cs typeface="Times New Roman" pitchFamily="34" charset="-120"/>
                         </a:rPr>
                         <a:t>–</a:t>
                       </a:r>
                       <a:endParaRPr lang="en-US" sz="800" dirty="0">
-                        <a:latin typeface="Arial" charset="0"/>
-                        <a:ea typeface="Arial" charset="0"/>
-                        <a:cs typeface="Arial" charset="0"/>
+                        <a:latin typeface="Times New Roman" charset="0"/>
+                        <a:ea typeface="Times New Roman" charset="0"/>
+                        <a:cs typeface="Times New Roman" charset="0"/>
                       </a:endParaRPr>
                     </a:p>
                   </a:txBody>
@@ -14480,16 +14480,16 @@
                           <a:solidFill>
                             <a:srgbClr val="000000"/>
                           </a:solidFill>
-                          <a:latin typeface="Arial" pitchFamily="34" charset="0"/>
-                          <a:ea typeface="Arial" pitchFamily="34" charset="-122"/>
-                          <a:cs typeface="Arial" pitchFamily="34" charset="-120"/>
+                          <a:latin typeface="Times New Roman" pitchFamily="34" charset="0"/>
+                          <a:ea typeface="Times New Roman" pitchFamily="34" charset="-122"/>
+                          <a:cs typeface="Times New Roman" pitchFamily="34" charset="-120"/>
                         </a:rPr>
                         <a:t>LaDiR, FLaRe</a:t>
                       </a:r>
                       <a:endParaRPr lang="en-US" sz="800" dirty="0">
-                        <a:latin typeface="Arial" charset="0"/>
-                        <a:ea typeface="Arial" charset="0"/>
-                        <a:cs typeface="Arial" charset="0"/>
+                        <a:latin typeface="Times New Roman" charset="0"/>
+                        <a:ea typeface="Times New Roman" charset="0"/>
+                        <a:cs typeface="Times New Roman" charset="0"/>
                       </a:endParaRPr>
                     </a:p>
                   </a:txBody>
@@ -14566,9 +14566,9 @@
                 <a:solidFill>
                   <a:srgbClr val="595959"/>
                 </a:solidFill>
-                <a:latin typeface="Arial" pitchFamily="34" charset="0"/>
-                <a:ea typeface="Arial" pitchFamily="34" charset="-122"/>
-                <a:cs typeface="Arial" pitchFamily="34" charset="-120"/>
+                <a:latin typeface="Times New Roman" pitchFamily="34" charset="0"/>
+                <a:ea typeface="Times New Roman" pitchFamily="34" charset="-122"/>
+                <a:cs typeface="Times New Roman" pitchFamily="34" charset="-120"/>
               </a:rPr>
               <a:t>1 Recoverable to text through an auxiliary decoder (VQ-VAE / VAE decoder, SAE features), not directly readable.</a:t>
             </a:r>
@@ -14583,9 +14583,9 @@
                 <a:solidFill>
                   <a:srgbClr val="595959"/>
                 </a:solidFill>
-                <a:latin typeface="Arial" pitchFamily="34" charset="0"/>
-                <a:ea typeface="Arial" pitchFamily="34" charset="-122"/>
-                <a:cs typeface="Arial" pitchFamily="34" charset="-120"/>
+                <a:latin typeface="Times New Roman" pitchFamily="34" charset="0"/>
+                <a:ea typeface="Times New Roman" pitchFamily="34" charset="-122"/>
+                <a:cs typeface="Times New Roman" pitchFamily="34" charset="-120"/>
               </a:rPr>
               <a:t>2 No native thought distribution; sampling can be bolted on afterwards.</a:t>
             </a:r>
@@ -14600,9 +14600,9 @@
                 <a:solidFill>
                   <a:srgbClr val="595959"/>
                 </a:solidFill>
-                <a:latin typeface="Arial" pitchFamily="34" charset="0"/>
-                <a:ea typeface="Arial" pitchFamily="34" charset="-122"/>
-                <a:cs typeface="Arial" pitchFamily="34" charset="-120"/>
+                <a:latin typeface="Times New Roman" pitchFamily="34" charset="0"/>
+                <a:ea typeface="Times New Roman" pitchFamily="34" charset="-122"/>
+                <a:cs typeface="Times New Roman" pitchFamily="34" charset="-120"/>
               </a:rPr>
               <a:t>3 Heima ships an explainer that partially decodes its thinking tokens.</a:t>
             </a:r>
@@ -14617,9 +14617,9 @@
                 <a:solidFill>
                   <a:srgbClr val="595959"/>
                 </a:solidFill>
-                <a:latin typeface="Arial" pitchFamily="34" charset="0"/>
-                <a:ea typeface="Arial" pitchFamily="34" charset="-122"/>
-                <a:cs typeface="Arial" pitchFamily="34" charset="-120"/>
+                <a:latin typeface="Times New Roman" pitchFamily="34" charset="0"/>
+                <a:ea typeface="Times New Roman" pitchFamily="34" charset="-122"/>
+                <a:cs typeface="Times New Roman" pitchFamily="34" charset="-120"/>
               </a:rPr>
               <a:t>4 CoLaR: latent head predicts a distribution over compressed embeddings.</a:t>
             </a:r>
@@ -14659,9 +14659,9 @@
                 <a:solidFill>
                   <a:srgbClr val="000000"/>
                 </a:solidFill>
-                <a:latin typeface="Arial"/>
-                <a:ea typeface="Arial"/>
-                <a:cs typeface="Arial"/>
+                <a:latin typeface="Times New Roman"/>
+                <a:ea typeface="Times New Roman"/>
+                <a:cs typeface="Times New Roman"/>
               </a:defRPr>
             </a:lvl1pPr>
           </a:lstStyle>
@@ -14807,9 +14807,9 @@
                 <a:solidFill>
                   <a:srgbClr val="000000"/>
                 </a:solidFill>
-                <a:latin typeface="Arial" pitchFamily="34" charset="0"/>
-                <a:ea typeface="Arial" pitchFamily="34" charset="-122"/>
-                <a:cs typeface="Arial" pitchFamily="34" charset="-120"/>
+                <a:latin typeface="Times New Roman" pitchFamily="34" charset="0"/>
+                <a:ea typeface="Times New Roman" pitchFamily="34" charset="-122"/>
+                <a:cs typeface="Times New Roman" pitchFamily="34" charset="-120"/>
               </a:rPr>
               <a:t>*1</a:t>
             </a:r>
@@ -14821,9 +14821,9 @@
                 <a:solidFill>
                   <a:srgbClr val="000000"/>
                 </a:solidFill>
-                <a:latin typeface="Arial" pitchFamily="34" charset="0"/>
-                <a:ea typeface="Arial" pitchFamily="34" charset="-122"/>
-                <a:cs typeface="Arial" pitchFamily="34" charset="-120"/>
+                <a:latin typeface="Times New Roman" pitchFamily="34" charset="0"/>
+                <a:ea typeface="Times New Roman" pitchFamily="34" charset="-122"/>
+                <a:cs typeface="Times New Roman" pitchFamily="34" charset="-120"/>
               </a:rPr>
               <a:t> </a:t>
             </a:r>
@@ -14835,9 +14835,9 @@
                 <a:solidFill>
                   <a:srgbClr val="0000EE"/>
                 </a:solidFill>
-                <a:latin typeface="Arial" pitchFamily="34" charset="0"/>
-                <a:ea typeface="Arial" pitchFamily="34" charset="-122"/>
-                <a:cs typeface="Arial" pitchFamily="34" charset="-120"/>
+                <a:latin typeface="Times New Roman" pitchFamily="34" charset="0"/>
+                <a:ea typeface="Times New Roman" pitchFamily="34" charset="-122"/>
+                <a:cs typeface="Times New Roman" pitchFamily="34" charset="-120"/>
                 <a:hlinkClick r:id="rId1" invalidUrl="" action="" tgtFrame="" tooltip="" history="1" highlightClick="0" endSnd="0">
                   <a:extLst>
                     <a:ext uri="{A12FA001-AC4F-418D-AE19-62706E023703}">
@@ -14881,9 +14881,9 @@
                 <a:solidFill>
                   <a:srgbClr val="000000"/>
                 </a:solidFill>
-                <a:latin typeface="Arial" pitchFamily="34" charset="0"/>
-                <a:ea typeface="Arial" pitchFamily="34" charset="-122"/>
-                <a:cs typeface="Arial" pitchFamily="34" charset="-120"/>
+                <a:latin typeface="Times New Roman" pitchFamily="34" charset="0"/>
+                <a:ea typeface="Times New Roman" pitchFamily="34" charset="-122"/>
+                <a:cs typeface="Times New Roman" pitchFamily="34" charset="-120"/>
               </a:rPr>
               <a:t>Share the transformer backbone between</a:t>
             </a:r>
@@ -14898,9 +14898,9 @@
                 <a:solidFill>
                   <a:srgbClr val="000000"/>
                 </a:solidFill>
-                <a:latin typeface="Arial" pitchFamily="34" charset="0"/>
-                <a:ea typeface="Arial" pitchFamily="34" charset="-122"/>
-                <a:cs typeface="Arial" pitchFamily="34" charset="-120"/>
+                <a:latin typeface="Times New Roman" pitchFamily="34" charset="0"/>
+                <a:ea typeface="Times New Roman" pitchFamily="34" charset="-122"/>
+                <a:cs typeface="Times New Roman" pitchFamily="34" charset="-120"/>
               </a:rPr>
               <a:t>- </a:t>
             </a:r>
@@ -14912,9 +14912,9 @@
                 <a:solidFill>
                   <a:srgbClr val="000000"/>
                 </a:solidFill>
-                <a:latin typeface="Arial" pitchFamily="34" charset="0"/>
-                <a:ea typeface="Arial" pitchFamily="34" charset="-122"/>
-                <a:cs typeface="Arial" pitchFamily="34" charset="-120"/>
+                <a:latin typeface="Times New Roman" pitchFamily="34" charset="0"/>
+                <a:ea typeface="Times New Roman" pitchFamily="34" charset="-122"/>
+                <a:cs typeface="Times New Roman" pitchFamily="34" charset="-120"/>
               </a:rPr>
               <a:t>autoregressive text generation</a:t>
             </a:r>
@@ -14929,9 +14929,9 @@
                 <a:solidFill>
                   <a:srgbClr val="000000"/>
                 </a:solidFill>
-                <a:latin typeface="Arial" pitchFamily="34" charset="0"/>
-                <a:ea typeface="Arial" pitchFamily="34" charset="-122"/>
-                <a:cs typeface="Arial" pitchFamily="34" charset="-120"/>
+                <a:latin typeface="Times New Roman" pitchFamily="34" charset="0"/>
+                <a:ea typeface="Times New Roman" pitchFamily="34" charset="-122"/>
+                <a:cs typeface="Times New Roman" pitchFamily="34" charset="-120"/>
               </a:rPr>
               <a:t>- </a:t>
             </a:r>
@@ -14943,9 +14943,9 @@
                 <a:solidFill>
                   <a:srgbClr val="000000"/>
                 </a:solidFill>
-                <a:latin typeface="Arial" pitchFamily="34" charset="0"/>
-                <a:ea typeface="Arial" pitchFamily="34" charset="-122"/>
-                <a:cs typeface="Arial" pitchFamily="34" charset="-120"/>
+                <a:latin typeface="Times New Roman" pitchFamily="34" charset="0"/>
+                <a:ea typeface="Times New Roman" pitchFamily="34" charset="-122"/>
+                <a:cs typeface="Times New Roman" pitchFamily="34" charset="-120"/>
               </a:rPr>
               <a:t>image generation (denoising)</a:t>
             </a:r>
@@ -14957,9 +14957,9 @@
                 <a:solidFill>
                   <a:srgbClr val="000000"/>
                 </a:solidFill>
-                <a:latin typeface="Arial" pitchFamily="34" charset="0"/>
-                <a:ea typeface="Arial" pitchFamily="34" charset="-122"/>
-                <a:cs typeface="Arial" pitchFamily="34" charset="-120"/>
+                <a:latin typeface="Times New Roman" pitchFamily="34" charset="0"/>
+                <a:ea typeface="Times New Roman" pitchFamily="34" charset="-122"/>
+                <a:cs typeface="Times New Roman" pitchFamily="34" charset="-120"/>
               </a:rPr>
               <a:t>, modality-specific layers only at the input and output</a:t>
             </a:r>
@@ -14974,9 +14974,9 @@
                 <a:solidFill>
                   <a:srgbClr val="000000"/>
                 </a:solidFill>
-                <a:latin typeface="Arial" pitchFamily="34" charset="0"/>
-                <a:ea typeface="Arial" pitchFamily="34" charset="-122"/>
-                <a:cs typeface="Arial" pitchFamily="34" charset="-120"/>
+                <a:latin typeface="Times New Roman" pitchFamily="34" charset="0"/>
+                <a:ea typeface="Times New Roman" pitchFamily="34" charset="-122"/>
+                <a:cs typeface="Times New Roman" pitchFamily="34" charset="-120"/>
               </a:rPr>
               <a:t>- Our analogue: one backbone for the answer tokens and the latent thought, a head per modality</a:t>
             </a:r>
@@ -15064,9 +15064,9 @@
                 <a:solidFill>
                   <a:srgbClr val="000000"/>
                 </a:solidFill>
-                <a:latin typeface="Arial"/>
-                <a:ea typeface="Arial"/>
-                <a:cs typeface="Arial"/>
+                <a:latin typeface="Times New Roman"/>
+                <a:ea typeface="Times New Roman"/>
+                <a:cs typeface="Times New Roman"/>
               </a:defRPr>
             </a:lvl1pPr>
           </a:lstStyle>
@@ -15212,9 +15212,9 @@
                 <a:solidFill>
                   <a:srgbClr val="000000"/>
                 </a:solidFill>
-                <a:latin typeface="Arial" pitchFamily="34" charset="0"/>
-                <a:ea typeface="Arial" pitchFamily="34" charset="-122"/>
-                <a:cs typeface="Arial" pitchFamily="34" charset="-120"/>
+                <a:latin typeface="Times New Roman" pitchFamily="34" charset="0"/>
+                <a:ea typeface="Times New Roman" pitchFamily="34" charset="-122"/>
+                <a:cs typeface="Times New Roman" pitchFamily="34" charset="-120"/>
               </a:rPr>
               <a:t>*1</a:t>
             </a:r>
@@ -15226,9 +15226,9 @@
                 <a:solidFill>
                   <a:srgbClr val="000000"/>
                 </a:solidFill>
-                <a:latin typeface="Arial" pitchFamily="34" charset="0"/>
-                <a:ea typeface="Arial" pitchFamily="34" charset="-122"/>
-                <a:cs typeface="Arial" pitchFamily="34" charset="-120"/>
+                <a:latin typeface="Times New Roman" pitchFamily="34" charset="0"/>
+                <a:ea typeface="Times New Roman" pitchFamily="34" charset="-122"/>
+                <a:cs typeface="Times New Roman" pitchFamily="34" charset="-120"/>
               </a:rPr>
               <a:t> </a:t>
             </a:r>
@@ -15240,9 +15240,9 @@
                 <a:solidFill>
                   <a:srgbClr val="0000EE"/>
                 </a:solidFill>
-                <a:latin typeface="Arial" pitchFamily="34" charset="0"/>
-                <a:ea typeface="Arial" pitchFamily="34" charset="-122"/>
-                <a:cs typeface="Arial" pitchFamily="34" charset="-120"/>
+                <a:latin typeface="Times New Roman" pitchFamily="34" charset="0"/>
+                <a:ea typeface="Times New Roman" pitchFamily="34" charset="-122"/>
+                <a:cs typeface="Times New Roman" pitchFamily="34" charset="-120"/>
                 <a:hlinkClick r:id="rId1" invalidUrl="" action="" tgtFrame="" tooltip="" history="1" highlightClick="0" endSnd="0">
                   <a:extLst>
                     <a:ext uri="{A12FA001-AC4F-418D-AE19-62706E023703}">
@@ -15466,9 +15466,9 @@
                 <a:solidFill>
                   <a:srgbClr val="000000"/>
                 </a:solidFill>
-                <a:latin typeface="Arial" pitchFamily="34" charset="0"/>
-                <a:ea typeface="Arial" pitchFamily="34" charset="-122"/>
-                <a:cs typeface="Arial" pitchFamily="34" charset="-120"/>
+                <a:latin typeface="Times New Roman" pitchFamily="34" charset="0"/>
+                <a:ea typeface="Times New Roman" pitchFamily="34" charset="-122"/>
+                <a:cs typeface="Times New Roman" pitchFamily="34" charset="-120"/>
               </a:rPr>
               <a:t>Logical consistency</a:t>
             </a:r>
@@ -15483,9 +15483,9 @@
                 <a:solidFill>
                   <a:srgbClr val="000000"/>
                 </a:solidFill>
-                <a:latin typeface="Arial" pitchFamily="34" charset="0"/>
-                <a:ea typeface="Arial" pitchFamily="34" charset="-122"/>
-                <a:cs typeface="Arial" pitchFamily="34" charset="-120"/>
+                <a:latin typeface="Times New Roman" pitchFamily="34" charset="0"/>
+                <a:ea typeface="Times New Roman" pitchFamily="34" charset="-122"/>
+                <a:cs typeface="Times New Roman" pitchFamily="34" charset="-120"/>
               </a:rPr>
               <a:t>- Currently no good idea about this part</a:t>
             </a:r>
@@ -15500,9 +15500,9 @@
                 <a:solidFill>
                   <a:srgbClr val="000000"/>
                 </a:solidFill>
-                <a:latin typeface="Arial" pitchFamily="34" charset="0"/>
-                <a:ea typeface="Arial" pitchFamily="34" charset="-122"/>
-                <a:cs typeface="Arial" pitchFamily="34" charset="-120"/>
+                <a:latin typeface="Times New Roman" pitchFamily="34" charset="0"/>
+                <a:ea typeface="Times New Roman" pitchFamily="34" charset="-122"/>
+                <a:cs typeface="Times New Roman" pitchFamily="34" charset="-120"/>
               </a:rPr>
               <a:t>- Might need another judge model; too many axes to tune</a:t>
             </a:r>
@@ -15566,9 +15566,9 @@
                 <a:solidFill>
                   <a:srgbClr val="000000"/>
                 </a:solidFill>
-                <a:latin typeface="Arial"/>
-                <a:ea typeface="Arial"/>
-                <a:cs typeface="Arial"/>
+                <a:latin typeface="Times New Roman"/>
+                <a:ea typeface="Times New Roman"/>
+                <a:cs typeface="Times New Roman"/>
               </a:defRPr>
             </a:lvl1pPr>
           </a:lstStyle>
@@ -15685,7 +15685,7 @@
         <a:font script="Tfng" typeface="Ebrima"/>
       </a:majorFont>
       <a:minorFont>
-        <a:latin typeface="Arial"/>
+        <a:latin typeface="Times New Roman"/>
         <a:ea typeface=""/>
         <a:cs typeface=""/>
         <a:font script="Jpan" typeface="游ゴシック"/>
